--- a/ゲーム科3年/00_前期/オンラインゲームプログラミングⅠ/11_当たり判定.pptx
+++ b/ゲーム科3年/00_前期/オンラインゲームプログラミングⅠ/11_当たり判定.pptx
@@ -9,29 +9,11 @@
     <p:sldId id="257" r:id="rId3"/>
     <p:sldId id="258" r:id="rId4"/>
     <p:sldId id="259" r:id="rId5"/>
-    <p:sldId id="264" r:id="rId6"/>
+    <p:sldId id="260" r:id="rId6"/>
     <p:sldId id="261" r:id="rId7"/>
     <p:sldId id="262" r:id="rId8"/>
     <p:sldId id="263" r:id="rId9"/>
-    <p:sldId id="260" r:id="rId10"/>
-    <p:sldId id="265" r:id="rId11"/>
-    <p:sldId id="266" r:id="rId12"/>
-    <p:sldId id="268" r:id="rId13"/>
-    <p:sldId id="267" r:id="rId14"/>
-    <p:sldId id="269" r:id="rId15"/>
-    <p:sldId id="270" r:id="rId16"/>
-    <p:sldId id="271" r:id="rId17"/>
-    <p:sldId id="272" r:id="rId18"/>
-    <p:sldId id="274" r:id="rId19"/>
-    <p:sldId id="273" r:id="rId20"/>
-    <p:sldId id="275" r:id="rId21"/>
-    <p:sldId id="276" r:id="rId22"/>
-    <p:sldId id="277" r:id="rId23"/>
-    <p:sldId id="278" r:id="rId24"/>
-    <p:sldId id="279" r:id="rId25"/>
-    <p:sldId id="280" r:id="rId26"/>
-    <p:sldId id="281" r:id="rId27"/>
-    <p:sldId id="282" r:id="rId28"/>
+    <p:sldId id="264" r:id="rId10"/>
   </p:sldIdLst>
   <p:sldSz cx="12192000" cy="6858000"/>
   <p:notesSz cx="6858000" cy="9144000"/>
@@ -285,7 +267,7 @@
           <a:p>
             <a:fld id="{E9CC885B-4903-4D54-9A93-00025F12DED9}" type="datetimeFigureOut">
               <a:rPr kumimoji="1" lang="ja-JP" altLang="en-US" smtClean="0"/>
-              <a:t>2025/11/6</a:t>
+              <a:t>2025/12/11</a:t>
             </a:fld>
             <a:endParaRPr kumimoji="1" lang="ja-JP" altLang="en-US"/>
           </a:p>
@@ -515,7 +497,7 @@
           <a:p>
             <a:fld id="{E9CC885B-4903-4D54-9A93-00025F12DED9}" type="datetimeFigureOut">
               <a:rPr kumimoji="1" lang="ja-JP" altLang="en-US" smtClean="0"/>
-              <a:t>2025/11/6</a:t>
+              <a:t>2025/12/11</a:t>
             </a:fld>
             <a:endParaRPr kumimoji="1" lang="ja-JP" altLang="en-US"/>
           </a:p>
@@ -755,7 +737,7 @@
           <a:p>
             <a:fld id="{E9CC885B-4903-4D54-9A93-00025F12DED9}" type="datetimeFigureOut">
               <a:rPr kumimoji="1" lang="ja-JP" altLang="en-US" smtClean="0"/>
-              <a:t>2025/11/6</a:t>
+              <a:t>2025/12/11</a:t>
             </a:fld>
             <a:endParaRPr kumimoji="1" lang="ja-JP" altLang="en-US"/>
           </a:p>
@@ -985,7 +967,7 @@
           <a:p>
             <a:fld id="{E9CC885B-4903-4D54-9A93-00025F12DED9}" type="datetimeFigureOut">
               <a:rPr kumimoji="1" lang="ja-JP" altLang="en-US" smtClean="0"/>
-              <a:t>2025/11/6</a:t>
+              <a:t>2025/12/11</a:t>
             </a:fld>
             <a:endParaRPr kumimoji="1" lang="ja-JP" altLang="en-US"/>
           </a:p>
@@ -1260,7 +1242,7 @@
           <a:p>
             <a:fld id="{E9CC885B-4903-4D54-9A93-00025F12DED9}" type="datetimeFigureOut">
               <a:rPr kumimoji="1" lang="ja-JP" altLang="en-US" smtClean="0"/>
-              <a:t>2025/11/6</a:t>
+              <a:t>2025/12/11</a:t>
             </a:fld>
             <a:endParaRPr kumimoji="1" lang="ja-JP" altLang="en-US"/>
           </a:p>
@@ -1589,7 +1571,7 @@
           <a:p>
             <a:fld id="{E9CC885B-4903-4D54-9A93-00025F12DED9}" type="datetimeFigureOut">
               <a:rPr kumimoji="1" lang="ja-JP" altLang="en-US" smtClean="0"/>
-              <a:t>2025/11/6</a:t>
+              <a:t>2025/12/11</a:t>
             </a:fld>
             <a:endParaRPr kumimoji="1" lang="ja-JP" altLang="en-US"/>
           </a:p>
@@ -2065,7 +2047,7 @@
           <a:p>
             <a:fld id="{E9CC885B-4903-4D54-9A93-00025F12DED9}" type="datetimeFigureOut">
               <a:rPr kumimoji="1" lang="ja-JP" altLang="en-US" smtClean="0"/>
-              <a:t>2025/11/6</a:t>
+              <a:t>2025/12/11</a:t>
             </a:fld>
             <a:endParaRPr kumimoji="1" lang="ja-JP" altLang="en-US"/>
           </a:p>
@@ -2206,7 +2188,7 @@
           <a:p>
             <a:fld id="{E9CC885B-4903-4D54-9A93-00025F12DED9}" type="datetimeFigureOut">
               <a:rPr kumimoji="1" lang="ja-JP" altLang="en-US" smtClean="0"/>
-              <a:t>2025/11/6</a:t>
+              <a:t>2025/12/11</a:t>
             </a:fld>
             <a:endParaRPr kumimoji="1" lang="ja-JP" altLang="en-US"/>
           </a:p>
@@ -2319,7 +2301,7 @@
           <a:p>
             <a:fld id="{E9CC885B-4903-4D54-9A93-00025F12DED9}" type="datetimeFigureOut">
               <a:rPr kumimoji="1" lang="ja-JP" altLang="en-US" smtClean="0"/>
-              <a:t>2025/11/6</a:t>
+              <a:t>2025/12/11</a:t>
             </a:fld>
             <a:endParaRPr kumimoji="1" lang="ja-JP" altLang="en-US"/>
           </a:p>
@@ -2662,7 +2644,7 @@
           <a:p>
             <a:fld id="{E9CC885B-4903-4D54-9A93-00025F12DED9}" type="datetimeFigureOut">
               <a:rPr kumimoji="1" lang="ja-JP" altLang="en-US" smtClean="0"/>
-              <a:t>2025/11/6</a:t>
+              <a:t>2025/12/11</a:t>
             </a:fld>
             <a:endParaRPr kumimoji="1" lang="ja-JP" altLang="en-US"/>
           </a:p>
@@ -2950,7 +2932,7 @@
           <a:p>
             <a:fld id="{E9CC885B-4903-4D54-9A93-00025F12DED9}" type="datetimeFigureOut">
               <a:rPr kumimoji="1" lang="ja-JP" altLang="en-US" smtClean="0"/>
-              <a:t>2025/11/6</a:t>
+              <a:t>2025/12/11</a:t>
             </a:fld>
             <a:endParaRPr kumimoji="1" lang="ja-JP" altLang="en-US"/>
           </a:p>
@@ -3223,7 +3205,7 @@
           <a:p>
             <a:fld id="{E9CC885B-4903-4D54-9A93-00025F12DED9}" type="datetimeFigureOut">
               <a:rPr kumimoji="1" lang="ja-JP" altLang="en-US" smtClean="0"/>
-              <a:t>2025/11/6</a:t>
+              <a:t>2025/12/11</a:t>
             </a:fld>
             <a:endParaRPr kumimoji="1" lang="ja-JP" altLang="en-US"/>
           </a:p>
@@ -3655,7 +3637,7 @@
         <p:spPr>
           <a:xfrm>
             <a:off x="567542" y="491954"/>
-            <a:ext cx="3057247" cy="584775"/>
+            <a:ext cx="2236510" cy="2554545"/>
           </a:xfrm>
           <a:prstGeom prst="rect">
             <a:avLst/>
@@ -3670,8 +3652,21 @@
           <a:p>
             <a:r>
               <a:rPr kumimoji="1" lang="ja-JP" altLang="en-US" sz="3200" b="1" u="sng" dirty="0"/>
-              <a:t>プレイヤー同期</a:t>
-            </a:r>
+              <a:t>当たり判定</a:t>
+            </a:r>
+            <a:endParaRPr kumimoji="1" lang="en-US" altLang="ja-JP" sz="3200" b="1" u="sng" dirty="0"/>
+          </a:p>
+          <a:p>
+            <a:endParaRPr lang="en-US" altLang="ja-JP" sz="3200" b="1" u="sng" dirty="0"/>
+          </a:p>
+          <a:p>
+            <a:endParaRPr kumimoji="1" lang="en-US" altLang="ja-JP" sz="3200" b="1" u="sng" dirty="0"/>
+          </a:p>
+          <a:p>
+            <a:endParaRPr lang="en-US" altLang="ja-JP" sz="3200" b="1" u="sng" dirty="0"/>
+          </a:p>
+          <a:p>
+            <a:endParaRPr kumimoji="1" lang="ja-JP" altLang="en-US" sz="3200" b="1" u="sng" dirty="0"/>
           </a:p>
         </p:txBody>
       </p:sp>
@@ -3690,7 +3685,7 @@
         <p:spPr>
           <a:xfrm>
             <a:off x="567542" y="1216429"/>
-            <a:ext cx="9725739" cy="830997"/>
+            <a:ext cx="8494633" cy="1200329"/>
           </a:xfrm>
           <a:prstGeom prst="rect">
             <a:avLst/>
@@ -3705,726 +3700,210 @@
           <a:p>
             <a:r>
               <a:rPr lang="ja-JP" altLang="en-US" sz="2400" dirty="0"/>
-              <a:t>オンラインゲームでは、</a:t>
+              <a:t>プレイヤー同士が衝突したら死亡させます。</a:t>
             </a:r>
             <a:endParaRPr lang="en-US" altLang="ja-JP" sz="2400" dirty="0"/>
           </a:p>
           <a:p>
             <a:r>
               <a:rPr lang="ja-JP" altLang="en-US" sz="2400" dirty="0"/>
-              <a:t>プレイヤーの位置などを全クライアントで揃えなければいけません。</a:t>
+              <a:t>オンラインゲームでは</a:t>
+            </a:r>
+            <a:r>
+              <a:rPr lang="ja-JP" altLang="en-US" sz="2400" b="1" dirty="0">
+                <a:solidFill>
+                  <a:srgbClr val="FF0000"/>
+                </a:solidFill>
+              </a:rPr>
+              <a:t>サーバー側に正しい座標がある</a:t>
+            </a:r>
+            <a:r>
+              <a:rPr lang="ja-JP" altLang="en-US" sz="2400" dirty="0"/>
+              <a:t>ため、</a:t>
             </a:r>
             <a:endParaRPr lang="en-US" altLang="ja-JP" sz="2400" dirty="0"/>
           </a:p>
-        </p:txBody>
-      </p:sp>
-      <p:pic>
-        <p:nvPicPr>
-          <p:cNvPr id="3" name="図 2">
-            <a:extLst>
-              <a:ext uri="{FF2B5EF4-FFF2-40B4-BE49-F238E27FC236}">
-                <a16:creationId xmlns:a16="http://schemas.microsoft.com/office/drawing/2014/main" id="{A55D47F0-8C27-45EB-B4B5-081427F771C5}"/>
-              </a:ext>
-            </a:extLst>
-          </p:cNvPr>
-          <p:cNvPicPr>
-            <a:picLocks noChangeAspect="1"/>
-          </p:cNvPicPr>
+          <a:p>
+            <a:r>
+              <a:rPr lang="ja-JP" altLang="en-US" sz="2400" dirty="0"/>
+              <a:t>サーバー側で当たり判定をする必要があります。</a:t>
+            </a:r>
+            <a:endParaRPr lang="en-US" altLang="ja-JP" sz="2400" dirty="0"/>
+          </a:p>
+        </p:txBody>
+      </p:sp>
+      <p:sp>
+        <p:nvSpPr>
+          <p:cNvPr id="2" name="正方形/長方形 1">
+            <a:extLst>
+              <a:ext uri="{FF2B5EF4-FFF2-40B4-BE49-F238E27FC236}">
+                <a16:creationId xmlns:a16="http://schemas.microsoft.com/office/drawing/2014/main" id="{655E350E-489F-47DF-91D0-6DC5862322B1}"/>
+              </a:ext>
+            </a:extLst>
+          </p:cNvPr>
+          <p:cNvSpPr/>
           <p:nvPr/>
-        </p:nvPicPr>
-        <p:blipFill>
-          <a:blip r:embed="rId2"/>
-          <a:stretch>
-            <a:fillRect/>
-          </a:stretch>
-        </p:blipFill>
+        </p:nvSpPr>
         <p:spPr>
           <a:xfrm>
-            <a:off x="567542" y="2187126"/>
-            <a:ext cx="6030658" cy="4178920"/>
+            <a:off x="567542" y="2907825"/>
+            <a:ext cx="2345267" cy="3302000"/>
           </a:xfrm>
           <a:prstGeom prst="rect">
             <a:avLst/>
           </a:prstGeom>
         </p:spPr>
-      </p:pic>
-    </p:spTree>
-    <p:extLst>
-      <p:ext uri="{BB962C8B-B14F-4D97-AF65-F5344CB8AC3E}">
-        <p14:creationId xmlns:p14="http://schemas.microsoft.com/office/powerpoint/2010/main" val="410028988"/>
-      </p:ext>
-    </p:extLst>
-  </p:cSld>
-  <p:clrMapOvr>
-    <a:masterClrMapping/>
-  </p:clrMapOvr>
-</p:sld>
-</file>
-
-<file path=ppt/slides/slide10.xml><?xml version="1.0" encoding="utf-8"?>
-<p:sld xmlns:a="http://schemas.openxmlformats.org/drawingml/2006/main" xmlns:r="http://schemas.openxmlformats.org/officeDocument/2006/relationships" xmlns:p="http://schemas.openxmlformats.org/presentationml/2006/main">
-  <p:cSld>
-    <p:spTree>
-      <p:nvGrpSpPr>
-        <p:cNvPr id="1" name=""/>
-        <p:cNvGrpSpPr/>
-        <p:nvPr/>
-      </p:nvGrpSpPr>
-      <p:grpSpPr>
-        <a:xfrm>
-          <a:off x="0" y="0"/>
-          <a:ext cx="0" cy="0"/>
-          <a:chOff x="0" y="0"/>
-          <a:chExt cx="0" cy="0"/>
-        </a:xfrm>
-      </p:grpSpPr>
-      <p:sp>
-        <p:nvSpPr>
-          <p:cNvPr id="4" name="テキスト ボックス 3">
-            <a:extLst>
-              <a:ext uri="{FF2B5EF4-FFF2-40B4-BE49-F238E27FC236}">
-                <a16:creationId xmlns:a16="http://schemas.microsoft.com/office/drawing/2014/main" id="{5A13BF46-B8C5-48AA-8308-C9ECFF431A18}"/>
-              </a:ext>
-            </a:extLst>
-          </p:cNvPr>
-          <p:cNvSpPr txBox="1"/>
+        <p:style>
+          <a:lnRef idx="2">
+            <a:schemeClr val="accent6">
+              <a:shade val="50000"/>
+            </a:schemeClr>
+          </a:lnRef>
+          <a:fillRef idx="1">
+            <a:schemeClr val="accent6"/>
+          </a:fillRef>
+          <a:effectRef idx="0">
+            <a:schemeClr val="accent6"/>
+          </a:effectRef>
+          <a:fontRef idx="minor">
+            <a:schemeClr val="lt1"/>
+          </a:fontRef>
+        </p:style>
+        <p:txBody>
+          <a:bodyPr rtlCol="0" anchor="t"/>
+          <a:lstStyle/>
+          <a:p>
+            <a:pPr algn="ctr"/>
+            <a:endParaRPr kumimoji="1" lang="en-US" altLang="ja-JP" b="1" dirty="0"/>
+          </a:p>
+          <a:p>
+            <a:pPr algn="ctr"/>
+            <a:r>
+              <a:rPr kumimoji="1" lang="ja-JP" altLang="en-US" b="1" dirty="0"/>
+              <a:t>サーバー</a:t>
+            </a:r>
+          </a:p>
+        </p:txBody>
+      </p:sp>
+      <p:sp>
+        <p:nvSpPr>
+          <p:cNvPr id="5" name="正方形/長方形 4">
+            <a:extLst>
+              <a:ext uri="{FF2B5EF4-FFF2-40B4-BE49-F238E27FC236}">
+                <a16:creationId xmlns:a16="http://schemas.microsoft.com/office/drawing/2014/main" id="{B75EF356-ED12-4236-98AD-3EEECFC062C6}"/>
+              </a:ext>
+            </a:extLst>
+          </p:cNvPr>
+          <p:cNvSpPr/>
           <p:nvPr/>
         </p:nvSpPr>
         <p:spPr>
           <a:xfrm>
-            <a:off x="567542" y="491954"/>
-            <a:ext cx="3057247" cy="584775"/>
-          </a:xfrm>
-          <a:prstGeom prst="rect">
-            <a:avLst/>
-          </a:prstGeom>
-          <a:noFill/>
-        </p:spPr>
-        <p:txBody>
-          <a:bodyPr wrap="none" rtlCol="0">
-            <a:spAutoFit/>
-          </a:bodyPr>
-          <a:lstStyle/>
-          <a:p>
-            <a:r>
-              <a:rPr kumimoji="1" lang="ja-JP" altLang="en-US" sz="3200" b="1" u="sng" dirty="0"/>
-              <a:t>プレイヤー同期</a:t>
-            </a:r>
-          </a:p>
-        </p:txBody>
-      </p:sp>
-      <p:sp>
-        <p:nvSpPr>
-          <p:cNvPr id="6" name="テキスト ボックス 5">
-            <a:extLst>
-              <a:ext uri="{FF2B5EF4-FFF2-40B4-BE49-F238E27FC236}">
-                <a16:creationId xmlns:a16="http://schemas.microsoft.com/office/drawing/2014/main" id="{55830AD6-028B-4C4E-80BF-B70DFC1C3A46}"/>
-              </a:ext>
-            </a:extLst>
-          </p:cNvPr>
-          <p:cNvSpPr txBox="1"/>
-          <p:nvPr/>
-        </p:nvSpPr>
-        <p:spPr>
-          <a:xfrm>
-            <a:off x="567542" y="1216429"/>
-            <a:ext cx="8271816" cy="461665"/>
-          </a:xfrm>
-          <a:prstGeom prst="rect">
-            <a:avLst/>
-          </a:prstGeom>
-          <a:noFill/>
-        </p:spPr>
-        <p:txBody>
-          <a:bodyPr wrap="none" rtlCol="0">
-            <a:spAutoFit/>
-          </a:bodyPr>
-          <a:lstStyle/>
-          <a:p>
-            <a:r>
-              <a:rPr lang="ja-JP" altLang="en-US" sz="2400" dirty="0"/>
-              <a:t>座標の送信処理を書きましょう。（</a:t>
-            </a:r>
-            <a:r>
-              <a:rPr lang="en-US" altLang="ja-JP" sz="2400" b="1" dirty="0">
-                <a:solidFill>
-                  <a:srgbClr val="FF0000"/>
-                </a:solidFill>
-              </a:rPr>
-              <a:t>NetworkPlayer.cpp</a:t>
-            </a:r>
-            <a:r>
-              <a:rPr lang="ja-JP" altLang="en-US" sz="2400" dirty="0"/>
-              <a:t>）</a:t>
-            </a:r>
-            <a:endParaRPr lang="en-US" altLang="ja-JP" sz="2400" dirty="0"/>
-          </a:p>
-        </p:txBody>
-      </p:sp>
-      <p:pic>
-        <p:nvPicPr>
-          <p:cNvPr id="3" name="図 2">
-            <a:extLst>
-              <a:ext uri="{FF2B5EF4-FFF2-40B4-BE49-F238E27FC236}">
-                <a16:creationId xmlns:a16="http://schemas.microsoft.com/office/drawing/2014/main" id="{563E9B15-B8BC-4FF4-A386-633285F8D1E2}"/>
-              </a:ext>
-            </a:extLst>
-          </p:cNvPr>
-          <p:cNvPicPr>
-            <a:picLocks noChangeAspect="1"/>
-          </p:cNvPicPr>
-          <p:nvPr/>
-        </p:nvPicPr>
-        <p:blipFill>
-          <a:blip r:embed="rId2"/>
-          <a:stretch>
-            <a:fillRect/>
-          </a:stretch>
-        </p:blipFill>
-        <p:spPr>
-          <a:xfrm>
-            <a:off x="567542" y="1817794"/>
-            <a:ext cx="9973458" cy="2567109"/>
+            <a:off x="982133" y="3920067"/>
+            <a:ext cx="1532467" cy="1921933"/>
           </a:xfrm>
           <a:prstGeom prst="rect">
             <a:avLst/>
           </a:prstGeom>
         </p:spPr>
-      </p:pic>
-    </p:spTree>
-    <p:extLst>
-      <p:ext uri="{BB962C8B-B14F-4D97-AF65-F5344CB8AC3E}">
-        <p14:creationId xmlns:p14="http://schemas.microsoft.com/office/powerpoint/2010/main" val="1650269898"/>
-      </p:ext>
-    </p:extLst>
-  </p:cSld>
-  <p:clrMapOvr>
-    <a:masterClrMapping/>
-  </p:clrMapOvr>
-</p:sld>
-</file>
-
-<file path=ppt/slides/slide11.xml><?xml version="1.0" encoding="utf-8"?>
-<p:sld xmlns:a="http://schemas.openxmlformats.org/drawingml/2006/main" xmlns:r="http://schemas.openxmlformats.org/officeDocument/2006/relationships" xmlns:p="http://schemas.openxmlformats.org/presentationml/2006/main">
-  <p:cSld>
-    <p:spTree>
-      <p:nvGrpSpPr>
-        <p:cNvPr id="1" name=""/>
-        <p:cNvGrpSpPr/>
-        <p:nvPr/>
-      </p:nvGrpSpPr>
-      <p:grpSpPr>
-        <a:xfrm>
-          <a:off x="0" y="0"/>
-          <a:ext cx="0" cy="0"/>
-          <a:chOff x="0" y="0"/>
-          <a:chExt cx="0" cy="0"/>
-        </a:xfrm>
-      </p:grpSpPr>
-      <p:sp>
-        <p:nvSpPr>
-          <p:cNvPr id="4" name="テキスト ボックス 3">
-            <a:extLst>
-              <a:ext uri="{FF2B5EF4-FFF2-40B4-BE49-F238E27FC236}">
-                <a16:creationId xmlns:a16="http://schemas.microsoft.com/office/drawing/2014/main" id="{5A13BF46-B8C5-48AA-8308-C9ECFF431A18}"/>
-              </a:ext>
-            </a:extLst>
-          </p:cNvPr>
-          <p:cNvSpPr txBox="1"/>
+        <p:style>
+          <a:lnRef idx="2">
+            <a:schemeClr val="accent4">
+              <a:shade val="50000"/>
+            </a:schemeClr>
+          </a:lnRef>
+          <a:fillRef idx="1">
+            <a:schemeClr val="accent4"/>
+          </a:fillRef>
+          <a:effectRef idx="0">
+            <a:schemeClr val="accent4"/>
+          </a:effectRef>
+          <a:fontRef idx="minor">
+            <a:schemeClr val="lt1"/>
+          </a:fontRef>
+        </p:style>
+        <p:txBody>
+          <a:bodyPr rtlCol="0" anchor="ctr"/>
+          <a:lstStyle/>
+          <a:p>
+            <a:pPr algn="ctr"/>
+            <a:r>
+              <a:rPr kumimoji="1" lang="ja-JP" altLang="en-US" b="1" dirty="0"/>
+              <a:t>当たり判定</a:t>
+            </a:r>
+            <a:endParaRPr kumimoji="1" lang="en-US" altLang="ja-JP" b="1" dirty="0"/>
+          </a:p>
+        </p:txBody>
+      </p:sp>
+      <p:sp>
+        <p:nvSpPr>
+          <p:cNvPr id="7" name="矢印: 右 6">
+            <a:extLst>
+              <a:ext uri="{FF2B5EF4-FFF2-40B4-BE49-F238E27FC236}">
+                <a16:creationId xmlns:a16="http://schemas.microsoft.com/office/drawing/2014/main" id="{D50FBDF7-B965-43A5-8B3D-5667B038C981}"/>
+              </a:ext>
+            </a:extLst>
+          </p:cNvPr>
+          <p:cNvSpPr/>
           <p:nvPr/>
         </p:nvSpPr>
         <p:spPr>
           <a:xfrm>
-            <a:off x="567542" y="491954"/>
-            <a:ext cx="3057247" cy="584775"/>
+            <a:off x="2514598" y="4441243"/>
+            <a:ext cx="4944809" cy="770466"/>
+          </a:xfrm>
+          <a:prstGeom prst="rightArrow">
+            <a:avLst/>
+          </a:prstGeom>
+        </p:spPr>
+        <p:style>
+          <a:lnRef idx="2">
+            <a:schemeClr val="accent2">
+              <a:shade val="50000"/>
+            </a:schemeClr>
+          </a:lnRef>
+          <a:fillRef idx="1">
+            <a:schemeClr val="accent2"/>
+          </a:fillRef>
+          <a:effectRef idx="0">
+            <a:schemeClr val="accent2"/>
+          </a:effectRef>
+          <a:fontRef idx="minor">
+            <a:schemeClr val="lt1"/>
+          </a:fontRef>
+        </p:style>
+        <p:txBody>
+          <a:bodyPr rtlCol="0" anchor="ctr"/>
+          <a:lstStyle/>
+          <a:p>
+            <a:pPr algn="ctr"/>
+            <a:r>
+              <a:rPr kumimoji="1" lang="ja-JP" altLang="en-US" b="1" dirty="0"/>
+              <a:t>当たったから死亡させて</a:t>
+            </a:r>
+          </a:p>
+        </p:txBody>
+      </p:sp>
+      <p:sp>
+        <p:nvSpPr>
+          <p:cNvPr id="8" name="正方形/長方形 7">
+            <a:extLst>
+              <a:ext uri="{FF2B5EF4-FFF2-40B4-BE49-F238E27FC236}">
+                <a16:creationId xmlns:a16="http://schemas.microsoft.com/office/drawing/2014/main" id="{87372DD6-37BE-4E50-A554-ECF361B5C498}"/>
+              </a:ext>
+            </a:extLst>
+          </p:cNvPr>
+          <p:cNvSpPr/>
+          <p:nvPr/>
+        </p:nvSpPr>
+        <p:spPr>
+          <a:xfrm>
+            <a:off x="7459409" y="2907825"/>
+            <a:ext cx="2345267" cy="3302000"/>
           </a:xfrm>
           <a:prstGeom prst="rect">
             <a:avLst/>
           </a:prstGeom>
-          <a:noFill/>
-        </p:spPr>
-        <p:txBody>
-          <a:bodyPr wrap="none" rtlCol="0">
-            <a:spAutoFit/>
-          </a:bodyPr>
-          <a:lstStyle/>
-          <a:p>
-            <a:r>
-              <a:rPr kumimoji="1" lang="ja-JP" altLang="en-US" sz="3200" b="1" u="sng" dirty="0"/>
-              <a:t>プレイヤー同期</a:t>
-            </a:r>
-          </a:p>
-        </p:txBody>
-      </p:sp>
-      <p:sp>
-        <p:nvSpPr>
-          <p:cNvPr id="6" name="テキスト ボックス 5">
-            <a:extLst>
-              <a:ext uri="{FF2B5EF4-FFF2-40B4-BE49-F238E27FC236}">
-                <a16:creationId xmlns:a16="http://schemas.microsoft.com/office/drawing/2014/main" id="{55830AD6-028B-4C4E-80BF-B70DFC1C3A46}"/>
-              </a:ext>
-            </a:extLst>
-          </p:cNvPr>
-          <p:cNvSpPr txBox="1"/>
-          <p:nvPr/>
-        </p:nvSpPr>
-        <p:spPr>
-          <a:xfrm>
-            <a:off x="567542" y="1216429"/>
-            <a:ext cx="10155344" cy="461665"/>
-          </a:xfrm>
-          <a:prstGeom prst="rect">
-            <a:avLst/>
-          </a:prstGeom>
-          <a:noFill/>
-        </p:spPr>
-        <p:txBody>
-          <a:bodyPr wrap="none" rtlCol="0">
-            <a:spAutoFit/>
-          </a:bodyPr>
-          <a:lstStyle/>
-          <a:p>
-            <a:r>
-              <a:rPr lang="en-US" altLang="ja-JP" sz="2400" b="1" dirty="0">
-                <a:solidFill>
-                  <a:srgbClr val="0070C0"/>
-                </a:solidFill>
-              </a:rPr>
-              <a:t>Step</a:t>
-            </a:r>
-            <a:r>
-              <a:rPr lang="ja-JP" altLang="en-US" sz="2400" b="1" dirty="0">
-                <a:solidFill>
-                  <a:srgbClr val="0070C0"/>
-                </a:solidFill>
-              </a:rPr>
-              <a:t>処理</a:t>
-            </a:r>
-            <a:r>
-              <a:rPr lang="ja-JP" altLang="en-US" sz="2400" dirty="0"/>
-              <a:t>で移動を検知して送信しましょう。（</a:t>
-            </a:r>
-            <a:r>
-              <a:rPr lang="en-US" altLang="ja-JP" sz="2400" b="1" dirty="0">
-                <a:solidFill>
-                  <a:srgbClr val="FF0000"/>
-                </a:solidFill>
-              </a:rPr>
-              <a:t>NetworkPlayer.cpp</a:t>
-            </a:r>
-            <a:r>
-              <a:rPr lang="ja-JP" altLang="en-US" sz="2400" dirty="0"/>
-              <a:t>）</a:t>
-            </a:r>
-            <a:endParaRPr lang="en-US" altLang="ja-JP" sz="2400" dirty="0"/>
-          </a:p>
-        </p:txBody>
-      </p:sp>
-      <p:pic>
-        <p:nvPicPr>
-          <p:cNvPr id="5" name="図 4">
-            <a:extLst>
-              <a:ext uri="{FF2B5EF4-FFF2-40B4-BE49-F238E27FC236}">
-                <a16:creationId xmlns:a16="http://schemas.microsoft.com/office/drawing/2014/main" id="{0659631C-6A18-415E-8948-677FEFE1052A}"/>
-              </a:ext>
-            </a:extLst>
-          </p:cNvPr>
-          <p:cNvPicPr>
-            <a:picLocks noChangeAspect="1"/>
-          </p:cNvPicPr>
-          <p:nvPr/>
-        </p:nvPicPr>
-        <p:blipFill>
-          <a:blip r:embed="rId2"/>
-          <a:stretch>
-            <a:fillRect/>
-          </a:stretch>
-        </p:blipFill>
-        <p:spPr>
-          <a:xfrm>
-            <a:off x="567542" y="1817794"/>
-            <a:ext cx="9935962" cy="3505689"/>
-          </a:xfrm>
-          <a:prstGeom prst="rect">
-            <a:avLst/>
-          </a:prstGeom>
-        </p:spPr>
-      </p:pic>
-      <p:sp>
-        <p:nvSpPr>
-          <p:cNvPr id="8" name="テキスト ボックス 7">
-            <a:extLst>
-              <a:ext uri="{FF2B5EF4-FFF2-40B4-BE49-F238E27FC236}">
-                <a16:creationId xmlns:a16="http://schemas.microsoft.com/office/drawing/2014/main" id="{F0E025A6-B56E-4A6D-AE3B-383B126D12E4}"/>
-              </a:ext>
-            </a:extLst>
-          </p:cNvPr>
-          <p:cNvSpPr txBox="1"/>
-          <p:nvPr/>
-        </p:nvSpPr>
-        <p:spPr>
-          <a:xfrm>
-            <a:off x="567542" y="5463183"/>
-            <a:ext cx="5416868" cy="461665"/>
-          </a:xfrm>
-          <a:prstGeom prst="rect">
-            <a:avLst/>
-          </a:prstGeom>
-          <a:noFill/>
-        </p:spPr>
-        <p:txBody>
-          <a:bodyPr wrap="none" rtlCol="0">
-            <a:spAutoFit/>
-          </a:bodyPr>
-          <a:lstStyle/>
-          <a:p>
-            <a:r>
-              <a:rPr lang="ja-JP" altLang="en-US" sz="2400" dirty="0"/>
-              <a:t>続いてはサーバー側の受信処理です。</a:t>
-            </a:r>
-            <a:endParaRPr lang="en-US" altLang="ja-JP" sz="2400" dirty="0"/>
-          </a:p>
-        </p:txBody>
-      </p:sp>
-    </p:spTree>
-    <p:extLst>
-      <p:ext uri="{BB962C8B-B14F-4D97-AF65-F5344CB8AC3E}">
-        <p14:creationId xmlns:p14="http://schemas.microsoft.com/office/powerpoint/2010/main" val="3946648685"/>
-      </p:ext>
-    </p:extLst>
-  </p:cSld>
-  <p:clrMapOvr>
-    <a:masterClrMapping/>
-  </p:clrMapOvr>
-</p:sld>
-</file>
-
-<file path=ppt/slides/slide12.xml><?xml version="1.0" encoding="utf-8"?>
-<p:sld xmlns:a="http://schemas.openxmlformats.org/drawingml/2006/main" xmlns:r="http://schemas.openxmlformats.org/officeDocument/2006/relationships" xmlns:p="http://schemas.openxmlformats.org/presentationml/2006/main">
-  <p:cSld>
-    <p:spTree>
-      <p:nvGrpSpPr>
-        <p:cNvPr id="1" name=""/>
-        <p:cNvGrpSpPr/>
-        <p:nvPr/>
-      </p:nvGrpSpPr>
-      <p:grpSpPr>
-        <a:xfrm>
-          <a:off x="0" y="0"/>
-          <a:ext cx="0" cy="0"/>
-          <a:chOff x="0" y="0"/>
-          <a:chExt cx="0" cy="0"/>
-        </a:xfrm>
-      </p:grpSpPr>
-      <p:sp>
-        <p:nvSpPr>
-          <p:cNvPr id="4" name="テキスト ボックス 3">
-            <a:extLst>
-              <a:ext uri="{FF2B5EF4-FFF2-40B4-BE49-F238E27FC236}">
-                <a16:creationId xmlns:a16="http://schemas.microsoft.com/office/drawing/2014/main" id="{5A13BF46-B8C5-48AA-8308-C9ECFF431A18}"/>
-              </a:ext>
-            </a:extLst>
-          </p:cNvPr>
-          <p:cNvSpPr txBox="1"/>
-          <p:nvPr/>
-        </p:nvSpPr>
-        <p:spPr>
-          <a:xfrm>
-            <a:off x="567542" y="491954"/>
-            <a:ext cx="3057247" cy="584775"/>
-          </a:xfrm>
-          <a:prstGeom prst="rect">
-            <a:avLst/>
-          </a:prstGeom>
-          <a:noFill/>
-        </p:spPr>
-        <p:txBody>
-          <a:bodyPr wrap="none" rtlCol="0">
-            <a:spAutoFit/>
-          </a:bodyPr>
-          <a:lstStyle/>
-          <a:p>
-            <a:r>
-              <a:rPr kumimoji="1" lang="ja-JP" altLang="en-US" sz="3200" b="1" u="sng" dirty="0"/>
-              <a:t>プレイヤー同期</a:t>
-            </a:r>
-          </a:p>
-        </p:txBody>
-      </p:sp>
-      <p:sp>
-        <p:nvSpPr>
-          <p:cNvPr id="6" name="テキスト ボックス 5">
-            <a:extLst>
-              <a:ext uri="{FF2B5EF4-FFF2-40B4-BE49-F238E27FC236}">
-                <a16:creationId xmlns:a16="http://schemas.microsoft.com/office/drawing/2014/main" id="{55830AD6-028B-4C4E-80BF-B70DFC1C3A46}"/>
-              </a:ext>
-            </a:extLst>
-          </p:cNvPr>
-          <p:cNvSpPr txBox="1"/>
-          <p:nvPr/>
-        </p:nvSpPr>
-        <p:spPr>
-          <a:xfrm>
-            <a:off x="567542" y="1216429"/>
-            <a:ext cx="4847802" cy="461665"/>
-          </a:xfrm>
-          <a:prstGeom prst="rect">
-            <a:avLst/>
-          </a:prstGeom>
-          <a:noFill/>
-        </p:spPr>
-        <p:txBody>
-          <a:bodyPr wrap="none" rtlCol="0">
-            <a:spAutoFit/>
-          </a:bodyPr>
-          <a:lstStyle/>
-          <a:p>
-            <a:r>
-              <a:rPr lang="en-US" altLang="ja-JP" sz="2400" b="1" dirty="0">
-                <a:solidFill>
-                  <a:srgbClr val="00B050"/>
-                </a:solidFill>
-              </a:rPr>
-              <a:t>Server</a:t>
-            </a:r>
-            <a:r>
-              <a:rPr lang="ja-JP" altLang="en-US" sz="2400" b="1" dirty="0">
-                <a:solidFill>
-                  <a:srgbClr val="00B050"/>
-                </a:solidFill>
-              </a:rPr>
-              <a:t>プロジェクト</a:t>
-            </a:r>
-            <a:r>
-              <a:rPr lang="ja-JP" altLang="en-US" sz="2400" dirty="0"/>
-              <a:t>を開きます。</a:t>
-            </a:r>
-            <a:endParaRPr lang="en-US" altLang="ja-JP" sz="2400" dirty="0"/>
-          </a:p>
-        </p:txBody>
-      </p:sp>
-      <p:pic>
-        <p:nvPicPr>
-          <p:cNvPr id="3" name="図 2">
-            <a:extLst>
-              <a:ext uri="{FF2B5EF4-FFF2-40B4-BE49-F238E27FC236}">
-                <a16:creationId xmlns:a16="http://schemas.microsoft.com/office/drawing/2014/main" id="{E9517AB1-2E8B-4331-9579-CA177C694277}"/>
-              </a:ext>
-            </a:extLst>
-          </p:cNvPr>
-          <p:cNvPicPr>
-            <a:picLocks noChangeAspect="1"/>
-          </p:cNvPicPr>
-          <p:nvPr/>
-        </p:nvPicPr>
-        <p:blipFill>
-          <a:blip r:embed="rId2"/>
-          <a:stretch>
-            <a:fillRect/>
-          </a:stretch>
-        </p:blipFill>
-        <p:spPr>
-          <a:xfrm>
-            <a:off x="567542" y="1817794"/>
-            <a:ext cx="8432525" cy="4532482"/>
-          </a:xfrm>
-          <a:prstGeom prst="rect">
-            <a:avLst/>
-          </a:prstGeom>
-        </p:spPr>
-      </p:pic>
-    </p:spTree>
-    <p:extLst>
-      <p:ext uri="{BB962C8B-B14F-4D97-AF65-F5344CB8AC3E}">
-        <p14:creationId xmlns:p14="http://schemas.microsoft.com/office/powerpoint/2010/main" val="2534157564"/>
-      </p:ext>
-    </p:extLst>
-  </p:cSld>
-  <p:clrMapOvr>
-    <a:masterClrMapping/>
-  </p:clrMapOvr>
-</p:sld>
-</file>
-
-<file path=ppt/slides/slide13.xml><?xml version="1.0" encoding="utf-8"?>
-<p:sld xmlns:a="http://schemas.openxmlformats.org/drawingml/2006/main" xmlns:r="http://schemas.openxmlformats.org/officeDocument/2006/relationships" xmlns:p="http://schemas.openxmlformats.org/presentationml/2006/main">
-  <p:cSld>
-    <p:spTree>
-      <p:nvGrpSpPr>
-        <p:cNvPr id="1" name=""/>
-        <p:cNvGrpSpPr/>
-        <p:nvPr/>
-      </p:nvGrpSpPr>
-      <p:grpSpPr>
-        <a:xfrm>
-          <a:off x="0" y="0"/>
-          <a:ext cx="0" cy="0"/>
-          <a:chOff x="0" y="0"/>
-          <a:chExt cx="0" cy="0"/>
-        </a:xfrm>
-      </p:grpSpPr>
-      <p:sp>
-        <p:nvSpPr>
-          <p:cNvPr id="4" name="テキスト ボックス 3">
-            <a:extLst>
-              <a:ext uri="{FF2B5EF4-FFF2-40B4-BE49-F238E27FC236}">
-                <a16:creationId xmlns:a16="http://schemas.microsoft.com/office/drawing/2014/main" id="{5A13BF46-B8C5-48AA-8308-C9ECFF431A18}"/>
-              </a:ext>
-            </a:extLst>
-          </p:cNvPr>
-          <p:cNvSpPr txBox="1"/>
-          <p:nvPr/>
-        </p:nvSpPr>
-        <p:spPr>
-          <a:xfrm>
-            <a:off x="567542" y="491954"/>
-            <a:ext cx="3057247" cy="584775"/>
-          </a:xfrm>
-          <a:prstGeom prst="rect">
-            <a:avLst/>
-          </a:prstGeom>
-          <a:noFill/>
-        </p:spPr>
-        <p:txBody>
-          <a:bodyPr wrap="none" rtlCol="0">
-            <a:spAutoFit/>
-          </a:bodyPr>
-          <a:lstStyle/>
-          <a:p>
-            <a:r>
-              <a:rPr kumimoji="1" lang="ja-JP" altLang="en-US" sz="3200" b="1" u="sng" dirty="0"/>
-              <a:t>プレイヤー同期</a:t>
-            </a:r>
-          </a:p>
-        </p:txBody>
-      </p:sp>
-      <p:sp>
-        <p:nvSpPr>
-          <p:cNvPr id="6" name="テキスト ボックス 5">
-            <a:extLst>
-              <a:ext uri="{FF2B5EF4-FFF2-40B4-BE49-F238E27FC236}">
-                <a16:creationId xmlns:a16="http://schemas.microsoft.com/office/drawing/2014/main" id="{55830AD6-028B-4C4E-80BF-B70DFC1C3A46}"/>
-              </a:ext>
-            </a:extLst>
-          </p:cNvPr>
-          <p:cNvSpPr txBox="1"/>
-          <p:nvPr/>
-        </p:nvSpPr>
-        <p:spPr>
-          <a:xfrm>
-            <a:off x="567542" y="1216429"/>
-            <a:ext cx="10049546" cy="830997"/>
-          </a:xfrm>
-          <a:prstGeom prst="rect">
-            <a:avLst/>
-          </a:prstGeom>
-          <a:noFill/>
-        </p:spPr>
-        <p:txBody>
-          <a:bodyPr wrap="none" rtlCol="0">
-            <a:spAutoFit/>
-          </a:bodyPr>
-          <a:lstStyle/>
-          <a:p>
-            <a:r>
-              <a:rPr lang="en-US" altLang="ja-JP" sz="2400" b="1" dirty="0">
-                <a:solidFill>
-                  <a:srgbClr val="00B050"/>
-                </a:solidFill>
-              </a:rPr>
-              <a:t>Server</a:t>
-            </a:r>
-            <a:r>
-              <a:rPr lang="ja-JP" altLang="en-US" sz="2400" b="1" dirty="0">
-                <a:solidFill>
-                  <a:srgbClr val="00B050"/>
-                </a:solidFill>
-              </a:rPr>
-              <a:t>クラス</a:t>
-            </a:r>
-            <a:r>
-              <a:rPr lang="ja-JP" altLang="en-US" sz="2400" dirty="0"/>
-              <a:t>に</a:t>
-            </a:r>
-            <a:endParaRPr lang="en-US" altLang="ja-JP" sz="2400" dirty="0"/>
-          </a:p>
-          <a:p>
-            <a:r>
-              <a:rPr lang="ja-JP" altLang="en-US" sz="2400" dirty="0"/>
-              <a:t>クライアントからのデータを受信する関数を追加します。（</a:t>
-            </a:r>
-            <a:r>
-              <a:rPr lang="en-US" altLang="ja-JP" sz="2400" b="1" dirty="0" err="1">
-                <a:solidFill>
-                  <a:srgbClr val="FF0000"/>
-                </a:solidFill>
-              </a:rPr>
-              <a:t>Server.h</a:t>
-            </a:r>
-            <a:r>
-              <a:rPr lang="ja-JP" altLang="en-US" sz="2400" dirty="0"/>
-              <a:t>）</a:t>
-            </a:r>
-            <a:endParaRPr lang="en-US" altLang="ja-JP" sz="2400" dirty="0"/>
-          </a:p>
-        </p:txBody>
-      </p:sp>
-      <p:pic>
-        <p:nvPicPr>
-          <p:cNvPr id="3" name="図 2">
-            <a:extLst>
-              <a:ext uri="{FF2B5EF4-FFF2-40B4-BE49-F238E27FC236}">
-                <a16:creationId xmlns:a16="http://schemas.microsoft.com/office/drawing/2014/main" id="{44AEAEB9-9EA2-4504-8E46-C9FD26E28F8C}"/>
-              </a:ext>
-            </a:extLst>
-          </p:cNvPr>
-          <p:cNvPicPr>
-            <a:picLocks noChangeAspect="1"/>
-          </p:cNvPicPr>
-          <p:nvPr/>
-        </p:nvPicPr>
-        <p:blipFill>
-          <a:blip r:embed="rId2"/>
-          <a:stretch>
-            <a:fillRect/>
-          </a:stretch>
-        </p:blipFill>
-        <p:spPr>
-          <a:xfrm>
-            <a:off x="567542" y="2187126"/>
-            <a:ext cx="9510842" cy="2220806"/>
-          </a:xfrm>
-          <a:prstGeom prst="rect">
-            <a:avLst/>
-          </a:prstGeom>
-        </p:spPr>
-      </p:pic>
-      <p:sp>
-        <p:nvSpPr>
-          <p:cNvPr id="9" name="正方形/長方形 8">
-            <a:extLst>
-              <a:ext uri="{FF2B5EF4-FFF2-40B4-BE49-F238E27FC236}">
-                <a16:creationId xmlns:a16="http://schemas.microsoft.com/office/drawing/2014/main" id="{4B43FDE0-CBDF-4014-833F-2D9D1C67A273}"/>
-              </a:ext>
-            </a:extLst>
-          </p:cNvPr>
-          <p:cNvSpPr/>
-          <p:nvPr/>
-        </p:nvSpPr>
-        <p:spPr>
-          <a:xfrm>
-            <a:off x="2290315" y="3784600"/>
-            <a:ext cx="6604000" cy="397933"/>
-          </a:xfrm>
-          <a:prstGeom prst="rect">
-            <a:avLst/>
-          </a:prstGeom>
-          <a:noFill/>
-          <a:ln w="28575">
-            <a:solidFill>
-              <a:srgbClr val="FF0000"/>
-            </a:solidFill>
-          </a:ln>
         </p:spPr>
         <p:style>
           <a:lnRef idx="2">
@@ -4443,398 +3922,53 @@
           </a:fontRef>
         </p:style>
         <p:txBody>
-          <a:bodyPr rtlCol="0" anchor="ctr"/>
+          <a:bodyPr rtlCol="0" anchor="t"/>
           <a:lstStyle/>
           <a:p>
             <a:pPr algn="ctr"/>
-            <a:endParaRPr kumimoji="1" lang="ja-JP" altLang="en-US"/>
-          </a:p>
-        </p:txBody>
-      </p:sp>
-    </p:spTree>
-    <p:extLst>
-      <p:ext uri="{BB962C8B-B14F-4D97-AF65-F5344CB8AC3E}">
-        <p14:creationId xmlns:p14="http://schemas.microsoft.com/office/powerpoint/2010/main" val="2554558689"/>
-      </p:ext>
-    </p:extLst>
-  </p:cSld>
-  <p:clrMapOvr>
-    <a:masterClrMapping/>
-  </p:clrMapOvr>
-</p:sld>
-</file>
-
-<file path=ppt/slides/slide14.xml><?xml version="1.0" encoding="utf-8"?>
-<p:sld xmlns:a="http://schemas.openxmlformats.org/drawingml/2006/main" xmlns:r="http://schemas.openxmlformats.org/officeDocument/2006/relationships" xmlns:p="http://schemas.openxmlformats.org/presentationml/2006/main">
-  <p:cSld>
-    <p:spTree>
-      <p:nvGrpSpPr>
-        <p:cNvPr id="1" name=""/>
-        <p:cNvGrpSpPr/>
-        <p:nvPr/>
-      </p:nvGrpSpPr>
-      <p:grpSpPr>
-        <a:xfrm>
-          <a:off x="0" y="0"/>
-          <a:ext cx="0" cy="0"/>
-          <a:chOff x="0" y="0"/>
-          <a:chExt cx="0" cy="0"/>
-        </a:xfrm>
-      </p:grpSpPr>
-      <p:sp>
-        <p:nvSpPr>
-          <p:cNvPr id="4" name="テキスト ボックス 3">
-            <a:extLst>
-              <a:ext uri="{FF2B5EF4-FFF2-40B4-BE49-F238E27FC236}">
-                <a16:creationId xmlns:a16="http://schemas.microsoft.com/office/drawing/2014/main" id="{5A13BF46-B8C5-48AA-8308-C9ECFF431A18}"/>
-              </a:ext>
-            </a:extLst>
-          </p:cNvPr>
-          <p:cNvSpPr txBox="1"/>
+            <a:endParaRPr kumimoji="1" lang="en-US" altLang="ja-JP" b="1" dirty="0"/>
+          </a:p>
+          <a:p>
+            <a:pPr algn="ctr"/>
+            <a:r>
+              <a:rPr kumimoji="1" lang="ja-JP" altLang="en-US" b="1" dirty="0"/>
+              <a:t>クライアント</a:t>
+            </a:r>
+          </a:p>
+        </p:txBody>
+      </p:sp>
+      <p:sp>
+        <p:nvSpPr>
+          <p:cNvPr id="9" name="正方形/長方形 8">
+            <a:extLst>
+              <a:ext uri="{FF2B5EF4-FFF2-40B4-BE49-F238E27FC236}">
+                <a16:creationId xmlns:a16="http://schemas.microsoft.com/office/drawing/2014/main" id="{5F120097-395F-4FBE-BA39-CC3CFA90E785}"/>
+              </a:ext>
+            </a:extLst>
+          </p:cNvPr>
+          <p:cNvSpPr/>
           <p:nvPr/>
         </p:nvSpPr>
         <p:spPr>
           <a:xfrm>
-            <a:off x="567542" y="491954"/>
-            <a:ext cx="3057247" cy="584775"/>
-          </a:xfrm>
-          <a:prstGeom prst="rect">
-            <a:avLst/>
-          </a:prstGeom>
-          <a:noFill/>
-        </p:spPr>
-        <p:txBody>
-          <a:bodyPr wrap="none" rtlCol="0">
-            <a:spAutoFit/>
-          </a:bodyPr>
-          <a:lstStyle/>
-          <a:p>
-            <a:r>
-              <a:rPr kumimoji="1" lang="ja-JP" altLang="en-US" sz="3200" b="1" u="sng" dirty="0"/>
-              <a:t>プレイヤー同期</a:t>
-            </a:r>
-          </a:p>
-        </p:txBody>
-      </p:sp>
-      <p:sp>
-        <p:nvSpPr>
-          <p:cNvPr id="6" name="テキスト ボックス 5">
-            <a:extLst>
-              <a:ext uri="{FF2B5EF4-FFF2-40B4-BE49-F238E27FC236}">
-                <a16:creationId xmlns:a16="http://schemas.microsoft.com/office/drawing/2014/main" id="{55830AD6-028B-4C4E-80BF-B70DFC1C3A46}"/>
-              </a:ext>
-            </a:extLst>
-          </p:cNvPr>
-          <p:cNvSpPr txBox="1"/>
-          <p:nvPr/>
-        </p:nvSpPr>
-        <p:spPr>
-          <a:xfrm>
-            <a:off x="567542" y="1216429"/>
-            <a:ext cx="6760184" cy="461665"/>
-          </a:xfrm>
-          <a:prstGeom prst="rect">
-            <a:avLst/>
-          </a:prstGeom>
-          <a:noFill/>
-        </p:spPr>
-        <p:txBody>
-          <a:bodyPr wrap="none" rtlCol="0">
-            <a:spAutoFit/>
-          </a:bodyPr>
-          <a:lstStyle/>
-          <a:p>
-            <a:r>
-              <a:rPr lang="en-US" altLang="ja-JP" sz="2400" b="1" dirty="0" err="1">
-                <a:solidFill>
-                  <a:srgbClr val="0070C0"/>
-                </a:solidFill>
-              </a:rPr>
-              <a:t>ReceiveData</a:t>
-            </a:r>
-            <a:r>
-              <a:rPr lang="ja-JP" altLang="en-US" sz="2400" b="1" dirty="0">
-                <a:solidFill>
-                  <a:srgbClr val="0070C0"/>
-                </a:solidFill>
-              </a:rPr>
-              <a:t>関数</a:t>
-            </a:r>
-            <a:r>
-              <a:rPr lang="ja-JP" altLang="en-US" sz="2400" dirty="0"/>
-              <a:t>を書きます。（</a:t>
-            </a:r>
-            <a:r>
-              <a:rPr lang="en-US" altLang="ja-JP" sz="2400" b="1" dirty="0">
-                <a:solidFill>
-                  <a:srgbClr val="FF0000"/>
-                </a:solidFill>
-              </a:rPr>
-              <a:t>Server.cpp</a:t>
-            </a:r>
-            <a:r>
-              <a:rPr lang="ja-JP" altLang="en-US" sz="2400" dirty="0"/>
-              <a:t>）</a:t>
-            </a:r>
-            <a:endParaRPr lang="en-US" altLang="ja-JP" sz="2400" dirty="0"/>
-          </a:p>
-        </p:txBody>
-      </p:sp>
-      <p:sp>
-        <p:nvSpPr>
-          <p:cNvPr id="8" name="テキスト ボックス 7">
-            <a:extLst>
-              <a:ext uri="{FF2B5EF4-FFF2-40B4-BE49-F238E27FC236}">
-                <a16:creationId xmlns:a16="http://schemas.microsoft.com/office/drawing/2014/main" id="{F73F213B-9200-48B1-A523-3497CE3769D8}"/>
-              </a:ext>
-            </a:extLst>
-          </p:cNvPr>
-          <p:cNvSpPr txBox="1"/>
-          <p:nvPr/>
-        </p:nvSpPr>
-        <p:spPr>
-          <a:xfrm>
-            <a:off x="567542" y="6032501"/>
-            <a:ext cx="6340197" cy="461665"/>
-          </a:xfrm>
-          <a:prstGeom prst="rect">
-            <a:avLst/>
-          </a:prstGeom>
-          <a:noFill/>
-        </p:spPr>
-        <p:txBody>
-          <a:bodyPr wrap="none" rtlCol="0">
-            <a:spAutoFit/>
-          </a:bodyPr>
-          <a:lstStyle/>
-          <a:p>
-            <a:r>
-              <a:rPr lang="ja-JP" altLang="en-US" sz="2400" b="1" dirty="0">
-                <a:solidFill>
-                  <a:srgbClr val="00B050"/>
-                </a:solidFill>
-              </a:rPr>
-              <a:t>パケットごとの処理</a:t>
-            </a:r>
-            <a:r>
-              <a:rPr lang="ja-JP" altLang="en-US" sz="2400" dirty="0"/>
-              <a:t>はのちほど追記します。</a:t>
-            </a:r>
-            <a:endParaRPr lang="en-US" altLang="ja-JP" sz="2400" dirty="0"/>
-          </a:p>
-        </p:txBody>
-      </p:sp>
-      <p:pic>
-        <p:nvPicPr>
-          <p:cNvPr id="10" name="図 9">
-            <a:extLst>
-              <a:ext uri="{FF2B5EF4-FFF2-40B4-BE49-F238E27FC236}">
-                <a16:creationId xmlns:a16="http://schemas.microsoft.com/office/drawing/2014/main" id="{4B16EC61-B5D3-4999-AD7C-84DFE99CC4CA}"/>
-              </a:ext>
-            </a:extLst>
-          </p:cNvPr>
-          <p:cNvPicPr>
-            <a:picLocks noChangeAspect="1"/>
-          </p:cNvPicPr>
-          <p:nvPr/>
-        </p:nvPicPr>
-        <p:blipFill>
-          <a:blip r:embed="rId2"/>
-          <a:stretch>
-            <a:fillRect/>
-          </a:stretch>
-        </p:blipFill>
-        <p:spPr>
-          <a:xfrm>
-            <a:off x="567542" y="1817794"/>
-            <a:ext cx="7179438" cy="4007273"/>
+            <a:off x="7865808" y="3920067"/>
+            <a:ext cx="1532467" cy="1921933"/>
           </a:xfrm>
           <a:prstGeom prst="rect">
             <a:avLst/>
           </a:prstGeom>
         </p:spPr>
-      </p:pic>
-    </p:spTree>
-    <p:extLst>
-      <p:ext uri="{BB962C8B-B14F-4D97-AF65-F5344CB8AC3E}">
-        <p14:creationId xmlns:p14="http://schemas.microsoft.com/office/powerpoint/2010/main" val="1104078831"/>
-      </p:ext>
-    </p:extLst>
-  </p:cSld>
-  <p:clrMapOvr>
-    <a:masterClrMapping/>
-  </p:clrMapOvr>
-</p:sld>
-</file>
-
-<file path=ppt/slides/slide15.xml><?xml version="1.0" encoding="utf-8"?>
-<p:sld xmlns:a="http://schemas.openxmlformats.org/drawingml/2006/main" xmlns:r="http://schemas.openxmlformats.org/officeDocument/2006/relationships" xmlns:p="http://schemas.openxmlformats.org/presentationml/2006/main">
-  <p:cSld>
-    <p:spTree>
-      <p:nvGrpSpPr>
-        <p:cNvPr id="1" name=""/>
-        <p:cNvGrpSpPr/>
-        <p:nvPr/>
-      </p:nvGrpSpPr>
-      <p:grpSpPr>
-        <a:xfrm>
-          <a:off x="0" y="0"/>
-          <a:ext cx="0" cy="0"/>
-          <a:chOff x="0" y="0"/>
-          <a:chExt cx="0" cy="0"/>
-        </a:xfrm>
-      </p:grpSpPr>
-      <p:sp>
-        <p:nvSpPr>
-          <p:cNvPr id="4" name="テキスト ボックス 3">
-            <a:extLst>
-              <a:ext uri="{FF2B5EF4-FFF2-40B4-BE49-F238E27FC236}">
-                <a16:creationId xmlns:a16="http://schemas.microsoft.com/office/drawing/2014/main" id="{5A13BF46-B8C5-48AA-8308-C9ECFF431A18}"/>
-              </a:ext>
-            </a:extLst>
-          </p:cNvPr>
-          <p:cNvSpPr txBox="1"/>
-          <p:nvPr/>
-        </p:nvSpPr>
-        <p:spPr>
-          <a:xfrm>
-            <a:off x="567542" y="491954"/>
-            <a:ext cx="3057247" cy="584775"/>
-          </a:xfrm>
-          <a:prstGeom prst="rect">
-            <a:avLst/>
-          </a:prstGeom>
-          <a:noFill/>
-        </p:spPr>
-        <p:txBody>
-          <a:bodyPr wrap="none" rtlCol="0">
-            <a:spAutoFit/>
-          </a:bodyPr>
-          <a:lstStyle/>
-          <a:p>
-            <a:r>
-              <a:rPr kumimoji="1" lang="ja-JP" altLang="en-US" sz="3200" b="1" u="sng" dirty="0"/>
-              <a:t>プレイヤー同期</a:t>
-            </a:r>
-          </a:p>
-        </p:txBody>
-      </p:sp>
-      <p:sp>
-        <p:nvSpPr>
-          <p:cNvPr id="6" name="テキスト ボックス 5">
-            <a:extLst>
-              <a:ext uri="{FF2B5EF4-FFF2-40B4-BE49-F238E27FC236}">
-                <a16:creationId xmlns:a16="http://schemas.microsoft.com/office/drawing/2014/main" id="{55830AD6-028B-4C4E-80BF-B70DFC1C3A46}"/>
-              </a:ext>
-            </a:extLst>
-          </p:cNvPr>
-          <p:cNvSpPr txBox="1"/>
-          <p:nvPr/>
-        </p:nvSpPr>
-        <p:spPr>
-          <a:xfrm>
-            <a:off x="567542" y="1216429"/>
-            <a:ext cx="8125942" cy="461665"/>
-          </a:xfrm>
-          <a:prstGeom prst="rect">
-            <a:avLst/>
-          </a:prstGeom>
-          <a:noFill/>
-        </p:spPr>
-        <p:txBody>
-          <a:bodyPr wrap="none" rtlCol="0">
-            <a:spAutoFit/>
-          </a:bodyPr>
-          <a:lstStyle/>
-          <a:p>
-            <a:r>
-              <a:rPr lang="ja-JP" altLang="en-US" sz="2400" dirty="0"/>
-              <a:t>受信した座標に設定する関数を追加します。（</a:t>
-            </a:r>
-            <a:r>
-              <a:rPr lang="en-US" altLang="ja-JP" sz="2400" b="1" dirty="0" err="1">
-                <a:solidFill>
-                  <a:srgbClr val="FF0000"/>
-                </a:solidFill>
-              </a:rPr>
-              <a:t>Server.h</a:t>
-            </a:r>
-            <a:r>
-              <a:rPr lang="ja-JP" altLang="en-US" sz="2400" dirty="0"/>
-              <a:t>）</a:t>
-            </a:r>
-            <a:endParaRPr lang="en-US" altLang="ja-JP" sz="2400" dirty="0"/>
-          </a:p>
-        </p:txBody>
-      </p:sp>
-      <p:pic>
-        <p:nvPicPr>
-          <p:cNvPr id="10" name="図 9">
-            <a:extLst>
-              <a:ext uri="{FF2B5EF4-FFF2-40B4-BE49-F238E27FC236}">
-                <a16:creationId xmlns:a16="http://schemas.microsoft.com/office/drawing/2014/main" id="{08E81FE9-6C90-4387-944D-031E268B7A0F}"/>
-              </a:ext>
-            </a:extLst>
-          </p:cNvPr>
-          <p:cNvPicPr>
-            <a:picLocks noChangeAspect="1"/>
-          </p:cNvPicPr>
-          <p:nvPr/>
-        </p:nvPicPr>
-        <p:blipFill>
-          <a:blip r:embed="rId2"/>
-          <a:stretch>
-            <a:fillRect/>
-          </a:stretch>
-        </p:blipFill>
-        <p:spPr>
-          <a:xfrm>
-            <a:off x="567542" y="1817794"/>
-            <a:ext cx="10100609" cy="2669539"/>
-          </a:xfrm>
-          <a:prstGeom prst="rect">
-            <a:avLst/>
-          </a:prstGeom>
-        </p:spPr>
-      </p:pic>
-      <p:sp>
-        <p:nvSpPr>
-          <p:cNvPr id="11" name="正方形/長方形 10">
-            <a:extLst>
-              <a:ext uri="{FF2B5EF4-FFF2-40B4-BE49-F238E27FC236}">
-                <a16:creationId xmlns:a16="http://schemas.microsoft.com/office/drawing/2014/main" id="{99ECB920-623C-4703-B07B-23BA5196046C}"/>
-              </a:ext>
-            </a:extLst>
-          </p:cNvPr>
-          <p:cNvSpPr/>
-          <p:nvPr/>
-        </p:nvSpPr>
-        <p:spPr>
-          <a:xfrm>
-            <a:off x="2290314" y="3852333"/>
-            <a:ext cx="7793485" cy="330200"/>
-          </a:xfrm>
-          <a:prstGeom prst="rect">
-            <a:avLst/>
-          </a:prstGeom>
-          <a:noFill/>
-          <a:ln w="28575">
-            <a:solidFill>
-              <a:srgbClr val="FF0000"/>
-            </a:solidFill>
-          </a:ln>
-        </p:spPr>
         <p:style>
           <a:lnRef idx="2">
-            <a:schemeClr val="accent1">
+            <a:schemeClr val="accent4">
               <a:shade val="50000"/>
             </a:schemeClr>
           </a:lnRef>
           <a:fillRef idx="1">
-            <a:schemeClr val="accent1"/>
+            <a:schemeClr val="accent4"/>
           </a:fillRef>
           <a:effectRef idx="0">
-            <a:schemeClr val="accent1"/>
+            <a:schemeClr val="accent4"/>
           </a:effectRef>
           <a:fontRef idx="minor">
             <a:schemeClr val="lt1"/>
@@ -4845,748 +3979,17 @@
           <a:lstStyle/>
           <a:p>
             <a:pPr algn="ctr"/>
-            <a:endParaRPr kumimoji="1" lang="ja-JP" altLang="en-US"/>
+            <a:r>
+              <a:rPr kumimoji="1" lang="ja-JP" altLang="en-US" b="1" dirty="0"/>
+              <a:t>プレイヤー死亡</a:t>
+            </a:r>
           </a:p>
         </p:txBody>
       </p:sp>
     </p:spTree>
     <p:extLst>
       <p:ext uri="{BB962C8B-B14F-4D97-AF65-F5344CB8AC3E}">
-        <p14:creationId xmlns:p14="http://schemas.microsoft.com/office/powerpoint/2010/main" val="3587583286"/>
-      </p:ext>
-    </p:extLst>
-  </p:cSld>
-  <p:clrMapOvr>
-    <a:masterClrMapping/>
-  </p:clrMapOvr>
-</p:sld>
-</file>
-
-<file path=ppt/slides/slide16.xml><?xml version="1.0" encoding="utf-8"?>
-<p:sld xmlns:a="http://schemas.openxmlformats.org/drawingml/2006/main" xmlns:r="http://schemas.openxmlformats.org/officeDocument/2006/relationships" xmlns:p="http://schemas.openxmlformats.org/presentationml/2006/main">
-  <p:cSld>
-    <p:spTree>
-      <p:nvGrpSpPr>
-        <p:cNvPr id="1" name=""/>
-        <p:cNvGrpSpPr/>
-        <p:nvPr/>
-      </p:nvGrpSpPr>
-      <p:grpSpPr>
-        <a:xfrm>
-          <a:off x="0" y="0"/>
-          <a:ext cx="0" cy="0"/>
-          <a:chOff x="0" y="0"/>
-          <a:chExt cx="0" cy="0"/>
-        </a:xfrm>
-      </p:grpSpPr>
-      <p:sp>
-        <p:nvSpPr>
-          <p:cNvPr id="4" name="テキスト ボックス 3">
-            <a:extLst>
-              <a:ext uri="{FF2B5EF4-FFF2-40B4-BE49-F238E27FC236}">
-                <a16:creationId xmlns:a16="http://schemas.microsoft.com/office/drawing/2014/main" id="{5A13BF46-B8C5-48AA-8308-C9ECFF431A18}"/>
-              </a:ext>
-            </a:extLst>
-          </p:cNvPr>
-          <p:cNvSpPr txBox="1"/>
-          <p:nvPr/>
-        </p:nvSpPr>
-        <p:spPr>
-          <a:xfrm>
-            <a:off x="567542" y="491954"/>
-            <a:ext cx="3057247" cy="584775"/>
-          </a:xfrm>
-          <a:prstGeom prst="rect">
-            <a:avLst/>
-          </a:prstGeom>
-          <a:noFill/>
-        </p:spPr>
-        <p:txBody>
-          <a:bodyPr wrap="none" rtlCol="0">
-            <a:spAutoFit/>
-          </a:bodyPr>
-          <a:lstStyle/>
-          <a:p>
-            <a:r>
-              <a:rPr kumimoji="1" lang="ja-JP" altLang="en-US" sz="3200" b="1" u="sng" dirty="0"/>
-              <a:t>プレイヤー同期</a:t>
-            </a:r>
-          </a:p>
-        </p:txBody>
-      </p:sp>
-      <p:sp>
-        <p:nvSpPr>
-          <p:cNvPr id="6" name="テキスト ボックス 5">
-            <a:extLst>
-              <a:ext uri="{FF2B5EF4-FFF2-40B4-BE49-F238E27FC236}">
-                <a16:creationId xmlns:a16="http://schemas.microsoft.com/office/drawing/2014/main" id="{55830AD6-028B-4C4E-80BF-B70DFC1C3A46}"/>
-              </a:ext>
-            </a:extLst>
-          </p:cNvPr>
-          <p:cNvSpPr txBox="1"/>
-          <p:nvPr/>
-        </p:nvSpPr>
-        <p:spPr>
-          <a:xfrm>
-            <a:off x="567542" y="1216429"/>
-            <a:ext cx="5790368" cy="461665"/>
-          </a:xfrm>
-          <a:prstGeom prst="rect">
-            <a:avLst/>
-          </a:prstGeom>
-          <a:noFill/>
-        </p:spPr>
-        <p:txBody>
-          <a:bodyPr wrap="none" rtlCol="0">
-            <a:spAutoFit/>
-          </a:bodyPr>
-          <a:lstStyle/>
-          <a:p>
-            <a:r>
-              <a:rPr lang="ja-JP" altLang="en-US" sz="2400" dirty="0"/>
-              <a:t>処理も書いていきます。（</a:t>
-            </a:r>
-            <a:r>
-              <a:rPr lang="en-US" altLang="ja-JP" sz="2400" b="1" dirty="0">
-                <a:solidFill>
-                  <a:srgbClr val="FF0000"/>
-                </a:solidFill>
-              </a:rPr>
-              <a:t>Server.cpp</a:t>
-            </a:r>
-            <a:r>
-              <a:rPr lang="ja-JP" altLang="en-US" sz="2400" dirty="0"/>
-              <a:t>）</a:t>
-            </a:r>
-            <a:endParaRPr lang="en-US" altLang="ja-JP" sz="2400" dirty="0"/>
-          </a:p>
-        </p:txBody>
-      </p:sp>
-      <p:pic>
-        <p:nvPicPr>
-          <p:cNvPr id="3" name="図 2">
-            <a:extLst>
-              <a:ext uri="{FF2B5EF4-FFF2-40B4-BE49-F238E27FC236}">
-                <a16:creationId xmlns:a16="http://schemas.microsoft.com/office/drawing/2014/main" id="{FA69E5BC-C039-457A-886E-AD968E93D81F}"/>
-              </a:ext>
-            </a:extLst>
-          </p:cNvPr>
-          <p:cNvPicPr>
-            <a:picLocks noChangeAspect="1"/>
-          </p:cNvPicPr>
-          <p:nvPr/>
-        </p:nvPicPr>
-        <p:blipFill>
-          <a:blip r:embed="rId2"/>
-          <a:stretch>
-            <a:fillRect/>
-          </a:stretch>
-        </p:blipFill>
-        <p:spPr>
-          <a:xfrm>
-            <a:off x="567542" y="1817794"/>
-            <a:ext cx="7754432" cy="4601217"/>
-          </a:xfrm>
-          <a:prstGeom prst="rect">
-            <a:avLst/>
-          </a:prstGeom>
-        </p:spPr>
-      </p:pic>
-    </p:spTree>
-    <p:extLst>
-      <p:ext uri="{BB962C8B-B14F-4D97-AF65-F5344CB8AC3E}">
-        <p14:creationId xmlns:p14="http://schemas.microsoft.com/office/powerpoint/2010/main" val="765672541"/>
-      </p:ext>
-    </p:extLst>
-  </p:cSld>
-  <p:clrMapOvr>
-    <a:masterClrMapping/>
-  </p:clrMapOvr>
-</p:sld>
-</file>
-
-<file path=ppt/slides/slide17.xml><?xml version="1.0" encoding="utf-8"?>
-<p:sld xmlns:a="http://schemas.openxmlformats.org/drawingml/2006/main" xmlns:r="http://schemas.openxmlformats.org/officeDocument/2006/relationships" xmlns:p="http://schemas.openxmlformats.org/presentationml/2006/main">
-  <p:cSld>
-    <p:spTree>
-      <p:nvGrpSpPr>
-        <p:cNvPr id="1" name=""/>
-        <p:cNvGrpSpPr/>
-        <p:nvPr/>
-      </p:nvGrpSpPr>
-      <p:grpSpPr>
-        <a:xfrm>
-          <a:off x="0" y="0"/>
-          <a:ext cx="0" cy="0"/>
-          <a:chOff x="0" y="0"/>
-          <a:chExt cx="0" cy="0"/>
-        </a:xfrm>
-      </p:grpSpPr>
-      <p:sp>
-        <p:nvSpPr>
-          <p:cNvPr id="4" name="テキスト ボックス 3">
-            <a:extLst>
-              <a:ext uri="{FF2B5EF4-FFF2-40B4-BE49-F238E27FC236}">
-                <a16:creationId xmlns:a16="http://schemas.microsoft.com/office/drawing/2014/main" id="{5A13BF46-B8C5-48AA-8308-C9ECFF431A18}"/>
-              </a:ext>
-            </a:extLst>
-          </p:cNvPr>
-          <p:cNvSpPr txBox="1"/>
-          <p:nvPr/>
-        </p:nvSpPr>
-        <p:spPr>
-          <a:xfrm>
-            <a:off x="567542" y="491954"/>
-            <a:ext cx="3057247" cy="584775"/>
-          </a:xfrm>
-          <a:prstGeom prst="rect">
-            <a:avLst/>
-          </a:prstGeom>
-          <a:noFill/>
-        </p:spPr>
-        <p:txBody>
-          <a:bodyPr wrap="none" rtlCol="0">
-            <a:spAutoFit/>
-          </a:bodyPr>
-          <a:lstStyle/>
-          <a:p>
-            <a:r>
-              <a:rPr kumimoji="1" lang="ja-JP" altLang="en-US" sz="3200" b="1" u="sng" dirty="0"/>
-              <a:t>プレイヤー同期</a:t>
-            </a:r>
-          </a:p>
-        </p:txBody>
-      </p:sp>
-      <p:sp>
-        <p:nvSpPr>
-          <p:cNvPr id="6" name="テキスト ボックス 5">
-            <a:extLst>
-              <a:ext uri="{FF2B5EF4-FFF2-40B4-BE49-F238E27FC236}">
-                <a16:creationId xmlns:a16="http://schemas.microsoft.com/office/drawing/2014/main" id="{55830AD6-028B-4C4E-80BF-B70DFC1C3A46}"/>
-              </a:ext>
-            </a:extLst>
-          </p:cNvPr>
-          <p:cNvSpPr txBox="1"/>
-          <p:nvPr/>
-        </p:nvSpPr>
-        <p:spPr>
-          <a:xfrm>
-            <a:off x="567542" y="1216429"/>
-            <a:ext cx="9791463" cy="461665"/>
-          </a:xfrm>
-          <a:prstGeom prst="rect">
-            <a:avLst/>
-          </a:prstGeom>
-          <a:noFill/>
-        </p:spPr>
-        <p:txBody>
-          <a:bodyPr wrap="none" rtlCol="0">
-            <a:spAutoFit/>
-          </a:bodyPr>
-          <a:lstStyle/>
-          <a:p>
-            <a:r>
-              <a:rPr lang="ja-JP" altLang="en-US" sz="2400" dirty="0"/>
-              <a:t>クライアントからデータを受信したら呼びましょう。（</a:t>
-            </a:r>
-            <a:r>
-              <a:rPr lang="en-US" altLang="ja-JP" sz="2400" b="1" dirty="0">
-                <a:solidFill>
-                  <a:srgbClr val="FF0000"/>
-                </a:solidFill>
-              </a:rPr>
-              <a:t>Server.cpp</a:t>
-            </a:r>
-            <a:r>
-              <a:rPr lang="ja-JP" altLang="en-US" sz="2400" dirty="0"/>
-              <a:t>）</a:t>
-            </a:r>
-            <a:endParaRPr lang="en-US" altLang="ja-JP" sz="2400" dirty="0"/>
-          </a:p>
-        </p:txBody>
-      </p:sp>
-      <p:pic>
-        <p:nvPicPr>
-          <p:cNvPr id="5" name="図 4">
-            <a:extLst>
-              <a:ext uri="{FF2B5EF4-FFF2-40B4-BE49-F238E27FC236}">
-                <a16:creationId xmlns:a16="http://schemas.microsoft.com/office/drawing/2014/main" id="{0C3D9838-5780-45C6-AAB5-E1878CDFD959}"/>
-              </a:ext>
-            </a:extLst>
-          </p:cNvPr>
-          <p:cNvPicPr>
-            <a:picLocks noChangeAspect="1"/>
-          </p:cNvPicPr>
-          <p:nvPr/>
-        </p:nvPicPr>
-        <p:blipFill>
-          <a:blip r:embed="rId2"/>
-          <a:stretch>
-            <a:fillRect/>
-          </a:stretch>
-        </p:blipFill>
-        <p:spPr>
-          <a:xfrm>
-            <a:off x="567542" y="1818572"/>
-            <a:ext cx="9186058" cy="4218250"/>
-          </a:xfrm>
-          <a:prstGeom prst="rect">
-            <a:avLst/>
-          </a:prstGeom>
-        </p:spPr>
-      </p:pic>
-      <p:sp>
-        <p:nvSpPr>
-          <p:cNvPr id="7" name="正方形/長方形 6">
-            <a:extLst>
-              <a:ext uri="{FF2B5EF4-FFF2-40B4-BE49-F238E27FC236}">
-                <a16:creationId xmlns:a16="http://schemas.microsoft.com/office/drawing/2014/main" id="{718BEE66-11AF-4AFB-97F0-438ABAEDEF21}"/>
-              </a:ext>
-            </a:extLst>
-          </p:cNvPr>
-          <p:cNvSpPr/>
-          <p:nvPr/>
-        </p:nvSpPr>
-        <p:spPr>
-          <a:xfrm>
-            <a:off x="2358047" y="4851400"/>
-            <a:ext cx="7793485" cy="1185422"/>
-          </a:xfrm>
-          <a:prstGeom prst="rect">
-            <a:avLst/>
-          </a:prstGeom>
-          <a:noFill/>
-          <a:ln w="28575">
-            <a:solidFill>
-              <a:srgbClr val="FF0000"/>
-            </a:solidFill>
-          </a:ln>
-        </p:spPr>
-        <p:style>
-          <a:lnRef idx="2">
-            <a:schemeClr val="accent1">
-              <a:shade val="50000"/>
-            </a:schemeClr>
-          </a:lnRef>
-          <a:fillRef idx="1">
-            <a:schemeClr val="accent1"/>
-          </a:fillRef>
-          <a:effectRef idx="0">
-            <a:schemeClr val="accent1"/>
-          </a:effectRef>
-          <a:fontRef idx="minor">
-            <a:schemeClr val="lt1"/>
-          </a:fontRef>
-        </p:style>
-        <p:txBody>
-          <a:bodyPr rtlCol="0" anchor="ctr"/>
-          <a:lstStyle/>
-          <a:p>
-            <a:pPr algn="ctr"/>
-            <a:endParaRPr kumimoji="1" lang="ja-JP" altLang="en-US"/>
-          </a:p>
-        </p:txBody>
-      </p:sp>
-    </p:spTree>
-    <p:extLst>
-      <p:ext uri="{BB962C8B-B14F-4D97-AF65-F5344CB8AC3E}">
-        <p14:creationId xmlns:p14="http://schemas.microsoft.com/office/powerpoint/2010/main" val="1208758594"/>
-      </p:ext>
-    </p:extLst>
-  </p:cSld>
-  <p:clrMapOvr>
-    <a:masterClrMapping/>
-  </p:clrMapOvr>
-</p:sld>
-</file>
-
-<file path=ppt/slides/slide18.xml><?xml version="1.0" encoding="utf-8"?>
-<p:sld xmlns:a="http://schemas.openxmlformats.org/drawingml/2006/main" xmlns:r="http://schemas.openxmlformats.org/officeDocument/2006/relationships" xmlns:p="http://schemas.openxmlformats.org/presentationml/2006/main">
-  <p:cSld>
-    <p:spTree>
-      <p:nvGrpSpPr>
-        <p:cNvPr id="1" name=""/>
-        <p:cNvGrpSpPr/>
-        <p:nvPr/>
-      </p:nvGrpSpPr>
-      <p:grpSpPr>
-        <a:xfrm>
-          <a:off x="0" y="0"/>
-          <a:ext cx="0" cy="0"/>
-          <a:chOff x="0" y="0"/>
-          <a:chExt cx="0" cy="0"/>
-        </a:xfrm>
-      </p:grpSpPr>
-      <p:sp>
-        <p:nvSpPr>
-          <p:cNvPr id="4" name="テキスト ボックス 3">
-            <a:extLst>
-              <a:ext uri="{FF2B5EF4-FFF2-40B4-BE49-F238E27FC236}">
-                <a16:creationId xmlns:a16="http://schemas.microsoft.com/office/drawing/2014/main" id="{5A13BF46-B8C5-48AA-8308-C9ECFF431A18}"/>
-              </a:ext>
-            </a:extLst>
-          </p:cNvPr>
-          <p:cNvSpPr txBox="1"/>
-          <p:nvPr/>
-        </p:nvSpPr>
-        <p:spPr>
-          <a:xfrm>
-            <a:off x="567542" y="491954"/>
-            <a:ext cx="3057247" cy="584775"/>
-          </a:xfrm>
-          <a:prstGeom prst="rect">
-            <a:avLst/>
-          </a:prstGeom>
-          <a:noFill/>
-        </p:spPr>
-        <p:txBody>
-          <a:bodyPr wrap="none" rtlCol="0">
-            <a:spAutoFit/>
-          </a:bodyPr>
-          <a:lstStyle/>
-          <a:p>
-            <a:r>
-              <a:rPr kumimoji="1" lang="ja-JP" altLang="en-US" sz="3200" b="1" u="sng" dirty="0"/>
-              <a:t>プレイヤー同期</a:t>
-            </a:r>
-          </a:p>
-        </p:txBody>
-      </p:sp>
-      <p:sp>
-        <p:nvSpPr>
-          <p:cNvPr id="6" name="テキスト ボックス 5">
-            <a:extLst>
-              <a:ext uri="{FF2B5EF4-FFF2-40B4-BE49-F238E27FC236}">
-                <a16:creationId xmlns:a16="http://schemas.microsoft.com/office/drawing/2014/main" id="{55830AD6-028B-4C4E-80BF-B70DFC1C3A46}"/>
-              </a:ext>
-            </a:extLst>
-          </p:cNvPr>
-          <p:cNvSpPr txBox="1"/>
-          <p:nvPr/>
-        </p:nvSpPr>
-        <p:spPr>
-          <a:xfrm>
-            <a:off x="567542" y="1216429"/>
-            <a:ext cx="9280105" cy="830997"/>
-          </a:xfrm>
-          <a:prstGeom prst="rect">
-            <a:avLst/>
-          </a:prstGeom>
-          <a:noFill/>
-        </p:spPr>
-        <p:txBody>
-          <a:bodyPr wrap="none" rtlCol="0">
-            <a:spAutoFit/>
-          </a:bodyPr>
-          <a:lstStyle/>
-          <a:p>
-            <a:r>
-              <a:rPr lang="ja-JP" altLang="en-US" sz="2400" dirty="0"/>
-              <a:t>最新の座標を全クライアントに送信します。</a:t>
-            </a:r>
-            <a:endParaRPr lang="en-US" altLang="ja-JP" sz="2400" dirty="0"/>
-          </a:p>
-          <a:p>
-            <a:r>
-              <a:rPr lang="ja-JP" altLang="en-US" sz="2400" dirty="0"/>
-              <a:t>送信用のデータを</a:t>
-            </a:r>
-            <a:r>
-              <a:rPr lang="en-US" altLang="ja-JP" sz="2400" b="1" dirty="0" err="1">
-                <a:solidFill>
-                  <a:srgbClr val="FF0000"/>
-                </a:solidFill>
-              </a:rPr>
-              <a:t>NetworkCommonParam.h</a:t>
-            </a:r>
-            <a:r>
-              <a:rPr lang="ja-JP" altLang="en-US" sz="2400" dirty="0"/>
-              <a:t>に追加しましょう。</a:t>
-            </a:r>
-            <a:endParaRPr lang="en-US" altLang="ja-JP" sz="2400" dirty="0"/>
-          </a:p>
-        </p:txBody>
-      </p:sp>
-      <p:pic>
-        <p:nvPicPr>
-          <p:cNvPr id="3" name="図 2">
-            <a:extLst>
-              <a:ext uri="{FF2B5EF4-FFF2-40B4-BE49-F238E27FC236}">
-                <a16:creationId xmlns:a16="http://schemas.microsoft.com/office/drawing/2014/main" id="{20F1296C-DE7B-45BC-8FD8-FEA1C685C1C5}"/>
-              </a:ext>
-            </a:extLst>
-          </p:cNvPr>
-          <p:cNvPicPr>
-            <a:picLocks noChangeAspect="1"/>
-          </p:cNvPicPr>
-          <p:nvPr/>
-        </p:nvPicPr>
-        <p:blipFill>
-          <a:blip r:embed="rId2"/>
-          <a:stretch>
-            <a:fillRect/>
-          </a:stretch>
-        </p:blipFill>
-        <p:spPr>
-          <a:xfrm>
-            <a:off x="567542" y="2187126"/>
-            <a:ext cx="6474346" cy="1792207"/>
-          </a:xfrm>
-          <a:prstGeom prst="rect">
-            <a:avLst/>
-          </a:prstGeom>
-        </p:spPr>
-      </p:pic>
-      <p:sp>
-        <p:nvSpPr>
-          <p:cNvPr id="8" name="テキスト ボックス 7">
-            <a:extLst>
-              <a:ext uri="{FF2B5EF4-FFF2-40B4-BE49-F238E27FC236}">
-                <a16:creationId xmlns:a16="http://schemas.microsoft.com/office/drawing/2014/main" id="{3F1EDBEF-271F-4C1D-943D-D5F1239CC1A5}"/>
-              </a:ext>
-            </a:extLst>
-          </p:cNvPr>
-          <p:cNvSpPr txBox="1"/>
-          <p:nvPr/>
-        </p:nvSpPr>
-        <p:spPr>
-          <a:xfrm>
-            <a:off x="567542" y="4272896"/>
-            <a:ext cx="7571303" cy="830997"/>
-          </a:xfrm>
-          <a:prstGeom prst="rect">
-            <a:avLst/>
-          </a:prstGeom>
-          <a:noFill/>
-        </p:spPr>
-        <p:txBody>
-          <a:bodyPr wrap="none" rtlCol="0">
-            <a:spAutoFit/>
-          </a:bodyPr>
-          <a:lstStyle/>
-          <a:p>
-            <a:r>
-              <a:rPr lang="en-US" altLang="ja-JP" sz="2400" dirty="0"/>
-              <a:t>※</a:t>
-            </a:r>
-            <a:r>
-              <a:rPr lang="ja-JP" altLang="en-US" sz="2400" dirty="0"/>
-              <a:t>今回は最大４人を想定して作ります</a:t>
-            </a:r>
-            <a:endParaRPr lang="en-US" altLang="ja-JP" sz="2400" dirty="0"/>
-          </a:p>
-          <a:p>
-            <a:r>
-              <a:rPr lang="en-US" altLang="ja-JP" sz="2400" dirty="0"/>
-              <a:t>※</a:t>
-            </a:r>
-            <a:r>
-              <a:rPr lang="ja-JP" altLang="en-US" sz="2400" dirty="0"/>
-              <a:t>今後のことも考え、回転、拡縮も書いておきます。</a:t>
-            </a:r>
-            <a:endParaRPr lang="en-US" altLang="ja-JP" sz="2400" dirty="0"/>
-          </a:p>
-        </p:txBody>
-      </p:sp>
-    </p:spTree>
-    <p:extLst>
-      <p:ext uri="{BB962C8B-B14F-4D97-AF65-F5344CB8AC3E}">
-        <p14:creationId xmlns:p14="http://schemas.microsoft.com/office/powerpoint/2010/main" val="530886497"/>
-      </p:ext>
-    </p:extLst>
-  </p:cSld>
-  <p:clrMapOvr>
-    <a:masterClrMapping/>
-  </p:clrMapOvr>
-</p:sld>
-</file>
-
-<file path=ppt/slides/slide19.xml><?xml version="1.0" encoding="utf-8"?>
-<p:sld xmlns:a="http://schemas.openxmlformats.org/drawingml/2006/main" xmlns:r="http://schemas.openxmlformats.org/officeDocument/2006/relationships" xmlns:p="http://schemas.openxmlformats.org/presentationml/2006/main">
-  <p:cSld>
-    <p:spTree>
-      <p:nvGrpSpPr>
-        <p:cNvPr id="1" name=""/>
-        <p:cNvGrpSpPr/>
-        <p:nvPr/>
-      </p:nvGrpSpPr>
-      <p:grpSpPr>
-        <a:xfrm>
-          <a:off x="0" y="0"/>
-          <a:ext cx="0" cy="0"/>
-          <a:chOff x="0" y="0"/>
-          <a:chExt cx="0" cy="0"/>
-        </a:xfrm>
-      </p:grpSpPr>
-      <p:sp>
-        <p:nvSpPr>
-          <p:cNvPr id="4" name="テキスト ボックス 3">
-            <a:extLst>
-              <a:ext uri="{FF2B5EF4-FFF2-40B4-BE49-F238E27FC236}">
-                <a16:creationId xmlns:a16="http://schemas.microsoft.com/office/drawing/2014/main" id="{5A13BF46-B8C5-48AA-8308-C9ECFF431A18}"/>
-              </a:ext>
-            </a:extLst>
-          </p:cNvPr>
-          <p:cNvSpPr txBox="1"/>
-          <p:nvPr/>
-        </p:nvSpPr>
-        <p:spPr>
-          <a:xfrm>
-            <a:off x="567542" y="491954"/>
-            <a:ext cx="3057247" cy="584775"/>
-          </a:xfrm>
-          <a:prstGeom prst="rect">
-            <a:avLst/>
-          </a:prstGeom>
-          <a:noFill/>
-        </p:spPr>
-        <p:txBody>
-          <a:bodyPr wrap="none" rtlCol="0">
-            <a:spAutoFit/>
-          </a:bodyPr>
-          <a:lstStyle/>
-          <a:p>
-            <a:r>
-              <a:rPr kumimoji="1" lang="ja-JP" altLang="en-US" sz="3200" b="1" u="sng" dirty="0"/>
-              <a:t>プレイヤー同期</a:t>
-            </a:r>
-          </a:p>
-        </p:txBody>
-      </p:sp>
-      <p:sp>
-        <p:nvSpPr>
-          <p:cNvPr id="6" name="テキスト ボックス 5">
-            <a:extLst>
-              <a:ext uri="{FF2B5EF4-FFF2-40B4-BE49-F238E27FC236}">
-                <a16:creationId xmlns:a16="http://schemas.microsoft.com/office/drawing/2014/main" id="{55830AD6-028B-4C4E-80BF-B70DFC1C3A46}"/>
-              </a:ext>
-            </a:extLst>
-          </p:cNvPr>
-          <p:cNvSpPr txBox="1"/>
-          <p:nvPr/>
-        </p:nvSpPr>
-        <p:spPr>
-          <a:xfrm>
-            <a:off x="567542" y="1216429"/>
-            <a:ext cx="5432898" cy="461665"/>
-          </a:xfrm>
-          <a:prstGeom prst="rect">
-            <a:avLst/>
-          </a:prstGeom>
-          <a:noFill/>
-        </p:spPr>
-        <p:txBody>
-          <a:bodyPr wrap="none" rtlCol="0">
-            <a:spAutoFit/>
-          </a:bodyPr>
-          <a:lstStyle/>
-          <a:p>
-            <a:r>
-              <a:rPr lang="ja-JP" altLang="en-US" sz="2400" dirty="0"/>
-              <a:t>送信関数を追加します。（</a:t>
-            </a:r>
-            <a:r>
-              <a:rPr lang="en-US" altLang="ja-JP" sz="2400" b="1" dirty="0" err="1">
-                <a:solidFill>
-                  <a:srgbClr val="FF0000"/>
-                </a:solidFill>
-              </a:rPr>
-              <a:t>Server.h</a:t>
-            </a:r>
-            <a:r>
-              <a:rPr lang="ja-JP" altLang="en-US" sz="2400" dirty="0"/>
-              <a:t>）</a:t>
-            </a:r>
-            <a:endParaRPr lang="en-US" altLang="ja-JP" sz="2400" dirty="0"/>
-          </a:p>
-        </p:txBody>
-      </p:sp>
-      <p:pic>
-        <p:nvPicPr>
-          <p:cNvPr id="3" name="図 2">
-            <a:extLst>
-              <a:ext uri="{FF2B5EF4-FFF2-40B4-BE49-F238E27FC236}">
-                <a16:creationId xmlns:a16="http://schemas.microsoft.com/office/drawing/2014/main" id="{48A29D93-0EA5-41C1-898D-7E87CC92FAEA}"/>
-              </a:ext>
-            </a:extLst>
-          </p:cNvPr>
-          <p:cNvPicPr>
-            <a:picLocks noChangeAspect="1"/>
-          </p:cNvPicPr>
-          <p:nvPr/>
-        </p:nvPicPr>
-        <p:blipFill>
-          <a:blip r:embed="rId2"/>
-          <a:stretch>
-            <a:fillRect/>
-          </a:stretch>
-        </p:blipFill>
-        <p:spPr>
-          <a:xfrm>
-            <a:off x="567542" y="1817794"/>
-            <a:ext cx="9711934" cy="2838873"/>
-          </a:xfrm>
-          <a:prstGeom prst="rect">
-            <a:avLst/>
-          </a:prstGeom>
-        </p:spPr>
-      </p:pic>
-      <p:sp>
-        <p:nvSpPr>
-          <p:cNvPr id="8" name="正方形/長方形 7">
-            <a:extLst>
-              <a:ext uri="{FF2B5EF4-FFF2-40B4-BE49-F238E27FC236}">
-                <a16:creationId xmlns:a16="http://schemas.microsoft.com/office/drawing/2014/main" id="{3FFEC85C-7241-4F7B-BB5D-28EF11805295}"/>
-              </a:ext>
-            </a:extLst>
-          </p:cNvPr>
-          <p:cNvSpPr/>
-          <p:nvPr/>
-        </p:nvSpPr>
-        <p:spPr>
-          <a:xfrm>
-            <a:off x="2294467" y="3818468"/>
-            <a:ext cx="3801533" cy="287866"/>
-          </a:xfrm>
-          <a:prstGeom prst="rect">
-            <a:avLst/>
-          </a:prstGeom>
-          <a:noFill/>
-          <a:ln w="28575">
-            <a:solidFill>
-              <a:srgbClr val="FF0000"/>
-            </a:solidFill>
-          </a:ln>
-        </p:spPr>
-        <p:style>
-          <a:lnRef idx="2">
-            <a:schemeClr val="accent1">
-              <a:shade val="50000"/>
-            </a:schemeClr>
-          </a:lnRef>
-          <a:fillRef idx="1">
-            <a:schemeClr val="accent1"/>
-          </a:fillRef>
-          <a:effectRef idx="0">
-            <a:schemeClr val="accent1"/>
-          </a:effectRef>
-          <a:fontRef idx="minor">
-            <a:schemeClr val="lt1"/>
-          </a:fontRef>
-        </p:style>
-        <p:txBody>
-          <a:bodyPr rtlCol="0" anchor="ctr"/>
-          <a:lstStyle/>
-          <a:p>
-            <a:pPr algn="ctr"/>
-            <a:endParaRPr kumimoji="1" lang="ja-JP" altLang="en-US"/>
-          </a:p>
-        </p:txBody>
-      </p:sp>
-    </p:spTree>
-    <p:extLst>
-      <p:ext uri="{BB962C8B-B14F-4D97-AF65-F5344CB8AC3E}">
-        <p14:creationId xmlns:p14="http://schemas.microsoft.com/office/powerpoint/2010/main" val="4051861726"/>
+        <p14:creationId xmlns:p14="http://schemas.microsoft.com/office/powerpoint/2010/main" val="410028988"/>
       </p:ext>
     </p:extLst>
   </p:cSld>
@@ -5628,7 +4031,7 @@
         <p:spPr>
           <a:xfrm>
             <a:off x="567542" y="491954"/>
-            <a:ext cx="3057247" cy="584775"/>
+            <a:ext cx="2236510" cy="2554545"/>
           </a:xfrm>
           <a:prstGeom prst="rect">
             <a:avLst/>
@@ -5643,8 +4046,21 @@
           <a:p>
             <a:r>
               <a:rPr kumimoji="1" lang="ja-JP" altLang="en-US" sz="3200" b="1" u="sng" dirty="0"/>
-              <a:t>プレイヤー同期</a:t>
-            </a:r>
+              <a:t>当たり判定</a:t>
+            </a:r>
+            <a:endParaRPr kumimoji="1" lang="en-US" altLang="ja-JP" sz="3200" b="1" u="sng" dirty="0"/>
+          </a:p>
+          <a:p>
+            <a:endParaRPr lang="en-US" altLang="ja-JP" sz="3200" b="1" u="sng" dirty="0"/>
+          </a:p>
+          <a:p>
+            <a:endParaRPr kumimoji="1" lang="en-US" altLang="ja-JP" sz="3200" b="1" u="sng" dirty="0"/>
+          </a:p>
+          <a:p>
+            <a:endParaRPr lang="en-US" altLang="ja-JP" sz="3200" b="1" u="sng" dirty="0"/>
+          </a:p>
+          <a:p>
+            <a:endParaRPr kumimoji="1" lang="ja-JP" altLang="en-US" sz="3200" b="1" u="sng" dirty="0"/>
           </a:p>
         </p:txBody>
       </p:sp>
@@ -5663,7 +4079,7 @@
         <p:spPr>
           <a:xfrm>
             <a:off x="567542" y="1216429"/>
-            <a:ext cx="11264622" cy="1200329"/>
+            <a:ext cx="7263527" cy="3785652"/>
           </a:xfrm>
           <a:prstGeom prst="rect">
             <a:avLst/>
@@ -5678,2046 +4094,111 @@
           <a:p>
             <a:r>
               <a:rPr lang="ja-JP" altLang="en-US" sz="2400" dirty="0"/>
-              <a:t>全てのクライアントで揃えるには、</a:t>
+              <a:t>処理の流れは以下の通りです</a:t>
             </a:r>
             <a:endParaRPr lang="en-US" altLang="ja-JP" sz="2400" dirty="0"/>
           </a:p>
           <a:p>
-            <a:r>
-              <a:rPr lang="ja-JP" altLang="en-US" sz="2400" dirty="0"/>
-              <a:t>チャットと同様に、</a:t>
-            </a:r>
-            <a:r>
-              <a:rPr lang="ja-JP" altLang="en-US" sz="2400" b="1" dirty="0">
-                <a:solidFill>
-                  <a:srgbClr val="FF0000"/>
-                </a:solidFill>
-              </a:rPr>
-              <a:t>サーバー側に正しい情報を持たせておきます。</a:t>
-            </a:r>
-            <a:endParaRPr lang="en-US" altLang="ja-JP" sz="2400" b="1" dirty="0">
-              <a:solidFill>
-                <a:srgbClr val="FF0000"/>
-              </a:solidFill>
-            </a:endParaRPr>
-          </a:p>
-          <a:p>
-            <a:r>
-              <a:rPr lang="ja-JP" altLang="en-US" sz="2400" dirty="0"/>
-              <a:t>クライアントは、サーバーから届いたデータをもとにプレイヤーを配置します。</a:t>
-            </a:r>
             <a:endParaRPr lang="en-US" altLang="ja-JP" sz="2400" dirty="0"/>
           </a:p>
-        </p:txBody>
-      </p:sp>
-      <p:pic>
-        <p:nvPicPr>
-          <p:cNvPr id="5" name="図 4">
-            <a:extLst>
-              <a:ext uri="{FF2B5EF4-FFF2-40B4-BE49-F238E27FC236}">
-                <a16:creationId xmlns:a16="http://schemas.microsoft.com/office/drawing/2014/main" id="{E1FB0A9D-B231-4A30-B4E6-E372BF20EA76}"/>
-              </a:ext>
-            </a:extLst>
-          </p:cNvPr>
-          <p:cNvPicPr>
-            <a:picLocks noChangeAspect="1"/>
-          </p:cNvPicPr>
-          <p:nvPr/>
-        </p:nvPicPr>
-        <p:blipFill>
-          <a:blip r:embed="rId2"/>
-          <a:stretch>
-            <a:fillRect/>
-          </a:stretch>
-        </p:blipFill>
-        <p:spPr>
-          <a:xfrm>
-            <a:off x="567541" y="3483458"/>
-            <a:ext cx="4419325" cy="3062352"/>
-          </a:xfrm>
-          <a:prstGeom prst="rect">
-            <a:avLst/>
-          </a:prstGeom>
-        </p:spPr>
-      </p:pic>
-      <p:sp>
-        <p:nvSpPr>
-          <p:cNvPr id="2" name="四角形: 角を丸くする 1">
-            <a:extLst>
-              <a:ext uri="{FF2B5EF4-FFF2-40B4-BE49-F238E27FC236}">
-                <a16:creationId xmlns:a16="http://schemas.microsoft.com/office/drawing/2014/main" id="{3B2670C2-8CFA-4F1E-A002-6A17EE652730}"/>
-              </a:ext>
-            </a:extLst>
-          </p:cNvPr>
-          <p:cNvSpPr/>
-          <p:nvPr/>
-        </p:nvSpPr>
-        <p:spPr>
-          <a:xfrm>
-            <a:off x="1554299" y="2723332"/>
-            <a:ext cx="2184400" cy="400868"/>
-          </a:xfrm>
-          <a:prstGeom prst="roundRect">
-            <a:avLst/>
-          </a:prstGeom>
-        </p:spPr>
-        <p:style>
-          <a:lnRef idx="2">
-            <a:schemeClr val="accent6">
-              <a:shade val="50000"/>
-            </a:schemeClr>
-          </a:lnRef>
-          <a:fillRef idx="1">
-            <a:schemeClr val="accent6"/>
-          </a:fillRef>
-          <a:effectRef idx="0">
-            <a:schemeClr val="accent6"/>
-          </a:effectRef>
-          <a:fontRef idx="minor">
-            <a:schemeClr val="lt1"/>
-          </a:fontRef>
-        </p:style>
-        <p:txBody>
-          <a:bodyPr rtlCol="0" anchor="t"/>
-          <a:lstStyle/>
-          <a:p>
-            <a:pPr algn="ctr"/>
-            <a:r>
-              <a:rPr kumimoji="1" lang="ja-JP" altLang="en-US" b="1" dirty="0"/>
-              <a:t>サーバー</a:t>
-            </a:r>
-          </a:p>
-        </p:txBody>
-      </p:sp>
-      <p:cxnSp>
-        <p:nvCxnSpPr>
-          <p:cNvPr id="10" name="直線矢印コネクタ 9">
-            <a:extLst>
-              <a:ext uri="{FF2B5EF4-FFF2-40B4-BE49-F238E27FC236}">
-                <a16:creationId xmlns:a16="http://schemas.microsoft.com/office/drawing/2014/main" id="{05AD7A5F-C4AB-41A7-94C5-653139DECD60}"/>
-              </a:ext>
-            </a:extLst>
-          </p:cNvPr>
-          <p:cNvCxnSpPr/>
-          <p:nvPr/>
-        </p:nvCxnSpPr>
-        <p:spPr>
-          <a:xfrm flipH="1">
-            <a:off x="1346200" y="3158067"/>
-            <a:ext cx="609600" cy="872066"/>
-          </a:xfrm>
-          <a:prstGeom prst="straightConnector1">
-            <a:avLst/>
-          </a:prstGeom>
-          <a:ln w="38100">
-            <a:solidFill>
-              <a:srgbClr val="FF0000"/>
-            </a:solidFill>
-            <a:tailEnd type="triangle"/>
-          </a:ln>
-        </p:spPr>
-        <p:style>
-          <a:lnRef idx="1">
-            <a:schemeClr val="accent1"/>
-          </a:lnRef>
-          <a:fillRef idx="0">
-            <a:schemeClr val="accent1"/>
-          </a:fillRef>
-          <a:effectRef idx="0">
-            <a:schemeClr val="accent1"/>
-          </a:effectRef>
-          <a:fontRef idx="minor">
-            <a:schemeClr val="tx1"/>
-          </a:fontRef>
-        </p:style>
-      </p:cxnSp>
-      <p:cxnSp>
-        <p:nvCxnSpPr>
-          <p:cNvPr id="11" name="直線矢印コネクタ 10">
-            <a:extLst>
-              <a:ext uri="{FF2B5EF4-FFF2-40B4-BE49-F238E27FC236}">
-                <a16:creationId xmlns:a16="http://schemas.microsoft.com/office/drawing/2014/main" id="{31CBEBB4-646C-485D-AF40-F1C5F572E513}"/>
-              </a:ext>
-            </a:extLst>
-          </p:cNvPr>
-          <p:cNvCxnSpPr>
-            <a:cxnSpLocks/>
-          </p:cNvCxnSpPr>
-          <p:nvPr/>
-        </p:nvCxnSpPr>
-        <p:spPr>
-          <a:xfrm flipH="1">
-            <a:off x="2096165" y="3310467"/>
-            <a:ext cx="12035" cy="1854200"/>
-          </a:xfrm>
-          <a:prstGeom prst="straightConnector1">
-            <a:avLst/>
-          </a:prstGeom>
-          <a:ln w="38100">
-            <a:solidFill>
-              <a:srgbClr val="FF0000"/>
-            </a:solidFill>
-            <a:tailEnd type="triangle"/>
-          </a:ln>
-        </p:spPr>
-        <p:style>
-          <a:lnRef idx="1">
-            <a:schemeClr val="accent1"/>
-          </a:lnRef>
-          <a:fillRef idx="0">
-            <a:schemeClr val="accent1"/>
-          </a:fillRef>
-          <a:effectRef idx="0">
-            <a:schemeClr val="accent1"/>
-          </a:effectRef>
-          <a:fontRef idx="minor">
-            <a:schemeClr val="tx1"/>
-          </a:fontRef>
-        </p:style>
-      </p:cxnSp>
-      <p:cxnSp>
-        <p:nvCxnSpPr>
-          <p:cNvPr id="13" name="直線矢印コネクタ 12">
-            <a:extLst>
-              <a:ext uri="{FF2B5EF4-FFF2-40B4-BE49-F238E27FC236}">
-                <a16:creationId xmlns:a16="http://schemas.microsoft.com/office/drawing/2014/main" id="{AECEC8A4-7134-44EE-9F60-85E08A383D81}"/>
-              </a:ext>
-            </a:extLst>
-          </p:cNvPr>
-          <p:cNvCxnSpPr>
-            <a:cxnSpLocks/>
-          </p:cNvCxnSpPr>
-          <p:nvPr/>
-        </p:nvCxnSpPr>
-        <p:spPr>
-          <a:xfrm>
-            <a:off x="3242733" y="3158067"/>
-            <a:ext cx="0" cy="719666"/>
-          </a:xfrm>
-          <a:prstGeom prst="straightConnector1">
-            <a:avLst/>
-          </a:prstGeom>
-          <a:ln w="38100">
-            <a:solidFill>
-              <a:srgbClr val="FF0000"/>
-            </a:solidFill>
-            <a:tailEnd type="triangle"/>
-          </a:ln>
-        </p:spPr>
-        <p:style>
-          <a:lnRef idx="1">
-            <a:schemeClr val="accent1"/>
-          </a:lnRef>
-          <a:fillRef idx="0">
-            <a:schemeClr val="accent1"/>
-          </a:fillRef>
-          <a:effectRef idx="0">
-            <a:schemeClr val="accent1"/>
-          </a:effectRef>
-          <a:fontRef idx="minor">
-            <a:schemeClr val="tx1"/>
-          </a:fontRef>
-        </p:style>
-      </p:cxnSp>
-      <p:cxnSp>
-        <p:nvCxnSpPr>
-          <p:cNvPr id="15" name="直線矢印コネクタ 14">
-            <a:extLst>
-              <a:ext uri="{FF2B5EF4-FFF2-40B4-BE49-F238E27FC236}">
-                <a16:creationId xmlns:a16="http://schemas.microsoft.com/office/drawing/2014/main" id="{AD3A28E4-C04A-4192-B0AE-1430E5CE3C5B}"/>
-              </a:ext>
-            </a:extLst>
-          </p:cNvPr>
-          <p:cNvCxnSpPr>
-            <a:cxnSpLocks/>
-          </p:cNvCxnSpPr>
-          <p:nvPr/>
-        </p:nvCxnSpPr>
-        <p:spPr>
-          <a:xfrm>
-            <a:off x="3488266" y="3170767"/>
-            <a:ext cx="668867" cy="2095500"/>
-          </a:xfrm>
-          <a:prstGeom prst="straightConnector1">
-            <a:avLst/>
-          </a:prstGeom>
-          <a:ln w="38100">
-            <a:solidFill>
-              <a:srgbClr val="FF0000"/>
-            </a:solidFill>
-            <a:tailEnd type="triangle"/>
-          </a:ln>
-        </p:spPr>
-        <p:style>
-          <a:lnRef idx="1">
-            <a:schemeClr val="accent1"/>
-          </a:lnRef>
-          <a:fillRef idx="0">
-            <a:schemeClr val="accent1"/>
-          </a:fillRef>
-          <a:effectRef idx="0">
-            <a:schemeClr val="accent1"/>
-          </a:effectRef>
-          <a:fontRef idx="minor">
-            <a:schemeClr val="tx1"/>
-          </a:fontRef>
-        </p:style>
-      </p:cxnSp>
-    </p:spTree>
-    <p:extLst>
-      <p:ext uri="{BB962C8B-B14F-4D97-AF65-F5344CB8AC3E}">
-        <p14:creationId xmlns:p14="http://schemas.microsoft.com/office/powerpoint/2010/main" val="3964339238"/>
-      </p:ext>
-    </p:extLst>
-  </p:cSld>
-  <p:clrMapOvr>
-    <a:masterClrMapping/>
-  </p:clrMapOvr>
-</p:sld>
-</file>
-
-<file path=ppt/slides/slide20.xml><?xml version="1.0" encoding="utf-8"?>
-<p:sld xmlns:a="http://schemas.openxmlformats.org/drawingml/2006/main" xmlns:r="http://schemas.openxmlformats.org/officeDocument/2006/relationships" xmlns:p="http://schemas.openxmlformats.org/presentationml/2006/main">
-  <p:cSld>
-    <p:spTree>
-      <p:nvGrpSpPr>
-        <p:cNvPr id="1" name=""/>
-        <p:cNvGrpSpPr/>
-        <p:nvPr/>
-      </p:nvGrpSpPr>
-      <p:grpSpPr>
-        <a:xfrm>
-          <a:off x="0" y="0"/>
-          <a:ext cx="0" cy="0"/>
-          <a:chOff x="0" y="0"/>
-          <a:chExt cx="0" cy="0"/>
-        </a:xfrm>
-      </p:grpSpPr>
-      <p:sp>
-        <p:nvSpPr>
-          <p:cNvPr id="4" name="テキスト ボックス 3">
-            <a:extLst>
-              <a:ext uri="{FF2B5EF4-FFF2-40B4-BE49-F238E27FC236}">
-                <a16:creationId xmlns:a16="http://schemas.microsoft.com/office/drawing/2014/main" id="{5A13BF46-B8C5-48AA-8308-C9ECFF431A18}"/>
-              </a:ext>
-            </a:extLst>
-          </p:cNvPr>
-          <p:cNvSpPr txBox="1"/>
-          <p:nvPr/>
-        </p:nvSpPr>
-        <p:spPr>
-          <a:xfrm>
-            <a:off x="567542" y="491954"/>
-            <a:ext cx="3057247" cy="584775"/>
-          </a:xfrm>
-          <a:prstGeom prst="rect">
-            <a:avLst/>
-          </a:prstGeom>
-          <a:noFill/>
-        </p:spPr>
-        <p:txBody>
-          <a:bodyPr wrap="none" rtlCol="0">
-            <a:spAutoFit/>
-          </a:bodyPr>
-          <a:lstStyle/>
-          <a:p>
-            <a:r>
-              <a:rPr kumimoji="1" lang="ja-JP" altLang="en-US" sz="3200" b="1" u="sng" dirty="0"/>
-              <a:t>プレイヤー同期</a:t>
-            </a:r>
-          </a:p>
-        </p:txBody>
-      </p:sp>
-      <p:sp>
-        <p:nvSpPr>
-          <p:cNvPr id="6" name="テキスト ボックス 5">
-            <a:extLst>
-              <a:ext uri="{FF2B5EF4-FFF2-40B4-BE49-F238E27FC236}">
-                <a16:creationId xmlns:a16="http://schemas.microsoft.com/office/drawing/2014/main" id="{55830AD6-028B-4C4E-80BF-B70DFC1C3A46}"/>
-              </a:ext>
-            </a:extLst>
-          </p:cNvPr>
-          <p:cNvSpPr txBox="1"/>
-          <p:nvPr/>
-        </p:nvSpPr>
-        <p:spPr>
-          <a:xfrm>
-            <a:off x="567542" y="1216429"/>
-            <a:ext cx="5482591" cy="461665"/>
-          </a:xfrm>
-          <a:prstGeom prst="rect">
-            <a:avLst/>
-          </a:prstGeom>
-          <a:noFill/>
-        </p:spPr>
-        <p:txBody>
-          <a:bodyPr wrap="none" rtlCol="0">
-            <a:spAutoFit/>
-          </a:bodyPr>
-          <a:lstStyle/>
-          <a:p>
-            <a:r>
-              <a:rPr lang="ja-JP" altLang="en-US" sz="2400" dirty="0"/>
-              <a:t>送信関数を書きます。（</a:t>
-            </a:r>
-            <a:r>
-              <a:rPr lang="en-US" altLang="ja-JP" sz="2400" b="1" dirty="0">
-                <a:solidFill>
-                  <a:srgbClr val="FF0000"/>
-                </a:solidFill>
-              </a:rPr>
-              <a:t>Server.cpp</a:t>
-            </a:r>
-            <a:r>
-              <a:rPr lang="ja-JP" altLang="en-US" sz="2400" dirty="0"/>
-              <a:t>）</a:t>
-            </a:r>
-            <a:endParaRPr lang="en-US" altLang="ja-JP" sz="2400" dirty="0"/>
-          </a:p>
-        </p:txBody>
-      </p:sp>
-      <p:pic>
-        <p:nvPicPr>
-          <p:cNvPr id="5" name="図 4">
-            <a:extLst>
-              <a:ext uri="{FF2B5EF4-FFF2-40B4-BE49-F238E27FC236}">
-                <a16:creationId xmlns:a16="http://schemas.microsoft.com/office/drawing/2014/main" id="{0B108EE7-FF4D-4879-BBCD-FFAE7C31814A}"/>
-              </a:ext>
-            </a:extLst>
-          </p:cNvPr>
-          <p:cNvPicPr>
-            <a:picLocks noChangeAspect="1"/>
-          </p:cNvPicPr>
-          <p:nvPr/>
-        </p:nvPicPr>
-        <p:blipFill>
-          <a:blip r:embed="rId2"/>
-          <a:stretch>
-            <a:fillRect/>
-          </a:stretch>
-        </p:blipFill>
-        <p:spPr>
-          <a:xfrm>
-            <a:off x="567543" y="1817794"/>
-            <a:ext cx="7967862" cy="4548252"/>
-          </a:xfrm>
-          <a:prstGeom prst="rect">
-            <a:avLst/>
-          </a:prstGeom>
-        </p:spPr>
-      </p:pic>
-      <p:sp>
-        <p:nvSpPr>
-          <p:cNvPr id="9" name="テキスト ボックス 8">
-            <a:extLst>
-              <a:ext uri="{FF2B5EF4-FFF2-40B4-BE49-F238E27FC236}">
-                <a16:creationId xmlns:a16="http://schemas.microsoft.com/office/drawing/2014/main" id="{6B3EE641-7655-436D-9247-7765D502CB40}"/>
-              </a:ext>
-            </a:extLst>
-          </p:cNvPr>
-          <p:cNvSpPr txBox="1"/>
-          <p:nvPr/>
-        </p:nvSpPr>
-        <p:spPr>
-          <a:xfrm>
-            <a:off x="567542" y="6366046"/>
-            <a:ext cx="7210628" cy="400110"/>
-          </a:xfrm>
-          <a:prstGeom prst="rect">
-            <a:avLst/>
-          </a:prstGeom>
-          <a:noFill/>
-        </p:spPr>
-        <p:txBody>
-          <a:bodyPr wrap="none" rtlCol="0">
-            <a:spAutoFit/>
-          </a:bodyPr>
-          <a:lstStyle/>
-          <a:p>
-            <a:r>
-              <a:rPr lang="en-US" altLang="ja-JP" sz="2000" b="1" dirty="0">
-                <a:solidFill>
-                  <a:srgbClr val="00B050"/>
-                </a:solidFill>
-              </a:rPr>
-              <a:t>※Server</a:t>
-            </a:r>
-            <a:r>
-              <a:rPr lang="ja-JP" altLang="en-US" sz="2000" b="1" dirty="0">
-                <a:solidFill>
-                  <a:srgbClr val="00B050"/>
-                </a:solidFill>
-              </a:rPr>
-              <a:t>側にも</a:t>
-            </a:r>
-            <a:r>
-              <a:rPr lang="en-US" altLang="ja-JP" sz="2000" b="1" dirty="0" err="1">
-                <a:solidFill>
-                  <a:srgbClr val="00B050"/>
-                </a:solidFill>
-              </a:rPr>
-              <a:t>NetworkUtility.h</a:t>
-            </a:r>
-            <a:r>
-              <a:rPr lang="ja-JP" altLang="en-US" sz="2000" b="1" dirty="0">
-                <a:solidFill>
-                  <a:srgbClr val="00B050"/>
-                </a:solidFill>
-              </a:rPr>
-              <a:t>を追加しても良いかもです</a:t>
-            </a:r>
-            <a:endParaRPr lang="en-US" altLang="ja-JP" sz="2000" b="1" dirty="0">
-              <a:solidFill>
-                <a:srgbClr val="00B050"/>
-              </a:solidFill>
-            </a:endParaRPr>
-          </a:p>
-        </p:txBody>
-      </p:sp>
-    </p:spTree>
-    <p:extLst>
-      <p:ext uri="{BB962C8B-B14F-4D97-AF65-F5344CB8AC3E}">
-        <p14:creationId xmlns:p14="http://schemas.microsoft.com/office/powerpoint/2010/main" val="3042774913"/>
-      </p:ext>
-    </p:extLst>
-  </p:cSld>
-  <p:clrMapOvr>
-    <a:masterClrMapping/>
-  </p:clrMapOvr>
-</p:sld>
-</file>
-
-<file path=ppt/slides/slide21.xml><?xml version="1.0" encoding="utf-8"?>
-<p:sld xmlns:a="http://schemas.openxmlformats.org/drawingml/2006/main" xmlns:r="http://schemas.openxmlformats.org/officeDocument/2006/relationships" xmlns:p="http://schemas.openxmlformats.org/presentationml/2006/main">
-  <p:cSld>
-    <p:spTree>
-      <p:nvGrpSpPr>
-        <p:cNvPr id="1" name=""/>
-        <p:cNvGrpSpPr/>
-        <p:nvPr/>
-      </p:nvGrpSpPr>
-      <p:grpSpPr>
-        <a:xfrm>
-          <a:off x="0" y="0"/>
-          <a:ext cx="0" cy="0"/>
-          <a:chOff x="0" y="0"/>
-          <a:chExt cx="0" cy="0"/>
-        </a:xfrm>
-      </p:grpSpPr>
-      <p:sp>
-        <p:nvSpPr>
-          <p:cNvPr id="4" name="テキスト ボックス 3">
-            <a:extLst>
-              <a:ext uri="{FF2B5EF4-FFF2-40B4-BE49-F238E27FC236}">
-                <a16:creationId xmlns:a16="http://schemas.microsoft.com/office/drawing/2014/main" id="{5A13BF46-B8C5-48AA-8308-C9ECFF431A18}"/>
-              </a:ext>
-            </a:extLst>
-          </p:cNvPr>
-          <p:cNvSpPr txBox="1"/>
-          <p:nvPr/>
-        </p:nvSpPr>
-        <p:spPr>
-          <a:xfrm>
-            <a:off x="567542" y="491954"/>
-            <a:ext cx="3057247" cy="584775"/>
-          </a:xfrm>
-          <a:prstGeom prst="rect">
-            <a:avLst/>
-          </a:prstGeom>
-          <a:noFill/>
-        </p:spPr>
-        <p:txBody>
-          <a:bodyPr wrap="none" rtlCol="0">
-            <a:spAutoFit/>
-          </a:bodyPr>
-          <a:lstStyle/>
-          <a:p>
-            <a:r>
-              <a:rPr kumimoji="1" lang="ja-JP" altLang="en-US" sz="3200" b="1" u="sng" dirty="0"/>
-              <a:t>プレイヤー同期</a:t>
-            </a:r>
-          </a:p>
-        </p:txBody>
-      </p:sp>
-      <p:sp>
-        <p:nvSpPr>
-          <p:cNvPr id="6" name="テキスト ボックス 5">
-            <a:extLst>
-              <a:ext uri="{FF2B5EF4-FFF2-40B4-BE49-F238E27FC236}">
-                <a16:creationId xmlns:a16="http://schemas.microsoft.com/office/drawing/2014/main" id="{55830AD6-028B-4C4E-80BF-B70DFC1C3A46}"/>
-              </a:ext>
-            </a:extLst>
-          </p:cNvPr>
-          <p:cNvSpPr txBox="1"/>
-          <p:nvPr/>
-        </p:nvSpPr>
-        <p:spPr>
-          <a:xfrm>
-            <a:off x="567542" y="1216429"/>
-            <a:ext cx="8868133" cy="461665"/>
-          </a:xfrm>
-          <a:prstGeom prst="rect">
-            <a:avLst/>
-          </a:prstGeom>
-          <a:noFill/>
-        </p:spPr>
-        <p:txBody>
-          <a:bodyPr wrap="none" rtlCol="0">
-            <a:spAutoFit/>
-          </a:bodyPr>
-          <a:lstStyle/>
-          <a:p>
-            <a:r>
-              <a:rPr lang="ja-JP" altLang="en-US" sz="2400" dirty="0"/>
-              <a:t>データ受信後に更新があれば送信しましょう。（</a:t>
-            </a:r>
-            <a:r>
-              <a:rPr lang="en-US" altLang="ja-JP" sz="2400" b="1" dirty="0">
-                <a:solidFill>
-                  <a:srgbClr val="FF0000"/>
-                </a:solidFill>
-              </a:rPr>
-              <a:t>Server.cpp</a:t>
-            </a:r>
-            <a:r>
-              <a:rPr lang="ja-JP" altLang="en-US" sz="2400" dirty="0"/>
-              <a:t>）</a:t>
-            </a:r>
-            <a:endParaRPr lang="en-US" altLang="ja-JP" sz="2400" dirty="0"/>
-          </a:p>
-        </p:txBody>
-      </p:sp>
-      <p:pic>
-        <p:nvPicPr>
-          <p:cNvPr id="3" name="図 2">
-            <a:extLst>
-              <a:ext uri="{FF2B5EF4-FFF2-40B4-BE49-F238E27FC236}">
-                <a16:creationId xmlns:a16="http://schemas.microsoft.com/office/drawing/2014/main" id="{0CD16BE2-7853-4BCB-B662-82CEEEB0049F}"/>
-              </a:ext>
-            </a:extLst>
-          </p:cNvPr>
-          <p:cNvPicPr>
-            <a:picLocks noChangeAspect="1"/>
-          </p:cNvPicPr>
-          <p:nvPr/>
-        </p:nvPicPr>
-        <p:blipFill>
-          <a:blip r:embed="rId2"/>
-          <a:stretch>
-            <a:fillRect/>
-          </a:stretch>
-        </p:blipFill>
-        <p:spPr>
-          <a:xfrm>
-            <a:off x="567541" y="1817794"/>
-            <a:ext cx="7707627" cy="2720339"/>
-          </a:xfrm>
-          <a:prstGeom prst="rect">
-            <a:avLst/>
-          </a:prstGeom>
-        </p:spPr>
-      </p:pic>
-      <p:sp>
-        <p:nvSpPr>
-          <p:cNvPr id="8" name="正方形/長方形 7">
-            <a:extLst>
-              <a:ext uri="{FF2B5EF4-FFF2-40B4-BE49-F238E27FC236}">
-                <a16:creationId xmlns:a16="http://schemas.microsoft.com/office/drawing/2014/main" id="{3292AD34-27A3-4F11-ADA1-DFAAAC39F07C}"/>
-              </a:ext>
-            </a:extLst>
-          </p:cNvPr>
-          <p:cNvSpPr/>
-          <p:nvPr/>
-        </p:nvSpPr>
-        <p:spPr>
-          <a:xfrm>
-            <a:off x="1837524" y="2506133"/>
-            <a:ext cx="6328168" cy="1452034"/>
-          </a:xfrm>
-          <a:prstGeom prst="rect">
-            <a:avLst/>
-          </a:prstGeom>
-          <a:noFill/>
-          <a:ln w="28575">
-            <a:solidFill>
-              <a:srgbClr val="FF0000"/>
-            </a:solidFill>
-          </a:ln>
-        </p:spPr>
-        <p:style>
-          <a:lnRef idx="2">
-            <a:schemeClr val="accent1">
-              <a:shade val="50000"/>
-            </a:schemeClr>
-          </a:lnRef>
-          <a:fillRef idx="1">
-            <a:schemeClr val="accent1"/>
-          </a:fillRef>
-          <a:effectRef idx="0">
-            <a:schemeClr val="accent1"/>
-          </a:effectRef>
-          <a:fontRef idx="minor">
-            <a:schemeClr val="lt1"/>
-          </a:fontRef>
-        </p:style>
-        <p:txBody>
-          <a:bodyPr rtlCol="0" anchor="ctr"/>
-          <a:lstStyle/>
-          <a:p>
-            <a:pPr algn="ctr"/>
-            <a:endParaRPr kumimoji="1" lang="ja-JP" altLang="en-US"/>
-          </a:p>
-        </p:txBody>
-      </p:sp>
-    </p:spTree>
-    <p:extLst>
-      <p:ext uri="{BB962C8B-B14F-4D97-AF65-F5344CB8AC3E}">
-        <p14:creationId xmlns:p14="http://schemas.microsoft.com/office/powerpoint/2010/main" val="3076169500"/>
-      </p:ext>
-    </p:extLst>
-  </p:cSld>
-  <p:clrMapOvr>
-    <a:masterClrMapping/>
-  </p:clrMapOvr>
-</p:sld>
-</file>
-
-<file path=ppt/slides/slide22.xml><?xml version="1.0" encoding="utf-8"?>
-<p:sld xmlns:a="http://schemas.openxmlformats.org/drawingml/2006/main" xmlns:r="http://schemas.openxmlformats.org/officeDocument/2006/relationships" xmlns:p="http://schemas.openxmlformats.org/presentationml/2006/main">
-  <p:cSld>
-    <p:spTree>
-      <p:nvGrpSpPr>
-        <p:cNvPr id="1" name=""/>
-        <p:cNvGrpSpPr/>
-        <p:nvPr/>
-      </p:nvGrpSpPr>
-      <p:grpSpPr>
-        <a:xfrm>
-          <a:off x="0" y="0"/>
-          <a:ext cx="0" cy="0"/>
-          <a:chOff x="0" y="0"/>
-          <a:chExt cx="0" cy="0"/>
-        </a:xfrm>
-      </p:grpSpPr>
-      <p:sp>
-        <p:nvSpPr>
-          <p:cNvPr id="4" name="テキスト ボックス 3">
-            <a:extLst>
-              <a:ext uri="{FF2B5EF4-FFF2-40B4-BE49-F238E27FC236}">
-                <a16:creationId xmlns:a16="http://schemas.microsoft.com/office/drawing/2014/main" id="{5A13BF46-B8C5-48AA-8308-C9ECFF431A18}"/>
-              </a:ext>
-            </a:extLst>
-          </p:cNvPr>
-          <p:cNvSpPr txBox="1"/>
-          <p:nvPr/>
-        </p:nvSpPr>
-        <p:spPr>
-          <a:xfrm>
-            <a:off x="567542" y="491954"/>
-            <a:ext cx="3057247" cy="584775"/>
-          </a:xfrm>
-          <a:prstGeom prst="rect">
-            <a:avLst/>
-          </a:prstGeom>
-          <a:noFill/>
-        </p:spPr>
-        <p:txBody>
-          <a:bodyPr wrap="none" rtlCol="0">
-            <a:spAutoFit/>
-          </a:bodyPr>
-          <a:lstStyle/>
-          <a:p>
-            <a:r>
-              <a:rPr kumimoji="1" lang="ja-JP" altLang="en-US" sz="3200" b="1" u="sng" dirty="0"/>
-              <a:t>プレイヤー同期</a:t>
-            </a:r>
-          </a:p>
-        </p:txBody>
-      </p:sp>
-      <p:sp>
-        <p:nvSpPr>
-          <p:cNvPr id="6" name="テキスト ボックス 5">
-            <a:extLst>
-              <a:ext uri="{FF2B5EF4-FFF2-40B4-BE49-F238E27FC236}">
-                <a16:creationId xmlns:a16="http://schemas.microsoft.com/office/drawing/2014/main" id="{55830AD6-028B-4C4E-80BF-B70DFC1C3A46}"/>
-              </a:ext>
-            </a:extLst>
-          </p:cNvPr>
-          <p:cNvSpPr txBox="1"/>
-          <p:nvPr/>
-        </p:nvSpPr>
-        <p:spPr>
-          <a:xfrm>
-            <a:off x="567542" y="1216429"/>
-            <a:ext cx="9483686" cy="830997"/>
-          </a:xfrm>
-          <a:prstGeom prst="rect">
-            <a:avLst/>
-          </a:prstGeom>
-          <a:noFill/>
-        </p:spPr>
-        <p:txBody>
-          <a:bodyPr wrap="none" rtlCol="0">
-            <a:spAutoFit/>
-          </a:bodyPr>
-          <a:lstStyle/>
-          <a:p>
-            <a:r>
-              <a:rPr lang="ja-JP" altLang="en-US" sz="2400" dirty="0"/>
-              <a:t>またログイン時に呼ばないと、</a:t>
-            </a:r>
-            <a:endParaRPr lang="en-US" altLang="ja-JP" sz="2400" dirty="0"/>
-          </a:p>
-          <a:p>
-            <a:r>
-              <a:rPr lang="ja-JP" altLang="en-US" sz="2400" dirty="0"/>
-              <a:t>ログインした直後に正しい位置に配置されません。（</a:t>
-            </a:r>
-            <a:r>
-              <a:rPr lang="en-US" altLang="ja-JP" sz="2400" b="1" dirty="0">
-                <a:solidFill>
-                  <a:srgbClr val="FF0000"/>
-                </a:solidFill>
-              </a:rPr>
-              <a:t>Server.cpp</a:t>
-            </a:r>
-            <a:r>
-              <a:rPr lang="ja-JP" altLang="en-US" sz="2400" dirty="0"/>
-              <a:t>）</a:t>
-            </a:r>
-            <a:endParaRPr lang="en-US" altLang="ja-JP" sz="2400" dirty="0"/>
-          </a:p>
-        </p:txBody>
-      </p:sp>
-      <p:pic>
-        <p:nvPicPr>
-          <p:cNvPr id="5" name="図 4">
-            <a:extLst>
-              <a:ext uri="{FF2B5EF4-FFF2-40B4-BE49-F238E27FC236}">
-                <a16:creationId xmlns:a16="http://schemas.microsoft.com/office/drawing/2014/main" id="{9E661D8B-8D54-4748-9204-51BDF225868A}"/>
-              </a:ext>
-            </a:extLst>
-          </p:cNvPr>
-          <p:cNvPicPr>
-            <a:picLocks noChangeAspect="1"/>
-          </p:cNvPicPr>
-          <p:nvPr/>
-        </p:nvPicPr>
-        <p:blipFill>
-          <a:blip r:embed="rId2"/>
-          <a:stretch>
-            <a:fillRect/>
-          </a:stretch>
-        </p:blipFill>
-        <p:spPr>
-          <a:xfrm>
-            <a:off x="567542" y="2187125"/>
-            <a:ext cx="4520055" cy="2623449"/>
-          </a:xfrm>
-          <a:prstGeom prst="rect">
-            <a:avLst/>
-          </a:prstGeom>
-        </p:spPr>
-      </p:pic>
-      <p:sp>
-        <p:nvSpPr>
-          <p:cNvPr id="9" name="正方形/長方形 8">
-            <a:extLst>
-              <a:ext uri="{FF2B5EF4-FFF2-40B4-BE49-F238E27FC236}">
-                <a16:creationId xmlns:a16="http://schemas.microsoft.com/office/drawing/2014/main" id="{E488C26F-AAFC-4710-B848-C9FA2E46D0AD}"/>
-              </a:ext>
-            </a:extLst>
-          </p:cNvPr>
-          <p:cNvSpPr/>
-          <p:nvPr/>
-        </p:nvSpPr>
-        <p:spPr>
-          <a:xfrm>
-            <a:off x="2133600" y="3592956"/>
-            <a:ext cx="3048000" cy="830997"/>
-          </a:xfrm>
-          <a:prstGeom prst="rect">
-            <a:avLst/>
-          </a:prstGeom>
-          <a:noFill/>
-          <a:ln w="28575">
-            <a:solidFill>
-              <a:srgbClr val="FF0000"/>
-            </a:solidFill>
-          </a:ln>
-        </p:spPr>
-        <p:style>
-          <a:lnRef idx="2">
-            <a:schemeClr val="accent1">
-              <a:shade val="50000"/>
-            </a:schemeClr>
-          </a:lnRef>
-          <a:fillRef idx="1">
-            <a:schemeClr val="accent1"/>
-          </a:fillRef>
-          <a:effectRef idx="0">
-            <a:schemeClr val="accent1"/>
-          </a:effectRef>
-          <a:fontRef idx="minor">
-            <a:schemeClr val="lt1"/>
-          </a:fontRef>
-        </p:style>
-        <p:txBody>
-          <a:bodyPr rtlCol="0" anchor="ctr"/>
-          <a:lstStyle/>
-          <a:p>
-            <a:pPr algn="ctr"/>
-            <a:endParaRPr kumimoji="1" lang="ja-JP" altLang="en-US"/>
-          </a:p>
-        </p:txBody>
-      </p:sp>
-      <p:sp>
-        <p:nvSpPr>
-          <p:cNvPr id="10" name="テキスト ボックス 9">
-            <a:extLst>
-              <a:ext uri="{FF2B5EF4-FFF2-40B4-BE49-F238E27FC236}">
-                <a16:creationId xmlns:a16="http://schemas.microsoft.com/office/drawing/2014/main" id="{1F1CC272-7587-4445-AC5A-B4A8C79768E1}"/>
-              </a:ext>
-            </a:extLst>
-          </p:cNvPr>
-          <p:cNvSpPr txBox="1"/>
-          <p:nvPr/>
-        </p:nvSpPr>
-        <p:spPr>
-          <a:xfrm>
-            <a:off x="5816875" y="3685289"/>
-            <a:ext cx="5032147" cy="738664"/>
-          </a:xfrm>
-          <a:prstGeom prst="rect">
-            <a:avLst/>
-          </a:prstGeom>
-          <a:noFill/>
-        </p:spPr>
-        <p:txBody>
-          <a:bodyPr wrap="none" rtlCol="0">
-            <a:spAutoFit/>
-          </a:bodyPr>
-          <a:lstStyle/>
-          <a:p>
-            <a:r>
-              <a:rPr lang="en-US" altLang="ja-JP" sz="1400" b="1" dirty="0">
-                <a:solidFill>
-                  <a:srgbClr val="00B050"/>
-                </a:solidFill>
-              </a:rPr>
-              <a:t>MEMO</a:t>
-            </a:r>
-          </a:p>
-          <a:p>
-            <a:r>
-              <a:rPr lang="ja-JP" altLang="en-US" sz="1400" b="1" dirty="0"/>
-              <a:t>本当は座標データもログインデータに含めた方が良いです。</a:t>
-            </a:r>
-            <a:endParaRPr lang="en-US" altLang="ja-JP" sz="1400" b="1" dirty="0"/>
-          </a:p>
-          <a:p>
-            <a:r>
-              <a:rPr lang="ja-JP" altLang="en-US" sz="1400" b="1" dirty="0"/>
-              <a:t>あくまで練習プログラムとして。</a:t>
-            </a:r>
-            <a:endParaRPr lang="en-US" altLang="ja-JP" sz="1400" b="1" dirty="0"/>
-          </a:p>
-        </p:txBody>
-      </p:sp>
-      <p:sp>
-        <p:nvSpPr>
-          <p:cNvPr id="11" name="テキスト ボックス 10">
-            <a:extLst>
-              <a:ext uri="{FF2B5EF4-FFF2-40B4-BE49-F238E27FC236}">
-                <a16:creationId xmlns:a16="http://schemas.microsoft.com/office/drawing/2014/main" id="{70076ED8-AA5D-43EF-BD54-2DC4DC8BC8EC}"/>
-              </a:ext>
-            </a:extLst>
-          </p:cNvPr>
-          <p:cNvSpPr txBox="1"/>
-          <p:nvPr/>
-        </p:nvSpPr>
-        <p:spPr>
-          <a:xfrm>
-            <a:off x="567542" y="4950273"/>
-            <a:ext cx="4185761" cy="461665"/>
-          </a:xfrm>
-          <a:prstGeom prst="rect">
-            <a:avLst/>
-          </a:prstGeom>
-          <a:noFill/>
-        </p:spPr>
-        <p:txBody>
-          <a:bodyPr wrap="none" rtlCol="0">
-            <a:spAutoFit/>
-          </a:bodyPr>
-          <a:lstStyle/>
-          <a:p>
-            <a:r>
-              <a:rPr lang="ja-JP" altLang="en-US" sz="2400" dirty="0"/>
-              <a:t>クライアント側に戻ります。</a:t>
-            </a:r>
-            <a:endParaRPr lang="en-US" altLang="ja-JP" sz="2400" dirty="0"/>
-          </a:p>
-        </p:txBody>
-      </p:sp>
-    </p:spTree>
-    <p:extLst>
-      <p:ext uri="{BB962C8B-B14F-4D97-AF65-F5344CB8AC3E}">
-        <p14:creationId xmlns:p14="http://schemas.microsoft.com/office/powerpoint/2010/main" val="2657814366"/>
-      </p:ext>
-    </p:extLst>
-  </p:cSld>
-  <p:clrMapOvr>
-    <a:masterClrMapping/>
-  </p:clrMapOvr>
-</p:sld>
-</file>
-
-<file path=ppt/slides/slide23.xml><?xml version="1.0" encoding="utf-8"?>
-<p:sld xmlns:a="http://schemas.openxmlformats.org/drawingml/2006/main" xmlns:r="http://schemas.openxmlformats.org/officeDocument/2006/relationships" xmlns:p="http://schemas.openxmlformats.org/presentationml/2006/main">
-  <p:cSld>
-    <p:spTree>
-      <p:nvGrpSpPr>
-        <p:cNvPr id="1" name=""/>
-        <p:cNvGrpSpPr/>
-        <p:nvPr/>
-      </p:nvGrpSpPr>
-      <p:grpSpPr>
-        <a:xfrm>
-          <a:off x="0" y="0"/>
-          <a:ext cx="0" cy="0"/>
-          <a:chOff x="0" y="0"/>
-          <a:chExt cx="0" cy="0"/>
-        </a:xfrm>
-      </p:grpSpPr>
-      <p:sp>
-        <p:nvSpPr>
-          <p:cNvPr id="4" name="テキスト ボックス 3">
-            <a:extLst>
-              <a:ext uri="{FF2B5EF4-FFF2-40B4-BE49-F238E27FC236}">
-                <a16:creationId xmlns:a16="http://schemas.microsoft.com/office/drawing/2014/main" id="{5A13BF46-B8C5-48AA-8308-C9ECFF431A18}"/>
-              </a:ext>
-            </a:extLst>
-          </p:cNvPr>
-          <p:cNvSpPr txBox="1"/>
-          <p:nvPr/>
-        </p:nvSpPr>
-        <p:spPr>
-          <a:xfrm>
-            <a:off x="567542" y="491954"/>
-            <a:ext cx="3057247" cy="584775"/>
-          </a:xfrm>
-          <a:prstGeom prst="rect">
-            <a:avLst/>
-          </a:prstGeom>
-          <a:noFill/>
-        </p:spPr>
-        <p:txBody>
-          <a:bodyPr wrap="none" rtlCol="0">
-            <a:spAutoFit/>
-          </a:bodyPr>
-          <a:lstStyle/>
-          <a:p>
-            <a:r>
-              <a:rPr kumimoji="1" lang="ja-JP" altLang="en-US" sz="3200" b="1" u="sng" dirty="0"/>
-              <a:t>プレイヤー同期</a:t>
-            </a:r>
-          </a:p>
-        </p:txBody>
-      </p:sp>
-      <p:sp>
-        <p:nvSpPr>
-          <p:cNvPr id="6" name="テキスト ボックス 5">
-            <a:extLst>
-              <a:ext uri="{FF2B5EF4-FFF2-40B4-BE49-F238E27FC236}">
-                <a16:creationId xmlns:a16="http://schemas.microsoft.com/office/drawing/2014/main" id="{55830AD6-028B-4C4E-80BF-B70DFC1C3A46}"/>
-              </a:ext>
-            </a:extLst>
-          </p:cNvPr>
-          <p:cNvSpPr txBox="1"/>
-          <p:nvPr/>
-        </p:nvSpPr>
-        <p:spPr>
-          <a:xfrm>
-            <a:off x="567542" y="1216429"/>
-            <a:ext cx="11925059" cy="830997"/>
-          </a:xfrm>
-          <a:prstGeom prst="rect">
-            <a:avLst/>
-          </a:prstGeom>
-          <a:noFill/>
-        </p:spPr>
-        <p:txBody>
-          <a:bodyPr wrap="none" rtlCol="0">
-            <a:spAutoFit/>
-          </a:bodyPr>
-          <a:lstStyle/>
-          <a:p>
-            <a:r>
-              <a:rPr lang="en-US" altLang="ja-JP" sz="2400" b="1" dirty="0" err="1">
-                <a:solidFill>
-                  <a:srgbClr val="00B050"/>
-                </a:solidFill>
-              </a:rPr>
-              <a:t>NetworkPlayScene</a:t>
-            </a:r>
+          <a:p>
             <a:r>
               <a:rPr lang="ja-JP" altLang="en-US" sz="2400" b="1" dirty="0">
                 <a:solidFill>
                   <a:srgbClr val="00B050"/>
                 </a:solidFill>
               </a:rPr>
-              <a:t>クラス</a:t>
-            </a:r>
-            <a:r>
-              <a:rPr lang="ja-JP" altLang="en-US" sz="2400" dirty="0"/>
-              <a:t>に、</a:t>
-            </a:r>
-            <a:endParaRPr lang="en-US" altLang="ja-JP" sz="2400" dirty="0"/>
-          </a:p>
-          <a:p>
-            <a:r>
-              <a:rPr lang="ja-JP" altLang="en-US" sz="2400" dirty="0"/>
-              <a:t>サーバーから送られる座標を受信する関数を追加します。（</a:t>
-            </a:r>
-            <a:r>
-              <a:rPr lang="en-US" altLang="ja-JP" sz="2400" b="1" dirty="0" err="1">
-                <a:solidFill>
-                  <a:srgbClr val="FF0000"/>
-                </a:solidFill>
-              </a:rPr>
-              <a:t>NetworkPlayScene.h</a:t>
-            </a:r>
-            <a:r>
-              <a:rPr lang="ja-JP" altLang="en-US" sz="2400" dirty="0"/>
-              <a:t>）</a:t>
-            </a:r>
-            <a:endParaRPr lang="en-US" altLang="ja-JP" sz="2400" dirty="0"/>
-          </a:p>
-        </p:txBody>
-      </p:sp>
-      <p:pic>
-        <p:nvPicPr>
-          <p:cNvPr id="3" name="図 2">
-            <a:extLst>
-              <a:ext uri="{FF2B5EF4-FFF2-40B4-BE49-F238E27FC236}">
-                <a16:creationId xmlns:a16="http://schemas.microsoft.com/office/drawing/2014/main" id="{08A2B230-7B78-41EB-A5F4-23D7CF8F6B8D}"/>
-              </a:ext>
-            </a:extLst>
-          </p:cNvPr>
-          <p:cNvPicPr>
-            <a:picLocks noChangeAspect="1"/>
-          </p:cNvPicPr>
-          <p:nvPr/>
-        </p:nvPicPr>
-        <p:blipFill>
-          <a:blip r:embed="rId2"/>
-          <a:stretch>
-            <a:fillRect/>
-          </a:stretch>
-        </p:blipFill>
-        <p:spPr>
-          <a:xfrm>
-            <a:off x="567542" y="2187126"/>
-            <a:ext cx="5004796" cy="1826074"/>
-          </a:xfrm>
-          <a:prstGeom prst="rect">
-            <a:avLst/>
-          </a:prstGeom>
-        </p:spPr>
-      </p:pic>
-      <p:sp>
-        <p:nvSpPr>
-          <p:cNvPr id="12" name="正方形/長方形 11">
-            <a:extLst>
-              <a:ext uri="{FF2B5EF4-FFF2-40B4-BE49-F238E27FC236}">
-                <a16:creationId xmlns:a16="http://schemas.microsoft.com/office/drawing/2014/main" id="{B4DA4A4D-85C8-442B-92D6-1B617571F755}"/>
-              </a:ext>
-            </a:extLst>
-          </p:cNvPr>
-          <p:cNvSpPr/>
-          <p:nvPr/>
-        </p:nvSpPr>
-        <p:spPr>
-          <a:xfrm>
-            <a:off x="2100788" y="3429001"/>
-            <a:ext cx="3471549" cy="380999"/>
-          </a:xfrm>
-          <a:prstGeom prst="rect">
-            <a:avLst/>
-          </a:prstGeom>
-          <a:noFill/>
-          <a:ln w="28575">
-            <a:solidFill>
-              <a:srgbClr val="FF0000"/>
-            </a:solidFill>
-          </a:ln>
-        </p:spPr>
-        <p:style>
-          <a:lnRef idx="2">
-            <a:schemeClr val="accent1">
-              <a:shade val="50000"/>
-            </a:schemeClr>
-          </a:lnRef>
-          <a:fillRef idx="1">
-            <a:schemeClr val="accent1"/>
-          </a:fillRef>
-          <a:effectRef idx="0">
-            <a:schemeClr val="accent1"/>
-          </a:effectRef>
-          <a:fontRef idx="minor">
-            <a:schemeClr val="lt1"/>
-          </a:fontRef>
-        </p:style>
-        <p:txBody>
-          <a:bodyPr rtlCol="0" anchor="ctr"/>
-          <a:lstStyle/>
-          <a:p>
-            <a:pPr algn="ctr"/>
-            <a:endParaRPr kumimoji="1" lang="ja-JP" altLang="en-US"/>
-          </a:p>
-        </p:txBody>
-      </p:sp>
-    </p:spTree>
-    <p:extLst>
-      <p:ext uri="{BB962C8B-B14F-4D97-AF65-F5344CB8AC3E}">
-        <p14:creationId xmlns:p14="http://schemas.microsoft.com/office/powerpoint/2010/main" val="2318781365"/>
-      </p:ext>
-    </p:extLst>
-  </p:cSld>
-  <p:clrMapOvr>
-    <a:masterClrMapping/>
-  </p:clrMapOvr>
-</p:sld>
-</file>
-
-<file path=ppt/slides/slide24.xml><?xml version="1.0" encoding="utf-8"?>
-<p:sld xmlns:a="http://schemas.openxmlformats.org/drawingml/2006/main" xmlns:r="http://schemas.openxmlformats.org/officeDocument/2006/relationships" xmlns:p="http://schemas.openxmlformats.org/presentationml/2006/main">
-  <p:cSld>
-    <p:spTree>
-      <p:nvGrpSpPr>
-        <p:cNvPr id="1" name=""/>
-        <p:cNvGrpSpPr/>
-        <p:nvPr/>
-      </p:nvGrpSpPr>
-      <p:grpSpPr>
-        <a:xfrm>
-          <a:off x="0" y="0"/>
-          <a:ext cx="0" cy="0"/>
-          <a:chOff x="0" y="0"/>
-          <a:chExt cx="0" cy="0"/>
-        </a:xfrm>
-      </p:grpSpPr>
-      <p:sp>
-        <p:nvSpPr>
-          <p:cNvPr id="4" name="テキスト ボックス 3">
-            <a:extLst>
-              <a:ext uri="{FF2B5EF4-FFF2-40B4-BE49-F238E27FC236}">
-                <a16:creationId xmlns:a16="http://schemas.microsoft.com/office/drawing/2014/main" id="{5A13BF46-B8C5-48AA-8308-C9ECFF431A18}"/>
-              </a:ext>
-            </a:extLst>
-          </p:cNvPr>
-          <p:cNvSpPr txBox="1"/>
-          <p:nvPr/>
-        </p:nvSpPr>
-        <p:spPr>
-          <a:xfrm>
-            <a:off x="567542" y="491954"/>
-            <a:ext cx="3057247" cy="584775"/>
-          </a:xfrm>
-          <a:prstGeom prst="rect">
-            <a:avLst/>
-          </a:prstGeom>
-          <a:noFill/>
-        </p:spPr>
-        <p:txBody>
-          <a:bodyPr wrap="none" rtlCol="0">
-            <a:spAutoFit/>
-          </a:bodyPr>
-          <a:lstStyle/>
-          <a:p>
-            <a:r>
-              <a:rPr kumimoji="1" lang="ja-JP" altLang="en-US" sz="3200" b="1" u="sng" dirty="0"/>
-              <a:t>プレイヤー同期</a:t>
-            </a:r>
-          </a:p>
-        </p:txBody>
-      </p:sp>
-      <p:sp>
-        <p:nvSpPr>
-          <p:cNvPr id="6" name="テキスト ボックス 5">
-            <a:extLst>
-              <a:ext uri="{FF2B5EF4-FFF2-40B4-BE49-F238E27FC236}">
-                <a16:creationId xmlns:a16="http://schemas.microsoft.com/office/drawing/2014/main" id="{55830AD6-028B-4C4E-80BF-B70DFC1C3A46}"/>
-              </a:ext>
-            </a:extLst>
-          </p:cNvPr>
-          <p:cNvSpPr txBox="1"/>
-          <p:nvPr/>
-        </p:nvSpPr>
-        <p:spPr>
-          <a:xfrm>
-            <a:off x="567542" y="1216429"/>
-            <a:ext cx="7358105" cy="461665"/>
-          </a:xfrm>
-          <a:prstGeom prst="rect">
-            <a:avLst/>
-          </a:prstGeom>
-          <a:noFill/>
-        </p:spPr>
-        <p:txBody>
-          <a:bodyPr wrap="none" rtlCol="0">
-            <a:spAutoFit/>
-          </a:bodyPr>
-          <a:lstStyle/>
-          <a:p>
-            <a:r>
-              <a:rPr lang="ja-JP" altLang="en-US" sz="2400" dirty="0"/>
-              <a:t>受信処理を書きます。（</a:t>
-            </a:r>
-            <a:r>
-              <a:rPr lang="en-US" altLang="ja-JP" sz="2400" b="1" dirty="0">
-                <a:solidFill>
-                  <a:srgbClr val="FF0000"/>
-                </a:solidFill>
-              </a:rPr>
-              <a:t>NetworkPlayScene.cpp</a:t>
-            </a:r>
-            <a:r>
-              <a:rPr lang="ja-JP" altLang="en-US" sz="2400" dirty="0"/>
-              <a:t>）</a:t>
-            </a:r>
-            <a:endParaRPr lang="en-US" altLang="ja-JP" sz="2400" dirty="0"/>
-          </a:p>
-        </p:txBody>
-      </p:sp>
-      <p:pic>
-        <p:nvPicPr>
-          <p:cNvPr id="5" name="図 4">
-            <a:extLst>
-              <a:ext uri="{FF2B5EF4-FFF2-40B4-BE49-F238E27FC236}">
-                <a16:creationId xmlns:a16="http://schemas.microsoft.com/office/drawing/2014/main" id="{00B39317-BB93-461E-A3C9-BBB5740AC72F}"/>
-              </a:ext>
-            </a:extLst>
-          </p:cNvPr>
-          <p:cNvPicPr>
-            <a:picLocks noChangeAspect="1"/>
-          </p:cNvPicPr>
-          <p:nvPr/>
-        </p:nvPicPr>
-        <p:blipFill>
-          <a:blip r:embed="rId2"/>
-          <a:stretch>
-            <a:fillRect/>
-          </a:stretch>
-        </p:blipFill>
-        <p:spPr>
-          <a:xfrm>
-            <a:off x="567542" y="1817794"/>
-            <a:ext cx="6654525" cy="1885324"/>
-          </a:xfrm>
-          <a:prstGeom prst="rect">
-            <a:avLst/>
-          </a:prstGeom>
-        </p:spPr>
-      </p:pic>
-      <p:sp>
-        <p:nvSpPr>
-          <p:cNvPr id="8" name="テキスト ボックス 7">
-            <a:extLst>
-              <a:ext uri="{FF2B5EF4-FFF2-40B4-BE49-F238E27FC236}">
-                <a16:creationId xmlns:a16="http://schemas.microsoft.com/office/drawing/2014/main" id="{8FD7E3C1-8F77-45E8-BA4B-38281D70472E}"/>
-              </a:ext>
-            </a:extLst>
-          </p:cNvPr>
-          <p:cNvSpPr txBox="1"/>
-          <p:nvPr/>
-        </p:nvSpPr>
-        <p:spPr>
-          <a:xfrm>
-            <a:off x="567541" y="3837741"/>
-            <a:ext cx="9326592" cy="369332"/>
-          </a:xfrm>
-          <a:prstGeom prst="rect">
-            <a:avLst/>
-          </a:prstGeom>
-          <a:noFill/>
-        </p:spPr>
-        <p:txBody>
-          <a:bodyPr wrap="none" rtlCol="0">
-            <a:spAutoFit/>
-          </a:bodyPr>
-          <a:lstStyle/>
-          <a:p>
-            <a:r>
-              <a:rPr lang="en-US" altLang="ja-JP" b="1" dirty="0" err="1">
+              <a:t>１．当たり判定をチェック</a:t>
+            </a:r>
+            <a:endParaRPr lang="en-US" altLang="ja-JP" sz="2400" b="1" dirty="0">
+              <a:solidFill>
+                <a:srgbClr val="00B050"/>
+              </a:solidFill>
+            </a:endParaRPr>
+          </a:p>
+          <a:p>
+            <a:endParaRPr lang="en-US" altLang="ja-JP" sz="2400" b="1" dirty="0">
+              <a:solidFill>
+                <a:srgbClr val="00B050"/>
+              </a:solidFill>
+            </a:endParaRPr>
+          </a:p>
+          <a:p>
+            <a:r>
+              <a:rPr lang="ja-JP" altLang="en-US" sz="2400" b="1" dirty="0">
                 <a:solidFill>
                   <a:srgbClr val="00B050"/>
                 </a:solidFill>
               </a:rPr>
-              <a:t>PlayerManager</a:t>
-            </a:r>
-            <a:r>
-              <a:rPr lang="ja-JP" altLang="en-US" dirty="0"/>
-              <a:t>の</a:t>
-            </a:r>
-            <a:r>
-              <a:rPr lang="en-US" altLang="ja-JP" b="1" dirty="0" err="1">
+              <a:t>２．当たっていたらクライアントへ死亡情報を送信</a:t>
+            </a:r>
+            <a:endParaRPr lang="en-US" altLang="ja-JP" sz="2400" b="1" dirty="0">
+              <a:solidFill>
+                <a:srgbClr val="00B050"/>
+              </a:solidFill>
+            </a:endParaRPr>
+          </a:p>
+          <a:p>
+            <a:endParaRPr lang="en-US" altLang="ja-JP" sz="2400" dirty="0"/>
+          </a:p>
+          <a:p>
+            <a:r>
+              <a:rPr lang="ja-JP" altLang="en-US" sz="2400" b="1" dirty="0">
                 <a:solidFill>
                   <a:srgbClr val="0070C0"/>
                 </a:solidFill>
               </a:rPr>
-              <a:t>SyncTransform</a:t>
-            </a:r>
-            <a:r>
-              <a:rPr lang="ja-JP" altLang="en-US" b="1" dirty="0">
+              <a:t>３．死亡情報を受信したらプレイヤーを死亡させる</a:t>
+            </a:r>
+            <a:endParaRPr lang="en-US" altLang="ja-JP" sz="2400" b="1" dirty="0">
+              <a:solidFill>
+                <a:srgbClr val="0070C0"/>
+              </a:solidFill>
+            </a:endParaRPr>
+          </a:p>
+          <a:p>
+            <a:endParaRPr lang="en-US" altLang="ja-JP" sz="2400" b="1" dirty="0">
+              <a:solidFill>
+                <a:srgbClr val="0070C0"/>
+              </a:solidFill>
+            </a:endParaRPr>
+          </a:p>
+          <a:p>
+            <a:r>
+              <a:rPr lang="ja-JP" altLang="en-US" sz="2400" b="1" dirty="0">
+                <a:solidFill>
+                  <a:srgbClr val="00B050"/>
+                </a:solidFill>
+              </a:rPr>
+              <a:t>緑：サーバー側</a:t>
+            </a:r>
+            <a:endParaRPr lang="en-US" altLang="ja-JP" sz="2400" b="1" dirty="0">
+              <a:solidFill>
+                <a:srgbClr val="00B050"/>
+              </a:solidFill>
+            </a:endParaRPr>
+          </a:p>
+          <a:p>
+            <a:r>
+              <a:rPr lang="ja-JP" altLang="en-US" sz="2400" b="1" dirty="0">
                 <a:solidFill>
                   <a:srgbClr val="0070C0"/>
                 </a:solidFill>
               </a:rPr>
-              <a:t>関数</a:t>
-            </a:r>
-            <a:r>
-              <a:rPr lang="ja-JP" altLang="en-US" dirty="0"/>
-              <a:t>は以下の通りです。（</a:t>
-            </a:r>
-            <a:r>
-              <a:rPr lang="en-US" altLang="ja-JP" b="1" dirty="0">
-                <a:solidFill>
-                  <a:srgbClr val="FF0000"/>
-                </a:solidFill>
-              </a:rPr>
-              <a:t>PlayerManager.cpp/.h</a:t>
-            </a:r>
-            <a:r>
-              <a:rPr lang="ja-JP" altLang="en-US" dirty="0"/>
-              <a:t>）</a:t>
-            </a:r>
-            <a:endParaRPr lang="en-US" altLang="ja-JP" dirty="0"/>
-          </a:p>
-        </p:txBody>
-      </p:sp>
-      <p:pic>
-        <p:nvPicPr>
-          <p:cNvPr id="9" name="図 8">
-            <a:extLst>
-              <a:ext uri="{FF2B5EF4-FFF2-40B4-BE49-F238E27FC236}">
-                <a16:creationId xmlns:a16="http://schemas.microsoft.com/office/drawing/2014/main" id="{63F0A886-39E2-4D7C-A7CC-0ECA314E0D46}"/>
-              </a:ext>
-            </a:extLst>
-          </p:cNvPr>
-          <p:cNvPicPr>
-            <a:picLocks noChangeAspect="1"/>
-          </p:cNvPicPr>
-          <p:nvPr/>
-        </p:nvPicPr>
-        <p:blipFill>
-          <a:blip r:embed="rId3"/>
-          <a:stretch>
-            <a:fillRect/>
-          </a:stretch>
-        </p:blipFill>
-        <p:spPr>
-          <a:xfrm>
-            <a:off x="567540" y="4285156"/>
-            <a:ext cx="5560337" cy="2445844"/>
-          </a:xfrm>
-          <a:prstGeom prst="rect">
-            <a:avLst/>
-          </a:prstGeom>
-        </p:spPr>
-      </p:pic>
+              <a:t>青：クライアント側</a:t>
+            </a:r>
+            <a:endParaRPr lang="en-US" altLang="ja-JP" sz="2400" b="1" dirty="0">
+              <a:solidFill>
+                <a:srgbClr val="0070C0"/>
+              </a:solidFill>
+            </a:endParaRPr>
+          </a:p>
+        </p:txBody>
+      </p:sp>
     </p:spTree>
     <p:extLst>
       <p:ext uri="{BB962C8B-B14F-4D97-AF65-F5344CB8AC3E}">
-        <p14:creationId xmlns:p14="http://schemas.microsoft.com/office/powerpoint/2010/main" val="691542451"/>
-      </p:ext>
-    </p:extLst>
-  </p:cSld>
-  <p:clrMapOvr>
-    <a:masterClrMapping/>
-  </p:clrMapOvr>
-</p:sld>
-</file>
-
-<file path=ppt/slides/slide25.xml><?xml version="1.0" encoding="utf-8"?>
-<p:sld xmlns:a="http://schemas.openxmlformats.org/drawingml/2006/main" xmlns:r="http://schemas.openxmlformats.org/officeDocument/2006/relationships" xmlns:p="http://schemas.openxmlformats.org/presentationml/2006/main">
-  <p:cSld>
-    <p:spTree>
-      <p:nvGrpSpPr>
-        <p:cNvPr id="1" name=""/>
-        <p:cNvGrpSpPr/>
-        <p:nvPr/>
-      </p:nvGrpSpPr>
-      <p:grpSpPr>
-        <a:xfrm>
-          <a:off x="0" y="0"/>
-          <a:ext cx="0" cy="0"/>
-          <a:chOff x="0" y="0"/>
-          <a:chExt cx="0" cy="0"/>
-        </a:xfrm>
-      </p:grpSpPr>
-      <p:sp>
-        <p:nvSpPr>
-          <p:cNvPr id="4" name="テキスト ボックス 3">
-            <a:extLst>
-              <a:ext uri="{FF2B5EF4-FFF2-40B4-BE49-F238E27FC236}">
-                <a16:creationId xmlns:a16="http://schemas.microsoft.com/office/drawing/2014/main" id="{5A13BF46-B8C5-48AA-8308-C9ECFF431A18}"/>
-              </a:ext>
-            </a:extLst>
-          </p:cNvPr>
-          <p:cNvSpPr txBox="1"/>
-          <p:nvPr/>
-        </p:nvSpPr>
-        <p:spPr>
-          <a:xfrm>
-            <a:off x="567542" y="491954"/>
-            <a:ext cx="3057247" cy="584775"/>
-          </a:xfrm>
-          <a:prstGeom prst="rect">
-            <a:avLst/>
-          </a:prstGeom>
-          <a:noFill/>
-        </p:spPr>
-        <p:txBody>
-          <a:bodyPr wrap="none" rtlCol="0">
-            <a:spAutoFit/>
-          </a:bodyPr>
-          <a:lstStyle/>
-          <a:p>
-            <a:r>
-              <a:rPr kumimoji="1" lang="ja-JP" altLang="en-US" sz="3200" b="1" u="sng" dirty="0"/>
-              <a:t>プレイヤー同期</a:t>
-            </a:r>
-          </a:p>
-        </p:txBody>
-      </p:sp>
-      <p:sp>
-        <p:nvSpPr>
-          <p:cNvPr id="6" name="テキスト ボックス 5">
-            <a:extLst>
-              <a:ext uri="{FF2B5EF4-FFF2-40B4-BE49-F238E27FC236}">
-                <a16:creationId xmlns:a16="http://schemas.microsoft.com/office/drawing/2014/main" id="{55830AD6-028B-4C4E-80BF-B70DFC1C3A46}"/>
-              </a:ext>
-            </a:extLst>
-          </p:cNvPr>
-          <p:cNvSpPr txBox="1"/>
-          <p:nvPr/>
-        </p:nvSpPr>
-        <p:spPr>
-          <a:xfrm>
-            <a:off x="567542" y="1216429"/>
-            <a:ext cx="9820317" cy="461665"/>
-          </a:xfrm>
-          <a:prstGeom prst="rect">
-            <a:avLst/>
-          </a:prstGeom>
-          <a:noFill/>
-        </p:spPr>
-        <p:txBody>
-          <a:bodyPr wrap="none" rtlCol="0">
-            <a:spAutoFit/>
-          </a:bodyPr>
-          <a:lstStyle/>
-          <a:p>
-            <a:r>
-              <a:rPr lang="ja-JP" altLang="en-US" sz="2400" dirty="0"/>
-              <a:t>パケット別処理を追加すれば完了です。（</a:t>
-            </a:r>
-            <a:r>
-              <a:rPr lang="en-US" altLang="ja-JP" sz="2400" b="1" dirty="0">
-                <a:solidFill>
-                  <a:srgbClr val="FF0000"/>
-                </a:solidFill>
-              </a:rPr>
-              <a:t>NetworkPlayScene.cpp</a:t>
-            </a:r>
-            <a:r>
-              <a:rPr lang="ja-JP" altLang="en-US" sz="2400" dirty="0"/>
-              <a:t>）</a:t>
-            </a:r>
-            <a:endParaRPr lang="en-US" altLang="ja-JP" sz="2400" dirty="0"/>
-          </a:p>
-        </p:txBody>
-      </p:sp>
-      <p:pic>
-        <p:nvPicPr>
-          <p:cNvPr id="3" name="図 2">
-            <a:extLst>
-              <a:ext uri="{FF2B5EF4-FFF2-40B4-BE49-F238E27FC236}">
-                <a16:creationId xmlns:a16="http://schemas.microsoft.com/office/drawing/2014/main" id="{E70998D3-A3FF-43A3-BF44-F7322409AE73}"/>
-              </a:ext>
-            </a:extLst>
-          </p:cNvPr>
-          <p:cNvPicPr>
-            <a:picLocks noChangeAspect="1"/>
-          </p:cNvPicPr>
-          <p:nvPr/>
-        </p:nvPicPr>
-        <p:blipFill>
-          <a:blip r:embed="rId2"/>
-          <a:stretch>
-            <a:fillRect/>
-          </a:stretch>
-        </p:blipFill>
-        <p:spPr>
-          <a:xfrm>
-            <a:off x="567542" y="1817794"/>
-            <a:ext cx="9707330" cy="3943900"/>
-          </a:xfrm>
-          <a:prstGeom prst="rect">
-            <a:avLst/>
-          </a:prstGeom>
-        </p:spPr>
-      </p:pic>
-      <p:sp>
-        <p:nvSpPr>
-          <p:cNvPr id="10" name="正方形/長方形 9">
-            <a:extLst>
-              <a:ext uri="{FF2B5EF4-FFF2-40B4-BE49-F238E27FC236}">
-                <a16:creationId xmlns:a16="http://schemas.microsoft.com/office/drawing/2014/main" id="{18636848-5829-44FF-816E-C05157B6FAC0}"/>
-              </a:ext>
-            </a:extLst>
-          </p:cNvPr>
-          <p:cNvSpPr/>
-          <p:nvPr/>
-        </p:nvSpPr>
-        <p:spPr>
-          <a:xfrm>
-            <a:off x="2473322" y="4648202"/>
-            <a:ext cx="7712078" cy="287866"/>
-          </a:xfrm>
-          <a:prstGeom prst="rect">
-            <a:avLst/>
-          </a:prstGeom>
-          <a:noFill/>
-          <a:ln w="28575">
-            <a:solidFill>
-              <a:srgbClr val="FF0000"/>
-            </a:solidFill>
-          </a:ln>
-        </p:spPr>
-        <p:style>
-          <a:lnRef idx="2">
-            <a:schemeClr val="accent1">
-              <a:shade val="50000"/>
-            </a:schemeClr>
-          </a:lnRef>
-          <a:fillRef idx="1">
-            <a:schemeClr val="accent1"/>
-          </a:fillRef>
-          <a:effectRef idx="0">
-            <a:schemeClr val="accent1"/>
-          </a:effectRef>
-          <a:fontRef idx="minor">
-            <a:schemeClr val="lt1"/>
-          </a:fontRef>
-        </p:style>
-        <p:txBody>
-          <a:bodyPr rtlCol="0" anchor="ctr"/>
-          <a:lstStyle/>
-          <a:p>
-            <a:pPr algn="ctr"/>
-            <a:endParaRPr kumimoji="1" lang="ja-JP" altLang="en-US"/>
-          </a:p>
-        </p:txBody>
-      </p:sp>
-      <p:sp>
-        <p:nvSpPr>
-          <p:cNvPr id="11" name="テキスト ボックス 10">
-            <a:extLst>
-              <a:ext uri="{FF2B5EF4-FFF2-40B4-BE49-F238E27FC236}">
-                <a16:creationId xmlns:a16="http://schemas.microsoft.com/office/drawing/2014/main" id="{3501587F-98D1-43A2-8640-A2169B4AC72C}"/>
-              </a:ext>
-            </a:extLst>
-          </p:cNvPr>
-          <p:cNvSpPr txBox="1"/>
-          <p:nvPr/>
-        </p:nvSpPr>
-        <p:spPr>
-          <a:xfrm>
-            <a:off x="454555" y="5901394"/>
-            <a:ext cx="8699818" cy="830997"/>
-          </a:xfrm>
-          <a:prstGeom prst="rect">
-            <a:avLst/>
-          </a:prstGeom>
-          <a:noFill/>
-        </p:spPr>
-        <p:txBody>
-          <a:bodyPr wrap="none" rtlCol="0">
-            <a:spAutoFit/>
-          </a:bodyPr>
-          <a:lstStyle/>
-          <a:p>
-            <a:r>
-              <a:rPr lang="ja-JP" altLang="en-US" sz="2400" dirty="0"/>
-              <a:t>オンラインモードでプレイして移動するか確認しましょう。</a:t>
-            </a:r>
-            <a:endParaRPr lang="en-US" altLang="ja-JP" sz="2400" dirty="0"/>
-          </a:p>
-          <a:p>
-            <a:r>
-              <a:rPr lang="en-US" altLang="ja-JP" sz="2400" dirty="0"/>
-              <a:t>Exe</a:t>
-            </a:r>
-            <a:r>
-              <a:rPr lang="ja-JP" altLang="en-US" sz="2400" dirty="0"/>
-              <a:t>を使って二人以上いても問題ないかも確認しましょう。</a:t>
-            </a:r>
-            <a:endParaRPr lang="en-US" altLang="ja-JP" sz="2400" dirty="0"/>
-          </a:p>
-        </p:txBody>
-      </p:sp>
-    </p:spTree>
-    <p:extLst>
-      <p:ext uri="{BB962C8B-B14F-4D97-AF65-F5344CB8AC3E}">
-        <p14:creationId xmlns:p14="http://schemas.microsoft.com/office/powerpoint/2010/main" val="1778791124"/>
-      </p:ext>
-    </p:extLst>
-  </p:cSld>
-  <p:clrMapOvr>
-    <a:masterClrMapping/>
-  </p:clrMapOvr>
-</p:sld>
-</file>
-
-<file path=ppt/slides/slide26.xml><?xml version="1.0" encoding="utf-8"?>
-<p:sld xmlns:a="http://schemas.openxmlformats.org/drawingml/2006/main" xmlns:r="http://schemas.openxmlformats.org/officeDocument/2006/relationships" xmlns:p="http://schemas.openxmlformats.org/presentationml/2006/main">
-  <p:cSld>
-    <p:spTree>
-      <p:nvGrpSpPr>
-        <p:cNvPr id="1" name=""/>
-        <p:cNvGrpSpPr/>
-        <p:nvPr/>
-      </p:nvGrpSpPr>
-      <p:grpSpPr>
-        <a:xfrm>
-          <a:off x="0" y="0"/>
-          <a:ext cx="0" cy="0"/>
-          <a:chOff x="0" y="0"/>
-          <a:chExt cx="0" cy="0"/>
-        </a:xfrm>
-      </p:grpSpPr>
-      <p:sp>
-        <p:nvSpPr>
-          <p:cNvPr id="4" name="テキスト ボックス 3">
-            <a:extLst>
-              <a:ext uri="{FF2B5EF4-FFF2-40B4-BE49-F238E27FC236}">
-                <a16:creationId xmlns:a16="http://schemas.microsoft.com/office/drawing/2014/main" id="{5A13BF46-B8C5-48AA-8308-C9ECFF431A18}"/>
-              </a:ext>
-            </a:extLst>
-          </p:cNvPr>
-          <p:cNvSpPr txBox="1"/>
-          <p:nvPr/>
-        </p:nvSpPr>
-        <p:spPr>
-          <a:xfrm>
-            <a:off x="567542" y="491954"/>
-            <a:ext cx="4405373" cy="584775"/>
-          </a:xfrm>
-          <a:prstGeom prst="rect">
-            <a:avLst/>
-          </a:prstGeom>
-          <a:noFill/>
-        </p:spPr>
-        <p:txBody>
-          <a:bodyPr wrap="none" rtlCol="0">
-            <a:spAutoFit/>
-          </a:bodyPr>
-          <a:lstStyle/>
-          <a:p>
-            <a:r>
-              <a:rPr kumimoji="1" lang="ja-JP" altLang="en-US" sz="3200" b="1" u="sng" dirty="0"/>
-              <a:t>プレイヤー同期 練習１</a:t>
-            </a:r>
-          </a:p>
-        </p:txBody>
-      </p:sp>
-      <p:sp>
-        <p:nvSpPr>
-          <p:cNvPr id="6" name="テキスト ボックス 5">
-            <a:extLst>
-              <a:ext uri="{FF2B5EF4-FFF2-40B4-BE49-F238E27FC236}">
-                <a16:creationId xmlns:a16="http://schemas.microsoft.com/office/drawing/2014/main" id="{55830AD6-028B-4C4E-80BF-B70DFC1C3A46}"/>
-              </a:ext>
-            </a:extLst>
-          </p:cNvPr>
-          <p:cNvSpPr txBox="1"/>
-          <p:nvPr/>
-        </p:nvSpPr>
-        <p:spPr>
-          <a:xfrm>
-            <a:off x="567542" y="1216429"/>
-            <a:ext cx="7263527" cy="461665"/>
-          </a:xfrm>
-          <a:prstGeom prst="rect">
-            <a:avLst/>
-          </a:prstGeom>
-          <a:noFill/>
-        </p:spPr>
-        <p:txBody>
-          <a:bodyPr wrap="none" rtlCol="0">
-            <a:spAutoFit/>
-          </a:bodyPr>
-          <a:lstStyle/>
-          <a:p>
-            <a:r>
-              <a:rPr lang="ja-JP" altLang="en-US" sz="2400" dirty="0"/>
-              <a:t>座標と同じ方法で、回転と拡縮も同期しましょう。</a:t>
-            </a:r>
-            <a:endParaRPr lang="en-US" altLang="ja-JP" sz="2400" dirty="0"/>
-          </a:p>
-        </p:txBody>
-      </p:sp>
-      <p:pic>
-        <p:nvPicPr>
-          <p:cNvPr id="7" name="図 6">
-            <a:extLst>
-              <a:ext uri="{FF2B5EF4-FFF2-40B4-BE49-F238E27FC236}">
-                <a16:creationId xmlns:a16="http://schemas.microsoft.com/office/drawing/2014/main" id="{1A7AD551-AB0E-44E7-9064-00BB42EF6D78}"/>
-              </a:ext>
-            </a:extLst>
-          </p:cNvPr>
-          <p:cNvPicPr>
-            <a:picLocks noChangeAspect="1"/>
-          </p:cNvPicPr>
-          <p:nvPr/>
-        </p:nvPicPr>
-        <p:blipFill>
-          <a:blip r:embed="rId2"/>
-          <a:stretch>
-            <a:fillRect/>
-          </a:stretch>
-        </p:blipFill>
-        <p:spPr>
-          <a:xfrm>
-            <a:off x="567542" y="1817794"/>
-            <a:ext cx="4419325" cy="3062352"/>
-          </a:xfrm>
-          <a:prstGeom prst="rect">
-            <a:avLst/>
-          </a:prstGeom>
-        </p:spPr>
-      </p:pic>
-      <p:sp>
-        <p:nvSpPr>
-          <p:cNvPr id="8" name="テキスト ボックス 7">
-            <a:extLst>
-              <a:ext uri="{FF2B5EF4-FFF2-40B4-BE49-F238E27FC236}">
-                <a16:creationId xmlns:a16="http://schemas.microsoft.com/office/drawing/2014/main" id="{7FA44DAE-30B2-4011-9FF0-9BCFF98D5352}"/>
-              </a:ext>
-            </a:extLst>
-          </p:cNvPr>
-          <p:cNvSpPr txBox="1"/>
-          <p:nvPr/>
-        </p:nvSpPr>
-        <p:spPr>
-          <a:xfrm>
-            <a:off x="567541" y="5025773"/>
-            <a:ext cx="7263527" cy="830997"/>
-          </a:xfrm>
-          <a:prstGeom prst="rect">
-            <a:avLst/>
-          </a:prstGeom>
-          <a:noFill/>
-        </p:spPr>
-        <p:txBody>
-          <a:bodyPr wrap="none" rtlCol="0">
-            <a:spAutoFit/>
-          </a:bodyPr>
-          <a:lstStyle/>
-          <a:p>
-            <a:r>
-              <a:rPr lang="en-US" altLang="ja-JP" sz="2400" dirty="0"/>
-              <a:t>※</a:t>
-            </a:r>
-            <a:r>
-              <a:rPr lang="ja-JP" altLang="en-US" sz="2400" dirty="0"/>
-              <a:t>２つ以上の操作を同時にするとかなり遅延します</a:t>
-            </a:r>
-            <a:endParaRPr lang="en-US" altLang="ja-JP" sz="2400" dirty="0"/>
-          </a:p>
-          <a:p>
-            <a:r>
-              <a:rPr lang="ja-JP" altLang="en-US" sz="2400" dirty="0"/>
-              <a:t>　次の練習２で解決できます。</a:t>
-            </a:r>
-            <a:endParaRPr lang="en-US" altLang="ja-JP" sz="2400" dirty="0"/>
-          </a:p>
-        </p:txBody>
-      </p:sp>
-    </p:spTree>
-    <p:extLst>
-      <p:ext uri="{BB962C8B-B14F-4D97-AF65-F5344CB8AC3E}">
-        <p14:creationId xmlns:p14="http://schemas.microsoft.com/office/powerpoint/2010/main" val="2207376950"/>
-      </p:ext>
-    </p:extLst>
-  </p:cSld>
-  <p:clrMapOvr>
-    <a:masterClrMapping/>
-  </p:clrMapOvr>
-</p:sld>
-</file>
-
-<file path=ppt/slides/slide27.xml><?xml version="1.0" encoding="utf-8"?>
-<p:sld xmlns:a="http://schemas.openxmlformats.org/drawingml/2006/main" xmlns:r="http://schemas.openxmlformats.org/officeDocument/2006/relationships" xmlns:p="http://schemas.openxmlformats.org/presentationml/2006/main">
-  <p:cSld>
-    <p:spTree>
-      <p:nvGrpSpPr>
-        <p:cNvPr id="1" name=""/>
-        <p:cNvGrpSpPr/>
-        <p:nvPr/>
-      </p:nvGrpSpPr>
-      <p:grpSpPr>
-        <a:xfrm>
-          <a:off x="0" y="0"/>
-          <a:ext cx="0" cy="0"/>
-          <a:chOff x="0" y="0"/>
-          <a:chExt cx="0" cy="0"/>
-        </a:xfrm>
-      </p:grpSpPr>
-      <p:sp>
-        <p:nvSpPr>
-          <p:cNvPr id="4" name="テキスト ボックス 3">
-            <a:extLst>
-              <a:ext uri="{FF2B5EF4-FFF2-40B4-BE49-F238E27FC236}">
-                <a16:creationId xmlns:a16="http://schemas.microsoft.com/office/drawing/2014/main" id="{5A13BF46-B8C5-48AA-8308-C9ECFF431A18}"/>
-              </a:ext>
-            </a:extLst>
-          </p:cNvPr>
-          <p:cNvSpPr txBox="1"/>
-          <p:nvPr/>
-        </p:nvSpPr>
-        <p:spPr>
-          <a:xfrm>
-            <a:off x="567542" y="491954"/>
-            <a:ext cx="4405373" cy="584775"/>
-          </a:xfrm>
-          <a:prstGeom prst="rect">
-            <a:avLst/>
-          </a:prstGeom>
-          <a:noFill/>
-        </p:spPr>
-        <p:txBody>
-          <a:bodyPr wrap="none" rtlCol="0">
-            <a:spAutoFit/>
-          </a:bodyPr>
-          <a:lstStyle/>
-          <a:p>
-            <a:r>
-              <a:rPr kumimoji="1" lang="ja-JP" altLang="en-US" sz="3200" b="1" u="sng" dirty="0"/>
-              <a:t>プレイヤー同期 練習２</a:t>
-            </a:r>
-          </a:p>
-        </p:txBody>
-      </p:sp>
-      <p:sp>
-        <p:nvSpPr>
-          <p:cNvPr id="6" name="テキスト ボックス 5">
-            <a:extLst>
-              <a:ext uri="{FF2B5EF4-FFF2-40B4-BE49-F238E27FC236}">
-                <a16:creationId xmlns:a16="http://schemas.microsoft.com/office/drawing/2014/main" id="{55830AD6-028B-4C4E-80BF-B70DFC1C3A46}"/>
-              </a:ext>
-            </a:extLst>
-          </p:cNvPr>
-          <p:cNvSpPr txBox="1"/>
-          <p:nvPr/>
-        </p:nvSpPr>
-        <p:spPr>
-          <a:xfrm>
-            <a:off x="567542" y="1216429"/>
-            <a:ext cx="9110186" cy="461665"/>
-          </a:xfrm>
-          <a:prstGeom prst="rect">
-            <a:avLst/>
-          </a:prstGeom>
-          <a:noFill/>
-        </p:spPr>
-        <p:txBody>
-          <a:bodyPr wrap="none" rtlCol="0">
-            <a:spAutoFit/>
-          </a:bodyPr>
-          <a:lstStyle/>
-          <a:p>
-            <a:r>
-              <a:rPr lang="ja-JP" altLang="en-US" sz="2400" dirty="0"/>
-              <a:t>座標、回転、拡縮を１つのデータにまとめて送受信しましょう。</a:t>
-            </a:r>
-            <a:endParaRPr lang="en-US" altLang="ja-JP" sz="2400" dirty="0"/>
-          </a:p>
-        </p:txBody>
-      </p:sp>
-      <p:pic>
-        <p:nvPicPr>
-          <p:cNvPr id="3" name="図 2">
-            <a:extLst>
-              <a:ext uri="{FF2B5EF4-FFF2-40B4-BE49-F238E27FC236}">
-                <a16:creationId xmlns:a16="http://schemas.microsoft.com/office/drawing/2014/main" id="{3279CA5E-752F-4106-A0A1-35D22A2F0B01}"/>
-              </a:ext>
-            </a:extLst>
-          </p:cNvPr>
-          <p:cNvPicPr>
-            <a:picLocks noChangeAspect="1"/>
-          </p:cNvPicPr>
-          <p:nvPr/>
-        </p:nvPicPr>
-        <p:blipFill>
-          <a:blip r:embed="rId2"/>
-          <a:stretch>
-            <a:fillRect/>
-          </a:stretch>
-        </p:blipFill>
-        <p:spPr>
-          <a:xfrm>
-            <a:off x="567542" y="1817794"/>
-            <a:ext cx="4530281" cy="1924473"/>
-          </a:xfrm>
-          <a:prstGeom prst="rect">
-            <a:avLst/>
-          </a:prstGeom>
-        </p:spPr>
-      </p:pic>
-      <p:sp>
-        <p:nvSpPr>
-          <p:cNvPr id="9" name="テキスト ボックス 8">
-            <a:extLst>
-              <a:ext uri="{FF2B5EF4-FFF2-40B4-BE49-F238E27FC236}">
-                <a16:creationId xmlns:a16="http://schemas.microsoft.com/office/drawing/2014/main" id="{538DF459-A346-4692-83AB-85007F64E414}"/>
-              </a:ext>
-            </a:extLst>
-          </p:cNvPr>
-          <p:cNvSpPr txBox="1"/>
-          <p:nvPr/>
-        </p:nvSpPr>
-        <p:spPr>
-          <a:xfrm>
-            <a:off x="567542" y="3881967"/>
-            <a:ext cx="5416868" cy="461665"/>
-          </a:xfrm>
-          <a:prstGeom prst="rect">
-            <a:avLst/>
-          </a:prstGeom>
-          <a:noFill/>
-        </p:spPr>
-        <p:txBody>
-          <a:bodyPr wrap="none" rtlCol="0">
-            <a:spAutoFit/>
-          </a:bodyPr>
-          <a:lstStyle/>
-          <a:p>
-            <a:r>
-              <a:rPr lang="ja-JP" altLang="en-US" sz="2400" dirty="0"/>
-              <a:t>これで同時操作の遅延が解決します。</a:t>
-            </a:r>
-            <a:endParaRPr lang="en-US" altLang="ja-JP" sz="2400" dirty="0"/>
-          </a:p>
-        </p:txBody>
-      </p:sp>
-    </p:spTree>
-    <p:extLst>
-      <p:ext uri="{BB962C8B-B14F-4D97-AF65-F5344CB8AC3E}">
-        <p14:creationId xmlns:p14="http://schemas.microsoft.com/office/powerpoint/2010/main" val="258395712"/>
+        <p14:creationId xmlns:p14="http://schemas.microsoft.com/office/powerpoint/2010/main" val="3569943715"/>
       </p:ext>
     </p:extLst>
   </p:cSld>
@@ -7759,7 +4240,7 @@
         <p:spPr>
           <a:xfrm>
             <a:off x="567542" y="491954"/>
-            <a:ext cx="3057247" cy="584775"/>
+            <a:ext cx="2236510" cy="2554545"/>
           </a:xfrm>
           <a:prstGeom prst="rect">
             <a:avLst/>
@@ -7774,8 +4255,21 @@
           <a:p>
             <a:r>
               <a:rPr kumimoji="1" lang="ja-JP" altLang="en-US" sz="3200" b="1" u="sng" dirty="0"/>
-              <a:t>プレイヤー同期</a:t>
-            </a:r>
+              <a:t>当たり判定</a:t>
+            </a:r>
+            <a:endParaRPr kumimoji="1" lang="en-US" altLang="ja-JP" sz="3200" b="1" u="sng" dirty="0"/>
+          </a:p>
+          <a:p>
+            <a:endParaRPr lang="en-US" altLang="ja-JP" sz="3200" b="1" u="sng" dirty="0"/>
+          </a:p>
+          <a:p>
+            <a:endParaRPr kumimoji="1" lang="en-US" altLang="ja-JP" sz="3200" b="1" u="sng" dirty="0"/>
+          </a:p>
+          <a:p>
+            <a:endParaRPr lang="en-US" altLang="ja-JP" sz="3200" b="1" u="sng" dirty="0"/>
+          </a:p>
+          <a:p>
+            <a:endParaRPr kumimoji="1" lang="ja-JP" altLang="en-US" sz="3200" b="1" u="sng" dirty="0"/>
           </a:p>
         </p:txBody>
       </p:sp>
@@ -7794,7 +4288,7 @@
         <p:spPr>
           <a:xfrm>
             <a:off x="567542" y="1216429"/>
-            <a:ext cx="10033516" cy="5262979"/>
+            <a:ext cx="7021474" cy="461665"/>
           </a:xfrm>
           <a:prstGeom prst="rect">
             <a:avLst/>
@@ -7809,191 +4303,58 @@
           <a:p>
             <a:r>
               <a:rPr lang="ja-JP" altLang="en-US" sz="2400" dirty="0"/>
-              <a:t>ただ、実際にキー入力して移動するのはクライアントです。</a:t>
-            </a:r>
-            <a:endParaRPr lang="en-US" altLang="ja-JP" sz="2400" dirty="0"/>
-          </a:p>
-          <a:p>
-            <a:r>
-              <a:rPr lang="ja-JP" altLang="en-US" sz="2400" dirty="0"/>
-              <a:t>よって処理の順番は以下の通りになります。</a:t>
-            </a:r>
-            <a:endParaRPr lang="en-US" altLang="ja-JP" sz="2400" dirty="0"/>
-          </a:p>
-          <a:p>
-            <a:endParaRPr lang="en-US" altLang="ja-JP" sz="2400" dirty="0"/>
-          </a:p>
-          <a:p>
-            <a:r>
-              <a:rPr lang="ja-JP" altLang="en-US" sz="2400" b="1" dirty="0">
+              <a:t>サーバープロジェクトの</a:t>
+            </a:r>
+            <a:r>
+              <a:rPr lang="en-US" altLang="ja-JP" sz="2400" b="1" dirty="0">
                 <a:solidFill>
                   <a:srgbClr val="FF0000"/>
                 </a:solidFill>
               </a:rPr>
-              <a:t>■処理の順番</a:t>
-            </a:r>
-            <a:r>
-              <a:rPr lang="ja-JP" altLang="en-US" sz="2400" b="1" dirty="0"/>
-              <a:t>（</a:t>
-            </a:r>
-            <a:r>
-              <a:rPr lang="ja-JP" altLang="en-US" sz="2400" b="1" dirty="0">
-                <a:solidFill>
-                  <a:srgbClr val="0070C0"/>
-                </a:solidFill>
-              </a:rPr>
-              <a:t>青文字はクライアント側</a:t>
-            </a:r>
-            <a:r>
-              <a:rPr lang="ja-JP" altLang="en-US" sz="2400" b="1" dirty="0"/>
-              <a:t>、</a:t>
-            </a:r>
-            <a:r>
-              <a:rPr lang="ja-JP" altLang="en-US" sz="2400" b="1" dirty="0">
-                <a:solidFill>
-                  <a:srgbClr val="00B050"/>
-                </a:solidFill>
-              </a:rPr>
-              <a:t>緑文字はサーバー側</a:t>
-            </a:r>
-            <a:r>
-              <a:rPr lang="ja-JP" altLang="en-US" sz="2400" b="1" dirty="0"/>
-              <a:t>の処理）</a:t>
-            </a:r>
-            <a:endParaRPr lang="en-US" altLang="ja-JP" sz="2400" b="1" dirty="0"/>
-          </a:p>
-          <a:p>
-            <a:r>
-              <a:rPr lang="ja-JP" altLang="en-US" sz="2400" dirty="0">
-                <a:solidFill>
-                  <a:srgbClr val="0070C0"/>
-                </a:solidFill>
-              </a:rPr>
-              <a:t>１．キー入力で移動</a:t>
-            </a:r>
-            <a:endParaRPr lang="en-US" altLang="ja-JP" sz="2400" dirty="0">
-              <a:solidFill>
-                <a:srgbClr val="0070C0"/>
-              </a:solidFill>
-            </a:endParaRPr>
-          </a:p>
-          <a:p>
-            <a:r>
-              <a:rPr lang="ja-JP" altLang="en-US" sz="2400" dirty="0">
-                <a:solidFill>
-                  <a:srgbClr val="0070C0"/>
-                </a:solidFill>
-              </a:rPr>
-              <a:t>　　</a:t>
-            </a:r>
-            <a:r>
-              <a:rPr lang="en-US" altLang="ja-JP" sz="2400" dirty="0">
-                <a:solidFill>
-                  <a:srgbClr val="0070C0"/>
-                </a:solidFill>
-              </a:rPr>
-              <a:t>※</a:t>
-            </a:r>
-            <a:r>
-              <a:rPr lang="ja-JP" altLang="en-US" sz="2400" dirty="0">
-                <a:solidFill>
-                  <a:srgbClr val="0070C0"/>
-                </a:solidFill>
-              </a:rPr>
-              <a:t>ただし座標の数値だけ変えて画像は動かさない</a:t>
-            </a:r>
-            <a:endParaRPr lang="en-US" altLang="ja-JP" sz="2400" dirty="0">
-              <a:solidFill>
-                <a:srgbClr val="0070C0"/>
-              </a:solidFill>
-            </a:endParaRPr>
-          </a:p>
-          <a:p>
-            <a:endParaRPr lang="en-US" altLang="ja-JP" sz="2400" dirty="0">
-              <a:solidFill>
-                <a:srgbClr val="0070C0"/>
-              </a:solidFill>
-            </a:endParaRPr>
-          </a:p>
-          <a:p>
-            <a:r>
-              <a:rPr lang="ja-JP" altLang="en-US" sz="2400" dirty="0">
-                <a:solidFill>
-                  <a:srgbClr val="0070C0"/>
-                </a:solidFill>
-              </a:rPr>
-              <a:t>２．移動後の座標をサーバーへ送信</a:t>
-            </a:r>
-            <a:endParaRPr lang="en-US" altLang="ja-JP" sz="2400" dirty="0">
-              <a:solidFill>
-                <a:srgbClr val="0070C0"/>
-              </a:solidFill>
-            </a:endParaRPr>
-          </a:p>
-          <a:p>
+              <a:t>Server.cpp</a:t>
+            </a:r>
+            <a:r>
+              <a:rPr lang="ja-JP" altLang="en-US" sz="2400" dirty="0"/>
+              <a:t>を開きます。</a:t>
+            </a:r>
             <a:endParaRPr lang="en-US" altLang="ja-JP" sz="2400" dirty="0"/>
           </a:p>
-          <a:p>
-            <a:r>
-              <a:rPr lang="ja-JP" altLang="en-US" sz="2400" dirty="0">
-                <a:solidFill>
-                  <a:srgbClr val="00B050"/>
-                </a:solidFill>
-              </a:rPr>
-              <a:t>３．座標を受信したら、最新のデータに更新する</a:t>
-            </a:r>
-            <a:endParaRPr lang="en-US" altLang="ja-JP" sz="2400" dirty="0">
-              <a:solidFill>
-                <a:srgbClr val="00B050"/>
-              </a:solidFill>
-            </a:endParaRPr>
-          </a:p>
-          <a:p>
-            <a:endParaRPr lang="en-US" altLang="ja-JP" sz="2400" dirty="0">
-              <a:solidFill>
-                <a:srgbClr val="00B050"/>
-              </a:solidFill>
-            </a:endParaRPr>
-          </a:p>
-          <a:p>
-            <a:r>
-              <a:rPr lang="ja-JP" altLang="en-US" sz="2400" dirty="0">
-                <a:solidFill>
-                  <a:srgbClr val="00B050"/>
-                </a:solidFill>
-              </a:rPr>
-              <a:t>４．更新後の最新の座標を全てのクライアントに送信</a:t>
-            </a:r>
-            <a:endParaRPr lang="en-US" altLang="ja-JP" sz="2400" dirty="0">
-              <a:solidFill>
-                <a:srgbClr val="00B050"/>
-              </a:solidFill>
-            </a:endParaRPr>
-          </a:p>
-          <a:p>
-            <a:endParaRPr lang="en-US" altLang="ja-JP" sz="2400" dirty="0"/>
-          </a:p>
-          <a:p>
-            <a:r>
-              <a:rPr lang="ja-JP" altLang="en-US" sz="2400" dirty="0">
-                <a:solidFill>
-                  <a:srgbClr val="0070C0"/>
-                </a:solidFill>
-              </a:rPr>
-              <a:t>５．最新の座標の位置に画像を描画する</a:t>
-            </a:r>
-            <a:endParaRPr lang="en-US" altLang="ja-JP" sz="2400" dirty="0">
-              <a:solidFill>
-                <a:srgbClr val="0070C0"/>
-              </a:solidFill>
-            </a:endParaRPr>
-          </a:p>
-        </p:txBody>
-      </p:sp>
+        </p:txBody>
+      </p:sp>
+      <p:pic>
+        <p:nvPicPr>
+          <p:cNvPr id="3" name="図 2">
+            <a:extLst>
+              <a:ext uri="{FF2B5EF4-FFF2-40B4-BE49-F238E27FC236}">
+                <a16:creationId xmlns:a16="http://schemas.microsoft.com/office/drawing/2014/main" id="{4F1D7F62-F812-4878-96A5-F039288B8A7B}"/>
+              </a:ext>
+            </a:extLst>
+          </p:cNvPr>
+          <p:cNvPicPr>
+            <a:picLocks noChangeAspect="1"/>
+          </p:cNvPicPr>
+          <p:nvPr/>
+        </p:nvPicPr>
+        <p:blipFill>
+          <a:blip r:embed="rId2"/>
+          <a:stretch>
+            <a:fillRect/>
+          </a:stretch>
+        </p:blipFill>
+        <p:spPr>
+          <a:xfrm>
+            <a:off x="567542" y="1769226"/>
+            <a:ext cx="8483325" cy="4559787"/>
+          </a:xfrm>
+          <a:prstGeom prst="rect">
+            <a:avLst/>
+          </a:prstGeom>
+        </p:spPr>
+      </p:pic>
     </p:spTree>
     <p:extLst>
       <p:ext uri="{BB962C8B-B14F-4D97-AF65-F5344CB8AC3E}">
-        <p14:creationId xmlns:p14="http://schemas.microsoft.com/office/powerpoint/2010/main" val="1118751252"/>
+        <p14:creationId xmlns:p14="http://schemas.microsoft.com/office/powerpoint/2010/main" val="2118467432"/>
       </p:ext>
     </p:extLst>
   </p:cSld>
@@ -8035,7 +4396,7 @@
         <p:spPr>
           <a:xfrm>
             <a:off x="567542" y="491954"/>
-            <a:ext cx="3057247" cy="584775"/>
+            <a:ext cx="2236510" cy="2554545"/>
           </a:xfrm>
           <a:prstGeom prst="rect">
             <a:avLst/>
@@ -8050,8 +4411,21 @@
           <a:p>
             <a:r>
               <a:rPr kumimoji="1" lang="ja-JP" altLang="en-US" sz="3200" b="1" u="sng" dirty="0"/>
-              <a:t>プレイヤー同期</a:t>
-            </a:r>
+              <a:t>当たり判定</a:t>
+            </a:r>
+            <a:endParaRPr kumimoji="1" lang="en-US" altLang="ja-JP" sz="3200" b="1" u="sng" dirty="0"/>
+          </a:p>
+          <a:p>
+            <a:endParaRPr lang="en-US" altLang="ja-JP" sz="3200" b="1" u="sng" dirty="0"/>
+          </a:p>
+          <a:p>
+            <a:endParaRPr kumimoji="1" lang="en-US" altLang="ja-JP" sz="3200" b="1" u="sng" dirty="0"/>
+          </a:p>
+          <a:p>
+            <a:endParaRPr lang="en-US" altLang="ja-JP" sz="3200" b="1" u="sng" dirty="0"/>
+          </a:p>
+          <a:p>
+            <a:endParaRPr kumimoji="1" lang="ja-JP" altLang="en-US" sz="3200" b="1" u="sng" dirty="0"/>
           </a:p>
         </p:txBody>
       </p:sp>
@@ -8070,7 +4444,7 @@
         <p:spPr>
           <a:xfrm>
             <a:off x="567542" y="1216429"/>
-            <a:ext cx="5379999" cy="461665"/>
+            <a:ext cx="8186857" cy="461665"/>
           </a:xfrm>
           <a:prstGeom prst="rect">
             <a:avLst/>
@@ -8084,39 +4458,19 @@
           <a:lstStyle/>
           <a:p>
             <a:r>
-              <a:rPr lang="en-US" altLang="ja-JP" sz="2400" b="1" dirty="0">
-                <a:solidFill>
-                  <a:srgbClr val="0070C0"/>
-                </a:solidFill>
-              </a:rPr>
-              <a:t>Client</a:t>
-            </a:r>
-            <a:r>
-              <a:rPr lang="ja-JP" altLang="en-US" sz="2400" b="1" dirty="0">
-                <a:solidFill>
-                  <a:srgbClr val="0070C0"/>
-                </a:solidFill>
-              </a:rPr>
-              <a:t>プロジェクト</a:t>
-            </a:r>
-            <a:r>
               <a:rPr lang="ja-JP" altLang="en-US" sz="2400" dirty="0"/>
-              <a:t>を開きましょう。</a:t>
-            </a:r>
-            <a:endParaRPr lang="en-US" altLang="ja-JP" sz="2400" dirty="0">
-              <a:solidFill>
-                <a:srgbClr val="0070C0"/>
-              </a:solidFill>
-            </a:endParaRPr>
+              <a:t>前回の座標を確定させる処理の後で当たり判定をします。</a:t>
+            </a:r>
+            <a:endParaRPr lang="en-US" altLang="ja-JP" sz="2400" dirty="0"/>
           </a:p>
         </p:txBody>
       </p:sp>
       <p:pic>
         <p:nvPicPr>
-          <p:cNvPr id="3" name="図 2">
-            <a:extLst>
-              <a:ext uri="{FF2B5EF4-FFF2-40B4-BE49-F238E27FC236}">
-                <a16:creationId xmlns:a16="http://schemas.microsoft.com/office/drawing/2014/main" id="{785C6170-1FA9-47AB-803D-131C085001BF}"/>
+          <p:cNvPr id="5" name="図 4">
+            <a:extLst>
+              <a:ext uri="{FF2B5EF4-FFF2-40B4-BE49-F238E27FC236}">
+                <a16:creationId xmlns:a16="http://schemas.microsoft.com/office/drawing/2014/main" id="{1F015B19-6910-42B5-86BC-508BEF512D8C}"/>
               </a:ext>
             </a:extLst>
           </p:cNvPr>
@@ -8133,18 +4487,70 @@
         </p:blipFill>
         <p:spPr>
           <a:xfrm>
-            <a:off x="567542" y="1817794"/>
-            <a:ext cx="8148476" cy="4379806"/>
+            <a:off x="567542" y="1769226"/>
+            <a:ext cx="8915125" cy="3356023"/>
           </a:xfrm>
           <a:prstGeom prst="rect">
             <a:avLst/>
           </a:prstGeom>
         </p:spPr>
       </p:pic>
+      <p:sp>
+        <p:nvSpPr>
+          <p:cNvPr id="7" name="正方形/長方形 6">
+            <a:extLst>
+              <a:ext uri="{FF2B5EF4-FFF2-40B4-BE49-F238E27FC236}">
+                <a16:creationId xmlns:a16="http://schemas.microsoft.com/office/drawing/2014/main" id="{ADF4678D-DFAD-4C8D-8AB5-71905DCA73B3}"/>
+              </a:ext>
+            </a:extLst>
+          </p:cNvPr>
+          <p:cNvSpPr/>
+          <p:nvPr/>
+        </p:nvSpPr>
+        <p:spPr>
+          <a:xfrm>
+            <a:off x="2302933" y="3770974"/>
+            <a:ext cx="1574800" cy="606293"/>
+          </a:xfrm>
+          <a:prstGeom prst="rect">
+            <a:avLst/>
+          </a:prstGeom>
+          <a:noFill/>
+          <a:ln w="38100">
+            <a:solidFill>
+              <a:srgbClr val="FF0000"/>
+            </a:solidFill>
+          </a:ln>
+        </p:spPr>
+        <p:style>
+          <a:lnRef idx="2">
+            <a:schemeClr val="accent1">
+              <a:shade val="50000"/>
+            </a:schemeClr>
+          </a:lnRef>
+          <a:fillRef idx="1">
+            <a:schemeClr val="accent1"/>
+          </a:fillRef>
+          <a:effectRef idx="0">
+            <a:schemeClr val="accent1"/>
+          </a:effectRef>
+          <a:fontRef idx="minor">
+            <a:schemeClr val="lt1"/>
+          </a:fontRef>
+        </p:style>
+        <p:txBody>
+          <a:bodyPr rtlCol="0" anchor="ctr"/>
+          <a:lstStyle/>
+          <a:p>
+            <a:pPr algn="ctr"/>
+            <a:endParaRPr kumimoji="1" lang="ja-JP" altLang="en-US"/>
+          </a:p>
+        </p:txBody>
+      </p:sp>
     </p:spTree>
     <p:extLst>
       <p:ext uri="{BB962C8B-B14F-4D97-AF65-F5344CB8AC3E}">
-        <p14:creationId xmlns:p14="http://schemas.microsoft.com/office/powerpoint/2010/main" val="864079058"/>
+        <p14:creationId xmlns:p14="http://schemas.microsoft.com/office/powerpoint/2010/main" val="3434694015"/>
       </p:ext>
     </p:extLst>
   </p:cSld>
@@ -8186,7 +4592,7 @@
         <p:spPr>
           <a:xfrm>
             <a:off x="567542" y="491954"/>
-            <a:ext cx="3057247" cy="584775"/>
+            <a:ext cx="2236510" cy="2554545"/>
           </a:xfrm>
           <a:prstGeom prst="rect">
             <a:avLst/>
@@ -8201,8 +4607,21 @@
           <a:p>
             <a:r>
               <a:rPr kumimoji="1" lang="ja-JP" altLang="en-US" sz="3200" b="1" u="sng" dirty="0"/>
-              <a:t>プレイヤー同期</a:t>
-            </a:r>
+              <a:t>当たり判定</a:t>
+            </a:r>
+            <a:endParaRPr kumimoji="1" lang="en-US" altLang="ja-JP" sz="3200" b="1" u="sng" dirty="0"/>
+          </a:p>
+          <a:p>
+            <a:endParaRPr lang="en-US" altLang="ja-JP" sz="3200" b="1" u="sng" dirty="0"/>
+          </a:p>
+          <a:p>
+            <a:endParaRPr kumimoji="1" lang="en-US" altLang="ja-JP" sz="3200" b="1" u="sng" dirty="0"/>
+          </a:p>
+          <a:p>
+            <a:endParaRPr lang="en-US" altLang="ja-JP" sz="3200" b="1" u="sng" dirty="0"/>
+          </a:p>
+          <a:p>
+            <a:endParaRPr kumimoji="1" lang="ja-JP" altLang="en-US" sz="3200" b="1" u="sng" dirty="0"/>
           </a:p>
         </p:txBody>
       </p:sp>
@@ -8221,7 +4640,7 @@
         <p:spPr>
           <a:xfrm>
             <a:off x="567542" y="1216429"/>
-            <a:ext cx="8664551" cy="461665"/>
+            <a:ext cx="9363461" cy="461665"/>
           </a:xfrm>
           <a:prstGeom prst="rect">
             <a:avLst/>
@@ -8235,16 +4654,28 @@
           <a:lstStyle/>
           <a:p>
             <a:r>
+              <a:rPr lang="ja-JP" altLang="en-US" sz="2400" dirty="0"/>
+              <a:t>衝突したオブジェクトは</a:t>
+            </a:r>
+            <a:r>
               <a:rPr lang="en-US" altLang="ja-JP" sz="2400" b="1" dirty="0" err="1">
                 <a:solidFill>
-                  <a:srgbClr val="FF0000"/>
+                  <a:srgbClr val="0070C0"/>
                 </a:solidFill>
               </a:rPr>
-              <a:t>NetworkCommonParam.h</a:t>
+              <a:t>OverlapGameObject</a:t>
+            </a:r>
+            <a:r>
+              <a:rPr lang="ja-JP" altLang="en-US" sz="2400" b="1" dirty="0">
+                <a:solidFill>
+                  <a:srgbClr val="0070C0"/>
+                </a:solidFill>
+              </a:rPr>
+              <a:t>関数</a:t>
             </a:r>
             <a:r>
               <a:rPr lang="ja-JP" altLang="en-US" sz="2400" dirty="0"/>
-              <a:t>に座標通信データを追加します。</a:t>
+              <a:t>が呼ばれます。</a:t>
             </a:r>
             <a:endParaRPr lang="en-US" altLang="ja-JP" sz="2400" dirty="0"/>
           </a:p>
@@ -8252,10 +4683,10 @@
       </p:sp>
       <p:pic>
         <p:nvPicPr>
-          <p:cNvPr id="5" name="図 4">
-            <a:extLst>
-              <a:ext uri="{FF2B5EF4-FFF2-40B4-BE49-F238E27FC236}">
-                <a16:creationId xmlns:a16="http://schemas.microsoft.com/office/drawing/2014/main" id="{20B648A1-5327-4B6E-B79F-06A56226DB85}"/>
+          <p:cNvPr id="9" name="図 8">
+            <a:extLst>
+              <a:ext uri="{FF2B5EF4-FFF2-40B4-BE49-F238E27FC236}">
+                <a16:creationId xmlns:a16="http://schemas.microsoft.com/office/drawing/2014/main" id="{4A805EF9-5A33-4801-A54F-F62B12046570}"/>
               </a:ext>
             </a:extLst>
           </p:cNvPr>
@@ -8272,8 +4703,8 @@
         </p:blipFill>
         <p:spPr>
           <a:xfrm>
-            <a:off x="482874" y="1817794"/>
-            <a:ext cx="5640881" cy="2102273"/>
+            <a:off x="567542" y="1769226"/>
+            <a:ext cx="5054325" cy="4803401"/>
           </a:xfrm>
           <a:prstGeom prst="rect">
             <a:avLst/>
@@ -8283,7 +4714,7 @@
     </p:spTree>
     <p:extLst>
       <p:ext uri="{BB962C8B-B14F-4D97-AF65-F5344CB8AC3E}">
-        <p14:creationId xmlns:p14="http://schemas.microsoft.com/office/powerpoint/2010/main" val="313171620"/>
+        <p14:creationId xmlns:p14="http://schemas.microsoft.com/office/powerpoint/2010/main" val="886978605"/>
       </p:ext>
     </p:extLst>
   </p:cSld>
@@ -8325,7 +4756,7 @@
         <p:spPr>
           <a:xfrm>
             <a:off x="567542" y="491954"/>
-            <a:ext cx="3057247" cy="584775"/>
+            <a:ext cx="2236510" cy="2554545"/>
           </a:xfrm>
           <a:prstGeom prst="rect">
             <a:avLst/>
@@ -8340,8 +4771,21 @@
           <a:p>
             <a:r>
               <a:rPr kumimoji="1" lang="ja-JP" altLang="en-US" sz="3200" b="1" u="sng" dirty="0"/>
-              <a:t>プレイヤー同期</a:t>
-            </a:r>
+              <a:t>当たり判定</a:t>
+            </a:r>
+            <a:endParaRPr kumimoji="1" lang="en-US" altLang="ja-JP" sz="3200" b="1" u="sng" dirty="0"/>
+          </a:p>
+          <a:p>
+            <a:endParaRPr lang="en-US" altLang="ja-JP" sz="3200" b="1" u="sng" dirty="0"/>
+          </a:p>
+          <a:p>
+            <a:endParaRPr kumimoji="1" lang="en-US" altLang="ja-JP" sz="3200" b="1" u="sng" dirty="0"/>
+          </a:p>
+          <a:p>
+            <a:endParaRPr lang="en-US" altLang="ja-JP" sz="3200" b="1" u="sng" dirty="0"/>
+          </a:p>
+          <a:p>
+            <a:endParaRPr kumimoji="1" lang="ja-JP" altLang="en-US" sz="3200" b="1" u="sng" dirty="0"/>
           </a:p>
         </p:txBody>
       </p:sp>
@@ -8360,7 +4804,7 @@
         <p:spPr>
           <a:xfrm>
             <a:off x="567542" y="1216429"/>
-            <a:ext cx="6340197" cy="830997"/>
+            <a:ext cx="11274240" cy="461665"/>
           </a:xfrm>
           <a:prstGeom prst="rect">
             <a:avLst/>
@@ -8375,14 +4819,59 @@
           <a:p>
             <a:r>
               <a:rPr lang="ja-JP" altLang="en-US" sz="2400" dirty="0"/>
-              <a:t>データの送信処理ですが、</a:t>
-            </a:r>
-            <a:endParaRPr lang="en-US" altLang="ja-JP" sz="2400" dirty="0"/>
-          </a:p>
-          <a:p>
+              <a:t>よって</a:t>
+            </a:r>
+            <a:r>
+              <a:rPr lang="en-US" altLang="ja-JP" sz="2400" b="1" dirty="0">
+                <a:solidFill>
+                  <a:srgbClr val="00B050"/>
+                </a:solidFill>
+              </a:rPr>
+              <a:t>Player</a:t>
+            </a:r>
+            <a:r>
+              <a:rPr lang="ja-JP" altLang="en-US" sz="2400" b="1" dirty="0">
+                <a:solidFill>
+                  <a:srgbClr val="00B050"/>
+                </a:solidFill>
+              </a:rPr>
+              <a:t>クラス</a:t>
+            </a:r>
             <a:r>
               <a:rPr lang="ja-JP" altLang="en-US" sz="2400" dirty="0"/>
-              <a:t>送信用のデータを作る処理が少し冗長です。</a:t>
+              <a:t>の</a:t>
+            </a:r>
+            <a:r>
+              <a:rPr lang="en-US" altLang="ja-JP" sz="2400" b="1" dirty="0" err="1">
+                <a:solidFill>
+                  <a:srgbClr val="0070C0"/>
+                </a:solidFill>
+              </a:rPr>
+              <a:t>OverlapGameObject</a:t>
+            </a:r>
+            <a:r>
+              <a:rPr lang="ja-JP" altLang="en-US" sz="2400" b="1" dirty="0">
+                <a:solidFill>
+                  <a:srgbClr val="0070C0"/>
+                </a:solidFill>
+              </a:rPr>
+              <a:t>関数</a:t>
+            </a:r>
+            <a:r>
+              <a:rPr lang="ja-JP" altLang="en-US" sz="2400" dirty="0"/>
+              <a:t>で通信します。（</a:t>
+            </a:r>
+            <a:r>
+              <a:rPr lang="en-US" altLang="ja-JP" sz="2400" b="1" dirty="0">
+                <a:solidFill>
+                  <a:srgbClr val="FF0000"/>
+                </a:solidFill>
+              </a:rPr>
+              <a:t>Player.cpp</a:t>
+            </a:r>
+            <a:r>
+              <a:rPr lang="ja-JP" altLang="en-US" sz="2400" dirty="0"/>
+              <a:t>）</a:t>
             </a:r>
             <a:endParaRPr lang="en-US" altLang="ja-JP" sz="2400" dirty="0"/>
           </a:p>
@@ -8393,7 +4882,7 @@
           <p:cNvPr id="5" name="図 4">
             <a:extLst>
               <a:ext uri="{FF2B5EF4-FFF2-40B4-BE49-F238E27FC236}">
-                <a16:creationId xmlns:a16="http://schemas.microsoft.com/office/drawing/2014/main" id="{92006B30-C9D2-4438-9C6B-AFB9D6970937}"/>
+                <a16:creationId xmlns:a16="http://schemas.microsoft.com/office/drawing/2014/main" id="{6DE415C1-EFC0-4919-B9DE-F5A11C8240E4}"/>
               </a:ext>
             </a:extLst>
           </p:cNvPr>
@@ -8410,8 +4899,8 @@
         </p:blipFill>
         <p:spPr>
           <a:xfrm>
-            <a:off x="567542" y="2187126"/>
-            <a:ext cx="6662991" cy="3348125"/>
+            <a:off x="567541" y="1769226"/>
+            <a:ext cx="8253825" cy="3742574"/>
           </a:xfrm>
           <a:prstGeom prst="rect">
             <a:avLst/>
@@ -8420,10 +4909,62 @@
       </p:pic>
       <p:sp>
         <p:nvSpPr>
-          <p:cNvPr id="7" name="テキスト ボックス 6">
-            <a:extLst>
-              <a:ext uri="{FF2B5EF4-FFF2-40B4-BE49-F238E27FC236}">
-                <a16:creationId xmlns:a16="http://schemas.microsoft.com/office/drawing/2014/main" id="{B4BF8563-7CDF-41D7-AB5F-DD7499281193}"/>
+          <p:cNvPr id="7" name="正方形/長方形 6">
+            <a:extLst>
+              <a:ext uri="{FF2B5EF4-FFF2-40B4-BE49-F238E27FC236}">
+                <a16:creationId xmlns:a16="http://schemas.microsoft.com/office/drawing/2014/main" id="{F8A9E7EC-2C5C-4DFF-B873-2968A9E83248}"/>
+              </a:ext>
+            </a:extLst>
+          </p:cNvPr>
+          <p:cNvSpPr/>
+          <p:nvPr/>
+        </p:nvSpPr>
+        <p:spPr>
+          <a:xfrm>
+            <a:off x="3119652" y="3991107"/>
+            <a:ext cx="2036547" cy="665560"/>
+          </a:xfrm>
+          <a:prstGeom prst="rect">
+            <a:avLst/>
+          </a:prstGeom>
+          <a:noFill/>
+          <a:ln w="38100">
+            <a:solidFill>
+              <a:srgbClr val="FF0000"/>
+            </a:solidFill>
+          </a:ln>
+        </p:spPr>
+        <p:style>
+          <a:lnRef idx="2">
+            <a:schemeClr val="accent1">
+              <a:shade val="50000"/>
+            </a:schemeClr>
+          </a:lnRef>
+          <a:fillRef idx="1">
+            <a:schemeClr val="accent1"/>
+          </a:fillRef>
+          <a:effectRef idx="0">
+            <a:schemeClr val="accent1"/>
+          </a:effectRef>
+          <a:fontRef idx="minor">
+            <a:schemeClr val="lt1"/>
+          </a:fontRef>
+        </p:style>
+        <p:txBody>
+          <a:bodyPr rtlCol="0" anchor="ctr"/>
+          <a:lstStyle/>
+          <a:p>
+            <a:pPr algn="ctr"/>
+            <a:endParaRPr kumimoji="1" lang="ja-JP" altLang="en-US"/>
+          </a:p>
+        </p:txBody>
+      </p:sp>
+      <p:sp>
+        <p:nvSpPr>
+          <p:cNvPr id="8" name="テキスト ボックス 7">
+            <a:extLst>
+              <a:ext uri="{FF2B5EF4-FFF2-40B4-BE49-F238E27FC236}">
+                <a16:creationId xmlns:a16="http://schemas.microsoft.com/office/drawing/2014/main" id="{9DCE1F2F-D090-414D-B9DA-D2AE3D9C0983}"/>
               </a:ext>
             </a:extLst>
           </p:cNvPr>
@@ -8432,8 +4973,8 @@
         </p:nvSpPr>
         <p:spPr>
           <a:xfrm>
-            <a:off x="567542" y="5674951"/>
-            <a:ext cx="8186857" cy="461665"/>
+            <a:off x="567542" y="5511800"/>
+            <a:ext cx="9693679" cy="830997"/>
           </a:xfrm>
           <a:prstGeom prst="rect">
             <a:avLst/>
@@ -8448,7 +4989,22 @@
           <a:p>
             <a:r>
               <a:rPr lang="ja-JP" altLang="en-US" sz="2400" dirty="0"/>
-              <a:t>これを通信処理が必要な場所全てに書くことになる。。。</a:t>
+              <a:t>このようにサーバー側にも</a:t>
+            </a:r>
+            <a:r>
+              <a:rPr lang="en-US" altLang="ja-JP" sz="2400" dirty="0"/>
+              <a:t>Player</a:t>
+            </a:r>
+            <a:r>
+              <a:rPr lang="ja-JP" altLang="en-US" sz="2400" dirty="0"/>
+              <a:t>などのオブジェクトクラスを作ると</a:t>
+            </a:r>
+            <a:endParaRPr lang="en-US" altLang="ja-JP" sz="2400" dirty="0"/>
+          </a:p>
+          <a:p>
+            <a:r>
+              <a:rPr lang="ja-JP" altLang="en-US" sz="2400" dirty="0"/>
+              <a:t>処理しやすいです。</a:t>
             </a:r>
             <a:endParaRPr lang="en-US" altLang="ja-JP" sz="2400" dirty="0"/>
           </a:p>
@@ -8457,7 +5013,7 @@
     </p:spTree>
     <p:extLst>
       <p:ext uri="{BB962C8B-B14F-4D97-AF65-F5344CB8AC3E}">
-        <p14:creationId xmlns:p14="http://schemas.microsoft.com/office/powerpoint/2010/main" val="1643518462"/>
+        <p14:creationId xmlns:p14="http://schemas.microsoft.com/office/powerpoint/2010/main" val="3923851303"/>
       </p:ext>
     </p:extLst>
   </p:cSld>
@@ -8499,7 +5055,7 @@
         <p:spPr>
           <a:xfrm>
             <a:off x="567542" y="491954"/>
-            <a:ext cx="3057247" cy="584775"/>
+            <a:ext cx="2236510" cy="2554545"/>
           </a:xfrm>
           <a:prstGeom prst="rect">
             <a:avLst/>
@@ -8514,8 +5070,21 @@
           <a:p>
             <a:r>
               <a:rPr kumimoji="1" lang="ja-JP" altLang="en-US" sz="3200" b="1" u="sng" dirty="0"/>
-              <a:t>プレイヤー同期</a:t>
-            </a:r>
+              <a:t>当たり判定</a:t>
+            </a:r>
+            <a:endParaRPr kumimoji="1" lang="en-US" altLang="ja-JP" sz="3200" b="1" u="sng" dirty="0"/>
+          </a:p>
+          <a:p>
+            <a:endParaRPr lang="en-US" altLang="ja-JP" sz="3200" b="1" u="sng" dirty="0"/>
+          </a:p>
+          <a:p>
+            <a:endParaRPr kumimoji="1" lang="en-US" altLang="ja-JP" sz="3200" b="1" u="sng" dirty="0"/>
+          </a:p>
+          <a:p>
+            <a:endParaRPr lang="en-US" altLang="ja-JP" sz="3200" b="1" u="sng" dirty="0"/>
+          </a:p>
+          <a:p>
+            <a:endParaRPr kumimoji="1" lang="ja-JP" altLang="en-US" sz="3200" b="1" u="sng" dirty="0"/>
           </a:p>
         </p:txBody>
       </p:sp>
@@ -8534,7 +5103,7 @@
         <p:spPr>
           <a:xfrm>
             <a:off x="567542" y="1216429"/>
-            <a:ext cx="9066906" cy="830997"/>
+            <a:ext cx="9512540" cy="1200329"/>
           </a:xfrm>
           <a:prstGeom prst="rect">
             <a:avLst/>
@@ -8548,43 +5117,42 @@
           <a:lstStyle/>
           <a:p>
             <a:r>
+              <a:rPr lang="ja-JP" altLang="en-US" sz="2400" b="1" dirty="0">
+                <a:solidFill>
+                  <a:srgbClr val="0070C0"/>
+                </a:solidFill>
+              </a:rPr>
+              <a:t>クライアントプロジェクト</a:t>
+            </a:r>
+            <a:r>
               <a:rPr lang="ja-JP" altLang="en-US" sz="2400" dirty="0"/>
-              <a:t>そのため</a:t>
-            </a:r>
-            <a:r>
-              <a:rPr lang="ja-JP" altLang="en-US" sz="2400" b="1" dirty="0">
+              <a:t>の</a:t>
+            </a:r>
+            <a:r>
+              <a:rPr lang="en-US" altLang="ja-JP" sz="2400" b="1" dirty="0">
                 <a:solidFill>
                   <a:srgbClr val="FF0000"/>
                 </a:solidFill>
               </a:rPr>
-              <a:t>送信データを作る処理は関数化</a:t>
+              <a:t>NetworkPlayScene.cpp</a:t>
             </a:r>
             <a:r>
               <a:rPr lang="ja-JP" altLang="en-US" sz="2400" dirty="0"/>
-              <a:t>します。</a:t>
+              <a:t>を開きます。</a:t>
             </a:r>
             <a:endParaRPr lang="en-US" altLang="ja-JP" sz="2400" dirty="0"/>
           </a:p>
           <a:p>
             <a:r>
-              <a:rPr lang="en-US" altLang="ja-JP" sz="2400" dirty="0"/>
-              <a:t>Network</a:t>
-            </a:r>
-            <a:r>
               <a:rPr lang="ja-JP" altLang="en-US" sz="2400" dirty="0"/>
-              <a:t>フォルダの中に、</a:t>
-            </a:r>
-            <a:r>
-              <a:rPr lang="en-US" altLang="ja-JP" sz="2400" b="1" dirty="0" err="1">
-                <a:solidFill>
-                  <a:srgbClr val="FF0000"/>
-                </a:solidFill>
-              </a:rPr>
-              <a:t>NetworkUtility.h</a:t>
-            </a:r>
+              <a:t>これまでと同様に受信処理を作っていますので、</a:t>
+            </a:r>
+            <a:endParaRPr lang="en-US" altLang="ja-JP" sz="2400" dirty="0"/>
+          </a:p>
+          <a:p>
             <a:r>
               <a:rPr lang="ja-JP" altLang="en-US" sz="2400" dirty="0"/>
-              <a:t>を追加しましょう。</a:t>
+              <a:t>死亡処理を呼び出しましょう。</a:t>
             </a:r>
             <a:endParaRPr lang="en-US" altLang="ja-JP" sz="2400" dirty="0"/>
           </a:p>
@@ -8595,7 +5163,7 @@
           <p:cNvPr id="3" name="図 2">
             <a:extLst>
               <a:ext uri="{FF2B5EF4-FFF2-40B4-BE49-F238E27FC236}">
-                <a16:creationId xmlns:a16="http://schemas.microsoft.com/office/drawing/2014/main" id="{FFD03F4A-2A3E-4A60-8C1B-193EFDC01DE6}"/>
+                <a16:creationId xmlns:a16="http://schemas.microsoft.com/office/drawing/2014/main" id="{F08DF65E-B52E-4225-A3C5-6255823EC348}"/>
               </a:ext>
             </a:extLst>
           </p:cNvPr>
@@ -8612,18 +5180,106 @@
         </p:blipFill>
         <p:spPr>
           <a:xfrm>
-            <a:off x="567541" y="2187126"/>
-            <a:ext cx="4013793" cy="3180741"/>
+            <a:off x="567542" y="2416757"/>
+            <a:ext cx="10140384" cy="2646309"/>
           </a:xfrm>
           <a:prstGeom prst="rect">
             <a:avLst/>
           </a:prstGeom>
         </p:spPr>
       </p:pic>
+      <p:sp>
+        <p:nvSpPr>
+          <p:cNvPr id="9" name="正方形/長方形 8">
+            <a:extLst>
+              <a:ext uri="{FF2B5EF4-FFF2-40B4-BE49-F238E27FC236}">
+                <a16:creationId xmlns:a16="http://schemas.microsoft.com/office/drawing/2014/main" id="{164044AD-84C7-464B-9868-E26643B63D93}"/>
+              </a:ext>
+            </a:extLst>
+          </p:cNvPr>
+          <p:cNvSpPr/>
+          <p:nvPr/>
+        </p:nvSpPr>
+        <p:spPr>
+          <a:xfrm>
+            <a:off x="2408452" y="3811501"/>
+            <a:ext cx="6837148" cy="972165"/>
+          </a:xfrm>
+          <a:prstGeom prst="rect">
+            <a:avLst/>
+          </a:prstGeom>
+          <a:noFill/>
+          <a:ln w="38100">
+            <a:solidFill>
+              <a:srgbClr val="FF0000"/>
+            </a:solidFill>
+          </a:ln>
+        </p:spPr>
+        <p:style>
+          <a:lnRef idx="2">
+            <a:schemeClr val="accent1">
+              <a:shade val="50000"/>
+            </a:schemeClr>
+          </a:lnRef>
+          <a:fillRef idx="1">
+            <a:schemeClr val="accent1"/>
+          </a:fillRef>
+          <a:effectRef idx="0">
+            <a:schemeClr val="accent1"/>
+          </a:effectRef>
+          <a:fontRef idx="minor">
+            <a:schemeClr val="lt1"/>
+          </a:fontRef>
+        </p:style>
+        <p:txBody>
+          <a:bodyPr rtlCol="0" anchor="ctr"/>
+          <a:lstStyle/>
+          <a:p>
+            <a:pPr algn="ctr"/>
+            <a:endParaRPr kumimoji="1" lang="ja-JP" altLang="en-US"/>
+          </a:p>
+        </p:txBody>
+      </p:sp>
+      <p:sp>
+        <p:nvSpPr>
+          <p:cNvPr id="10" name="テキスト ボックス 9">
+            <a:extLst>
+              <a:ext uri="{FF2B5EF4-FFF2-40B4-BE49-F238E27FC236}">
+                <a16:creationId xmlns:a16="http://schemas.microsoft.com/office/drawing/2014/main" id="{0E00ECD4-98A4-4507-82DE-71800180674A}"/>
+              </a:ext>
+            </a:extLst>
+          </p:cNvPr>
+          <p:cNvSpPr txBox="1"/>
+          <p:nvPr/>
+        </p:nvSpPr>
+        <p:spPr>
+          <a:xfrm>
+            <a:off x="567542" y="5227903"/>
+            <a:ext cx="7571303" cy="461665"/>
+          </a:xfrm>
+          <a:prstGeom prst="rect">
+            <a:avLst/>
+          </a:prstGeom>
+          <a:noFill/>
+        </p:spPr>
+        <p:txBody>
+          <a:bodyPr wrap="none" rtlCol="0">
+            <a:spAutoFit/>
+          </a:bodyPr>
+          <a:lstStyle/>
+          <a:p>
+            <a:r>
+              <a:rPr lang="ja-JP" altLang="en-US" sz="2400" dirty="0"/>
+              <a:t>動作確認してぶつかると死亡するか確認しましょう。</a:t>
+            </a:r>
+            <a:endParaRPr lang="en-US" altLang="ja-JP" sz="2400" dirty="0"/>
+          </a:p>
+        </p:txBody>
+      </p:sp>
     </p:spTree>
     <p:extLst>
       <p:ext uri="{BB962C8B-B14F-4D97-AF65-F5344CB8AC3E}">
-        <p14:creationId xmlns:p14="http://schemas.microsoft.com/office/powerpoint/2010/main" val="3483590026"/>
+        <p14:creationId xmlns:p14="http://schemas.microsoft.com/office/powerpoint/2010/main" val="2311185740"/>
       </p:ext>
     </p:extLst>
   </p:cSld>
@@ -8665,7 +5321,7 @@
         <p:spPr>
           <a:xfrm>
             <a:off x="567542" y="491954"/>
-            <a:ext cx="3057247" cy="584775"/>
+            <a:ext cx="2236510" cy="2554545"/>
           </a:xfrm>
           <a:prstGeom prst="rect">
             <a:avLst/>
@@ -8680,8 +5336,21 @@
           <a:p>
             <a:r>
               <a:rPr kumimoji="1" lang="ja-JP" altLang="en-US" sz="3200" b="1" u="sng" dirty="0"/>
-              <a:t>プレイヤー同期</a:t>
-            </a:r>
+              <a:t>当たり判定</a:t>
+            </a:r>
+            <a:endParaRPr kumimoji="1" lang="en-US" altLang="ja-JP" sz="3200" b="1" u="sng" dirty="0"/>
+          </a:p>
+          <a:p>
+            <a:endParaRPr lang="en-US" altLang="ja-JP" sz="3200" b="1" u="sng" dirty="0"/>
+          </a:p>
+          <a:p>
+            <a:endParaRPr kumimoji="1" lang="en-US" altLang="ja-JP" sz="3200" b="1" u="sng" dirty="0"/>
+          </a:p>
+          <a:p>
+            <a:endParaRPr lang="en-US" altLang="ja-JP" sz="3200" b="1" u="sng" dirty="0"/>
+          </a:p>
+          <a:p>
+            <a:endParaRPr kumimoji="1" lang="ja-JP" altLang="en-US" sz="3200" b="1" u="sng" dirty="0"/>
           </a:p>
         </p:txBody>
       </p:sp>
@@ -8700,7 +5369,7 @@
         <p:spPr>
           <a:xfrm>
             <a:off x="567542" y="1216429"/>
-            <a:ext cx="4482317" cy="461665"/>
+            <a:ext cx="11572399" cy="2677656"/>
           </a:xfrm>
           <a:prstGeom prst="rect">
             <a:avLst/>
@@ -8714,91 +5383,364 @@
           <a:lstStyle/>
           <a:p>
             <a:r>
-              <a:rPr lang="en-US" altLang="ja-JP" sz="2400" b="1" dirty="0" err="1">
+              <a:rPr lang="ja-JP" altLang="en-US" sz="2400" dirty="0"/>
+              <a:t>当たって消える位であれば簡単ですが、</a:t>
+            </a:r>
+            <a:endParaRPr lang="en-US" altLang="ja-JP" sz="2400" dirty="0"/>
+          </a:p>
+          <a:p>
+            <a:r>
+              <a:rPr lang="ja-JP" altLang="en-US" sz="2400" dirty="0"/>
+              <a:t>当たった後に</a:t>
+            </a:r>
+            <a:r>
+              <a:rPr lang="ja-JP" altLang="en-US" sz="2400" b="1" dirty="0">
                 <a:solidFill>
                   <a:srgbClr val="FF0000"/>
                 </a:solidFill>
               </a:rPr>
-              <a:t>NetworkUtility.h</a:t>
+              <a:t>押し出したり、跳ね返したりする場合は問題が発生</a:t>
             </a:r>
             <a:r>
               <a:rPr lang="ja-JP" altLang="en-US" sz="2400" dirty="0"/>
-              <a:t>を書きます。</a:t>
+              <a:t>します。</a:t>
             </a:r>
             <a:endParaRPr lang="en-US" altLang="ja-JP" sz="2400" dirty="0"/>
           </a:p>
-        </p:txBody>
-      </p:sp>
-      <p:pic>
-        <p:nvPicPr>
-          <p:cNvPr id="5" name="図 4">
-            <a:extLst>
-              <a:ext uri="{FF2B5EF4-FFF2-40B4-BE49-F238E27FC236}">
-                <a16:creationId xmlns:a16="http://schemas.microsoft.com/office/drawing/2014/main" id="{490E9687-9C70-47EF-AD93-21ED24A735A6}"/>
-              </a:ext>
-            </a:extLst>
-          </p:cNvPr>
-          <p:cNvPicPr>
-            <a:picLocks noChangeAspect="1"/>
-          </p:cNvPicPr>
+          <a:p>
+            <a:endParaRPr lang="en-US" altLang="ja-JP" sz="2400" dirty="0"/>
+          </a:p>
+          <a:p>
+            <a:r>
+              <a:rPr lang="ja-JP" altLang="en-US" sz="2400" b="1" dirty="0">
+                <a:solidFill>
+                  <a:srgbClr val="FF0000"/>
+                </a:solidFill>
+              </a:rPr>
+              <a:t>オフライン</a:t>
+            </a:r>
+            <a:r>
+              <a:rPr lang="ja-JP" altLang="en-US" sz="2400" dirty="0"/>
+              <a:t>であれば、</a:t>
+            </a:r>
+            <a:r>
+              <a:rPr lang="ja-JP" altLang="en-US" sz="2400" b="1" dirty="0">
+                <a:solidFill>
+                  <a:srgbClr val="FF0000"/>
+                </a:solidFill>
+              </a:rPr>
+              <a:t>衝突と押し出しが１フレーム中に１回ずつ処理</a:t>
+            </a:r>
+            <a:r>
+              <a:rPr lang="ja-JP" altLang="en-US" sz="2400" dirty="0"/>
+              <a:t>されますが、</a:t>
+            </a:r>
+            <a:endParaRPr lang="en-US" altLang="ja-JP" sz="2400" dirty="0"/>
+          </a:p>
+          <a:p>
+            <a:r>
+              <a:rPr lang="ja-JP" altLang="en-US" sz="2400" dirty="0"/>
+              <a:t>オンラインのクライアント</a:t>
+            </a:r>
+            <a:r>
+              <a:rPr lang="en-US" altLang="ja-JP" sz="2400" dirty="0"/>
+              <a:t>/</a:t>
+            </a:r>
+            <a:r>
+              <a:rPr lang="ja-JP" altLang="en-US" sz="2400" dirty="0"/>
+              <a:t>サーバー間の通信にはラグがあり、</a:t>
+            </a:r>
+            <a:endParaRPr lang="en-US" altLang="ja-JP" sz="2400" dirty="0"/>
+          </a:p>
+          <a:p>
+            <a:r>
+              <a:rPr lang="ja-JP" altLang="en-US" sz="2400" b="1" dirty="0">
+                <a:solidFill>
+                  <a:srgbClr val="FF0000"/>
+                </a:solidFill>
+              </a:rPr>
+              <a:t>サーバーから座標が返ってくるまでは、</a:t>
+            </a:r>
+            <a:endParaRPr lang="en-US" altLang="ja-JP" sz="2400" b="1" dirty="0">
+              <a:solidFill>
+                <a:srgbClr val="FF0000"/>
+              </a:solidFill>
+            </a:endParaRPr>
+          </a:p>
+          <a:p>
+            <a:r>
+              <a:rPr lang="ja-JP" altLang="en-US" sz="2400" b="1" dirty="0">
+                <a:solidFill>
+                  <a:srgbClr val="FF0000"/>
+                </a:solidFill>
+              </a:rPr>
+              <a:t>クライアント側の座標が押し出されないままになってしまうからです。</a:t>
+            </a:r>
+            <a:endParaRPr lang="en-US" altLang="ja-JP" sz="2400" b="1" dirty="0">
+              <a:solidFill>
+                <a:srgbClr val="FF0000"/>
+              </a:solidFill>
+            </a:endParaRPr>
+          </a:p>
+        </p:txBody>
+      </p:sp>
+      <p:sp>
+        <p:nvSpPr>
+          <p:cNvPr id="7" name="正方形/長方形 6">
+            <a:extLst>
+              <a:ext uri="{FF2B5EF4-FFF2-40B4-BE49-F238E27FC236}">
+                <a16:creationId xmlns:a16="http://schemas.microsoft.com/office/drawing/2014/main" id="{FEFF9D2F-2292-4160-81CA-18AB7451A08E}"/>
+              </a:ext>
+            </a:extLst>
+          </p:cNvPr>
+          <p:cNvSpPr/>
           <p:nvPr/>
-        </p:nvPicPr>
-        <p:blipFill>
-          <a:blip r:embed="rId2"/>
-          <a:stretch>
-            <a:fillRect/>
-          </a:stretch>
-        </p:blipFill>
+        </p:nvSpPr>
         <p:spPr>
           <a:xfrm>
-            <a:off x="567543" y="1817795"/>
-            <a:ext cx="8043058" cy="4177677"/>
+            <a:off x="567542" y="4309533"/>
+            <a:ext cx="1684591" cy="1976492"/>
           </a:xfrm>
           <a:prstGeom prst="rect">
             <a:avLst/>
           </a:prstGeom>
         </p:spPr>
-      </p:pic>
-      <p:sp>
-        <p:nvSpPr>
-          <p:cNvPr id="7" name="テキスト ボックス 6">
-            <a:extLst>
-              <a:ext uri="{FF2B5EF4-FFF2-40B4-BE49-F238E27FC236}">
-                <a16:creationId xmlns:a16="http://schemas.microsoft.com/office/drawing/2014/main" id="{88F24478-7816-4332-B343-0765767D730D}"/>
-              </a:ext>
-            </a:extLst>
-          </p:cNvPr>
-          <p:cNvSpPr txBox="1"/>
+        <p:style>
+          <a:lnRef idx="2">
+            <a:schemeClr val="accent1">
+              <a:shade val="50000"/>
+            </a:schemeClr>
+          </a:lnRef>
+          <a:fillRef idx="1">
+            <a:schemeClr val="accent1"/>
+          </a:fillRef>
+          <a:effectRef idx="0">
+            <a:schemeClr val="accent1"/>
+          </a:effectRef>
+          <a:fontRef idx="minor">
+            <a:schemeClr val="lt1"/>
+          </a:fontRef>
+        </p:style>
+        <p:txBody>
+          <a:bodyPr rtlCol="0" anchor="t"/>
+          <a:lstStyle/>
+          <a:p>
+            <a:pPr algn="ctr"/>
+            <a:endParaRPr kumimoji="1" lang="en-US" altLang="ja-JP" b="1" dirty="0"/>
+          </a:p>
+          <a:p>
+            <a:pPr algn="ctr"/>
+            <a:r>
+              <a:rPr kumimoji="1" lang="ja-JP" altLang="en-US" b="1" dirty="0"/>
+              <a:t>クライアント</a:t>
+            </a:r>
+          </a:p>
+        </p:txBody>
+      </p:sp>
+      <p:sp>
+        <p:nvSpPr>
+          <p:cNvPr id="8" name="矢印: 右 7">
+            <a:extLst>
+              <a:ext uri="{FF2B5EF4-FFF2-40B4-BE49-F238E27FC236}">
+                <a16:creationId xmlns:a16="http://schemas.microsoft.com/office/drawing/2014/main" id="{A6520DA7-1B23-448C-BE87-E98C08B1D538}"/>
+              </a:ext>
+            </a:extLst>
+          </p:cNvPr>
+          <p:cNvSpPr/>
           <p:nvPr/>
         </p:nvSpPr>
         <p:spPr>
           <a:xfrm>
-            <a:off x="567542" y="6135173"/>
-            <a:ext cx="5109091" cy="461665"/>
+            <a:off x="2252133" y="4448758"/>
+            <a:ext cx="4944809" cy="770466"/>
+          </a:xfrm>
+          <a:prstGeom prst="rightArrow">
+            <a:avLst/>
+          </a:prstGeom>
+        </p:spPr>
+        <p:style>
+          <a:lnRef idx="2">
+            <a:schemeClr val="accent2">
+              <a:shade val="50000"/>
+            </a:schemeClr>
+          </a:lnRef>
+          <a:fillRef idx="1">
+            <a:schemeClr val="accent2"/>
+          </a:fillRef>
+          <a:effectRef idx="0">
+            <a:schemeClr val="accent2"/>
+          </a:effectRef>
+          <a:fontRef idx="minor">
+            <a:schemeClr val="lt1"/>
+          </a:fontRef>
+        </p:style>
+        <p:txBody>
+          <a:bodyPr rtlCol="0" anchor="ctr"/>
+          <a:lstStyle/>
+          <a:p>
+            <a:pPr algn="ctr"/>
+            <a:r>
+              <a:rPr kumimoji="1" lang="ja-JP" altLang="en-US" b="1" dirty="0"/>
+              <a:t>動いている間座標をずっと送信</a:t>
+            </a:r>
+          </a:p>
+        </p:txBody>
+      </p:sp>
+      <p:sp>
+        <p:nvSpPr>
+          <p:cNvPr id="11" name="正方形/長方形 10">
+            <a:extLst>
+              <a:ext uri="{FF2B5EF4-FFF2-40B4-BE49-F238E27FC236}">
+                <a16:creationId xmlns:a16="http://schemas.microsoft.com/office/drawing/2014/main" id="{0BC5B660-8CD1-4030-80A2-B160C4881716}"/>
+              </a:ext>
+            </a:extLst>
+          </p:cNvPr>
+          <p:cNvSpPr/>
+          <p:nvPr/>
+        </p:nvSpPr>
+        <p:spPr>
+          <a:xfrm>
+            <a:off x="7196942" y="4309533"/>
+            <a:ext cx="1684591" cy="1976492"/>
           </a:xfrm>
           <a:prstGeom prst="rect">
             <a:avLst/>
           </a:prstGeom>
-          <a:noFill/>
         </p:spPr>
-        <p:txBody>
-          <a:bodyPr wrap="none" rtlCol="0">
-            <a:spAutoFit/>
-          </a:bodyPr>
-          <a:lstStyle/>
-          <a:p>
-            <a:r>
-              <a:rPr lang="ja-JP" altLang="en-US" sz="2400" dirty="0"/>
-              <a:t>これで送信処理がすっきりします。</a:t>
-            </a:r>
-            <a:endParaRPr lang="en-US" altLang="ja-JP" sz="2400" dirty="0"/>
+        <p:style>
+          <a:lnRef idx="2">
+            <a:schemeClr val="accent6">
+              <a:shade val="50000"/>
+            </a:schemeClr>
+          </a:lnRef>
+          <a:fillRef idx="1">
+            <a:schemeClr val="accent6"/>
+          </a:fillRef>
+          <a:effectRef idx="0">
+            <a:schemeClr val="accent6"/>
+          </a:effectRef>
+          <a:fontRef idx="minor">
+            <a:schemeClr val="lt1"/>
+          </a:fontRef>
+        </p:style>
+        <p:txBody>
+          <a:bodyPr rtlCol="0" anchor="t"/>
+          <a:lstStyle/>
+          <a:p>
+            <a:pPr algn="ctr"/>
+            <a:endParaRPr kumimoji="1" lang="en-US" altLang="ja-JP" b="1" dirty="0"/>
+          </a:p>
+          <a:p>
+            <a:pPr algn="ctr"/>
+            <a:r>
+              <a:rPr kumimoji="1" lang="ja-JP" altLang="en-US" b="1" dirty="0"/>
+              <a:t>サーバー</a:t>
+            </a:r>
+          </a:p>
+        </p:txBody>
+      </p:sp>
+      <p:sp>
+        <p:nvSpPr>
+          <p:cNvPr id="12" name="正方形/長方形 11">
+            <a:extLst>
+              <a:ext uri="{FF2B5EF4-FFF2-40B4-BE49-F238E27FC236}">
+                <a16:creationId xmlns:a16="http://schemas.microsoft.com/office/drawing/2014/main" id="{BF929A1D-3CCD-4192-8F6E-058BECDF5FAC}"/>
+              </a:ext>
+            </a:extLst>
+          </p:cNvPr>
+          <p:cNvSpPr/>
+          <p:nvPr/>
+        </p:nvSpPr>
+        <p:spPr>
+          <a:xfrm>
+            <a:off x="7340875" y="4912546"/>
+            <a:ext cx="1439058" cy="1234254"/>
+          </a:xfrm>
+          <a:prstGeom prst="rect">
+            <a:avLst/>
+          </a:prstGeom>
+        </p:spPr>
+        <p:style>
+          <a:lnRef idx="2">
+            <a:schemeClr val="accent4">
+              <a:shade val="50000"/>
+            </a:schemeClr>
+          </a:lnRef>
+          <a:fillRef idx="1">
+            <a:schemeClr val="accent4"/>
+          </a:fillRef>
+          <a:effectRef idx="0">
+            <a:schemeClr val="accent4"/>
+          </a:effectRef>
+          <a:fontRef idx="minor">
+            <a:schemeClr val="lt1"/>
+          </a:fontRef>
+        </p:style>
+        <p:txBody>
+          <a:bodyPr rtlCol="0" anchor="ctr"/>
+          <a:lstStyle/>
+          <a:p>
+            <a:pPr algn="ctr"/>
+            <a:r>
+              <a:rPr kumimoji="1" lang="ja-JP" altLang="en-US" b="1" dirty="0"/>
+              <a:t>当たり判定忙しすぎる</a:t>
+            </a:r>
+          </a:p>
+        </p:txBody>
+      </p:sp>
+      <p:sp>
+        <p:nvSpPr>
+          <p:cNvPr id="2" name="矢印: 左 1">
+            <a:extLst>
+              <a:ext uri="{FF2B5EF4-FFF2-40B4-BE49-F238E27FC236}">
+                <a16:creationId xmlns:a16="http://schemas.microsoft.com/office/drawing/2014/main" id="{1A7FCB7D-0859-47BB-8B7B-04C5F758E140}"/>
+              </a:ext>
+            </a:extLst>
+          </p:cNvPr>
+          <p:cNvSpPr/>
+          <p:nvPr/>
+        </p:nvSpPr>
+        <p:spPr>
+          <a:xfrm>
+            <a:off x="2252133" y="5591969"/>
+            <a:ext cx="4944809" cy="399449"/>
+          </a:xfrm>
+          <a:prstGeom prst="leftArrow">
+            <a:avLst/>
+          </a:prstGeom>
+        </p:spPr>
+        <p:style>
+          <a:lnRef idx="2">
+            <a:schemeClr val="accent5">
+              <a:shade val="50000"/>
+            </a:schemeClr>
+          </a:lnRef>
+          <a:fillRef idx="1">
+            <a:schemeClr val="accent5"/>
+          </a:fillRef>
+          <a:effectRef idx="0">
+            <a:schemeClr val="accent5"/>
+          </a:effectRef>
+          <a:fontRef idx="minor">
+            <a:schemeClr val="lt1"/>
+          </a:fontRef>
+        </p:style>
+        <p:txBody>
+          <a:bodyPr rtlCol="0" anchor="ctr"/>
+          <a:lstStyle/>
+          <a:p>
+            <a:pPr algn="ctr"/>
+            <a:r>
+              <a:rPr kumimoji="1" lang="ja-JP" altLang="en-US" sz="1400" b="1" dirty="0"/>
+              <a:t>当たり判定ができ次第、結果の座標を送信</a:t>
+            </a:r>
           </a:p>
         </p:txBody>
       </p:sp>
     </p:spTree>
     <p:extLst>
       <p:ext uri="{BB962C8B-B14F-4D97-AF65-F5344CB8AC3E}">
-        <p14:creationId xmlns:p14="http://schemas.microsoft.com/office/powerpoint/2010/main" val="3265128898"/>
+        <p14:creationId xmlns:p14="http://schemas.microsoft.com/office/powerpoint/2010/main" val="4150249002"/>
       </p:ext>
     </p:extLst>
   </p:cSld>
@@ -8840,7 +5782,7 @@
         <p:spPr>
           <a:xfrm>
             <a:off x="567542" y="491954"/>
-            <a:ext cx="3057247" cy="584775"/>
+            <a:ext cx="2236510" cy="2554545"/>
           </a:xfrm>
           <a:prstGeom prst="rect">
             <a:avLst/>
@@ -8855,8 +5797,21 @@
           <a:p>
             <a:r>
               <a:rPr kumimoji="1" lang="ja-JP" altLang="en-US" sz="3200" b="1" u="sng" dirty="0"/>
-              <a:t>プレイヤー同期</a:t>
-            </a:r>
+              <a:t>当たり判定</a:t>
+            </a:r>
+            <a:endParaRPr kumimoji="1" lang="en-US" altLang="ja-JP" sz="3200" b="1" u="sng" dirty="0"/>
+          </a:p>
+          <a:p>
+            <a:endParaRPr lang="en-US" altLang="ja-JP" sz="3200" b="1" u="sng" dirty="0"/>
+          </a:p>
+          <a:p>
+            <a:endParaRPr kumimoji="1" lang="en-US" altLang="ja-JP" sz="3200" b="1" u="sng" dirty="0"/>
+          </a:p>
+          <a:p>
+            <a:endParaRPr lang="en-US" altLang="ja-JP" sz="3200" b="1" u="sng" dirty="0"/>
+          </a:p>
+          <a:p>
+            <a:endParaRPr kumimoji="1" lang="ja-JP" altLang="en-US" sz="3200" b="1" u="sng" dirty="0"/>
           </a:p>
         </p:txBody>
       </p:sp>
@@ -8875,7 +5830,7 @@
         <p:spPr>
           <a:xfrm>
             <a:off x="567542" y="1216429"/>
-            <a:ext cx="9175910" cy="461665"/>
+            <a:ext cx="10341293" cy="5262979"/>
           </a:xfrm>
           <a:prstGeom prst="rect">
             <a:avLst/>
@@ -8889,115 +5844,108 @@
           <a:lstStyle/>
           <a:p>
             <a:r>
-              <a:rPr lang="en-US" altLang="ja-JP" sz="2400" b="1" dirty="0" err="1">
+              <a:rPr lang="ja-JP" altLang="en-US" sz="2400" dirty="0"/>
+              <a:t>この対策には明確な答えはありません。ゲーム次第になります。</a:t>
+            </a:r>
+            <a:endParaRPr lang="en-US" altLang="ja-JP" sz="2400" dirty="0"/>
+          </a:p>
+          <a:p>
+            <a:r>
+              <a:rPr lang="ja-JP" altLang="en-US" sz="2400" dirty="0"/>
+              <a:t>授業では代表的なものだけ紹介します。</a:t>
+            </a:r>
+            <a:endParaRPr lang="en-US" altLang="ja-JP" sz="2400" dirty="0"/>
+          </a:p>
+          <a:p>
+            <a:endParaRPr lang="en-US" altLang="ja-JP" sz="2400" dirty="0"/>
+          </a:p>
+          <a:p>
+            <a:r>
+              <a:rPr lang="ja-JP" altLang="en-US" sz="2400" b="1" dirty="0">
                 <a:solidFill>
-                  <a:srgbClr val="00B050"/>
+                  <a:srgbClr val="FF0000"/>
                 </a:solidFill>
               </a:rPr>
-              <a:t>NetworkPlayer</a:t>
-            </a:r>
-            <a:r>
-              <a:rPr lang="ja-JP" altLang="en-US" sz="2400" b="1" dirty="0">
-                <a:solidFill>
-                  <a:srgbClr val="00B050"/>
-                </a:solidFill>
-              </a:rPr>
-              <a:t>クラス</a:t>
-            </a:r>
+              <a:t>■対策</a:t>
+            </a:r>
+            <a:endParaRPr lang="en-US" altLang="ja-JP" sz="2400" b="1" dirty="0">
+              <a:solidFill>
+                <a:srgbClr val="FF0000"/>
+              </a:solidFill>
+            </a:endParaRPr>
+          </a:p>
+          <a:p>
             <a:r>
               <a:rPr lang="ja-JP" altLang="en-US" sz="2400" dirty="0"/>
-              <a:t>に自身の座標を送信する関数を作ります。</a:t>
+              <a:t>・クライアント側でも当たり判定をしてめり込まないようにする</a:t>
             </a:r>
             <a:endParaRPr lang="en-US" altLang="ja-JP" sz="2400" dirty="0"/>
           </a:p>
-        </p:txBody>
-      </p:sp>
-      <p:pic>
-        <p:nvPicPr>
-          <p:cNvPr id="5" name="図 4">
-            <a:extLst>
-              <a:ext uri="{FF2B5EF4-FFF2-40B4-BE49-F238E27FC236}">
-                <a16:creationId xmlns:a16="http://schemas.microsoft.com/office/drawing/2014/main" id="{248A5DC4-9FD8-4DD0-998F-6D992975BC67}"/>
-              </a:ext>
-            </a:extLst>
-          </p:cNvPr>
-          <p:cNvPicPr>
-            <a:picLocks noChangeAspect="1"/>
-          </p:cNvPicPr>
-          <p:nvPr/>
-        </p:nvPicPr>
-        <p:blipFill>
-          <a:blip r:embed="rId2"/>
-          <a:stretch>
-            <a:fillRect/>
-          </a:stretch>
-        </p:blipFill>
-        <p:spPr>
-          <a:xfrm>
-            <a:off x="567541" y="1817794"/>
-            <a:ext cx="10116811" cy="2551006"/>
-          </a:xfrm>
-          <a:prstGeom prst="rect">
-            <a:avLst/>
-          </a:prstGeom>
-        </p:spPr>
-      </p:pic>
-      <p:sp>
-        <p:nvSpPr>
-          <p:cNvPr id="7" name="正方形/長方形 6">
-            <a:extLst>
-              <a:ext uri="{FF2B5EF4-FFF2-40B4-BE49-F238E27FC236}">
-                <a16:creationId xmlns:a16="http://schemas.microsoft.com/office/drawing/2014/main" id="{87718610-476E-4D55-81B2-3A344458DF36}"/>
-              </a:ext>
-            </a:extLst>
-          </p:cNvPr>
-          <p:cNvSpPr/>
-          <p:nvPr/>
-        </p:nvSpPr>
-        <p:spPr>
-          <a:xfrm>
-            <a:off x="2023533" y="2023533"/>
-            <a:ext cx="2370667" cy="618067"/>
-          </a:xfrm>
-          <a:prstGeom prst="rect">
-            <a:avLst/>
-          </a:prstGeom>
-          <a:noFill/>
-          <a:ln w="28575">
-            <a:solidFill>
-              <a:srgbClr val="FF0000"/>
-            </a:solidFill>
-          </a:ln>
-        </p:spPr>
-        <p:style>
-          <a:lnRef idx="2">
-            <a:schemeClr val="accent1">
-              <a:shade val="50000"/>
-            </a:schemeClr>
-          </a:lnRef>
-          <a:fillRef idx="1">
-            <a:schemeClr val="accent1"/>
-          </a:fillRef>
-          <a:effectRef idx="0">
-            <a:schemeClr val="accent1"/>
-          </a:effectRef>
-          <a:fontRef idx="minor">
-            <a:schemeClr val="lt1"/>
-          </a:fontRef>
-        </p:style>
-        <p:txBody>
-          <a:bodyPr rtlCol="0" anchor="ctr"/>
-          <a:lstStyle/>
-          <a:p>
-            <a:pPr algn="ctr"/>
-            <a:endParaRPr kumimoji="1" lang="ja-JP" altLang="en-US"/>
+          <a:p>
+            <a:r>
+              <a:rPr lang="ja-JP" altLang="en-US" sz="2400" dirty="0"/>
+              <a:t>　・それでもサーバー側と一致しないので違和感は残る</a:t>
+            </a:r>
+            <a:endParaRPr lang="en-US" altLang="ja-JP" sz="2400" dirty="0"/>
+          </a:p>
+          <a:p>
+            <a:endParaRPr lang="en-US" altLang="ja-JP" sz="2400" dirty="0"/>
+          </a:p>
+          <a:p>
+            <a:r>
+              <a:rPr lang="ja-JP" altLang="en-US" sz="2400" dirty="0"/>
+              <a:t>・通信データに番号を割り当て、番号ごとの座標で同期する</a:t>
+            </a:r>
+            <a:endParaRPr lang="en-US" altLang="ja-JP" sz="2400" dirty="0"/>
+          </a:p>
+          <a:p>
+            <a:r>
+              <a:rPr lang="ja-JP" altLang="en-US" sz="2400" dirty="0"/>
+              <a:t>　・同期した座標のみ採用すると、とても画面がカクツク</a:t>
+            </a:r>
+            <a:endParaRPr lang="en-US" altLang="ja-JP" sz="2400" dirty="0"/>
+          </a:p>
+          <a:p>
+            <a:endParaRPr lang="en-US" altLang="ja-JP" sz="2400" dirty="0"/>
+          </a:p>
+          <a:p>
+            <a:r>
+              <a:rPr lang="ja-JP" altLang="en-US" sz="2400" dirty="0"/>
+              <a:t>・上</a:t>
+            </a:r>
+            <a:r>
+              <a:rPr lang="en-US" altLang="ja-JP" sz="2400" dirty="0"/>
+              <a:t>2</a:t>
+            </a:r>
+            <a:r>
+              <a:rPr lang="ja-JP" altLang="en-US" sz="2400" dirty="0"/>
+              <a:t>つの対策をした上で、座標を線形補完する</a:t>
+            </a:r>
+            <a:endParaRPr lang="en-US" altLang="ja-JP" sz="2400" dirty="0"/>
+          </a:p>
+          <a:p>
+            <a:r>
+              <a:rPr lang="ja-JP" altLang="en-US" sz="2400" dirty="0"/>
+              <a:t>　・これで、かなり違和感はなくなる。ゲームエンジンも基本このやり方</a:t>
+            </a:r>
+            <a:endParaRPr lang="en-US" altLang="ja-JP" sz="2400" dirty="0"/>
+          </a:p>
+          <a:p>
+            <a:endParaRPr lang="en-US" altLang="ja-JP" sz="2400" dirty="0"/>
+          </a:p>
+          <a:p>
+            <a:r>
+              <a:rPr lang="ja-JP" altLang="en-US" sz="2400" dirty="0"/>
+              <a:t>市販のゲームでは、これをベースに対策を考えていきます。</a:t>
+            </a:r>
+            <a:endParaRPr lang="en-US" altLang="ja-JP" sz="2400" dirty="0"/>
           </a:p>
         </p:txBody>
       </p:sp>
     </p:spTree>
     <p:extLst>
       <p:ext uri="{BB962C8B-B14F-4D97-AF65-F5344CB8AC3E}">
-        <p14:creationId xmlns:p14="http://schemas.microsoft.com/office/powerpoint/2010/main" val="3564276118"/>
+        <p14:creationId xmlns:p14="http://schemas.microsoft.com/office/powerpoint/2010/main" val="2736433532"/>
       </p:ext>
     </p:extLst>
   </p:cSld>

--- a/ゲーム科3年/00_前期/オンラインゲームプログラミングⅠ/11_当たり判定.pptx
+++ b/ゲーム科3年/00_前期/オンラインゲームプログラミングⅠ/11_当たり判定.pptx
@@ -267,7 +267,7 @@
           <a:p>
             <a:fld id="{E9CC885B-4903-4D54-9A93-00025F12DED9}" type="datetimeFigureOut">
               <a:rPr kumimoji="1" lang="ja-JP" altLang="en-US" smtClean="0"/>
-              <a:t>2025/12/11</a:t>
+              <a:t>2025/12/12</a:t>
             </a:fld>
             <a:endParaRPr kumimoji="1" lang="ja-JP" altLang="en-US"/>
           </a:p>
@@ -497,7 +497,7 @@
           <a:p>
             <a:fld id="{E9CC885B-4903-4D54-9A93-00025F12DED9}" type="datetimeFigureOut">
               <a:rPr kumimoji="1" lang="ja-JP" altLang="en-US" smtClean="0"/>
-              <a:t>2025/12/11</a:t>
+              <a:t>2025/12/12</a:t>
             </a:fld>
             <a:endParaRPr kumimoji="1" lang="ja-JP" altLang="en-US"/>
           </a:p>
@@ -737,7 +737,7 @@
           <a:p>
             <a:fld id="{E9CC885B-4903-4D54-9A93-00025F12DED9}" type="datetimeFigureOut">
               <a:rPr kumimoji="1" lang="ja-JP" altLang="en-US" smtClean="0"/>
-              <a:t>2025/12/11</a:t>
+              <a:t>2025/12/12</a:t>
             </a:fld>
             <a:endParaRPr kumimoji="1" lang="ja-JP" altLang="en-US"/>
           </a:p>
@@ -967,7 +967,7 @@
           <a:p>
             <a:fld id="{E9CC885B-4903-4D54-9A93-00025F12DED9}" type="datetimeFigureOut">
               <a:rPr kumimoji="1" lang="ja-JP" altLang="en-US" smtClean="0"/>
-              <a:t>2025/12/11</a:t>
+              <a:t>2025/12/12</a:t>
             </a:fld>
             <a:endParaRPr kumimoji="1" lang="ja-JP" altLang="en-US"/>
           </a:p>
@@ -1242,7 +1242,7 @@
           <a:p>
             <a:fld id="{E9CC885B-4903-4D54-9A93-00025F12DED9}" type="datetimeFigureOut">
               <a:rPr kumimoji="1" lang="ja-JP" altLang="en-US" smtClean="0"/>
-              <a:t>2025/12/11</a:t>
+              <a:t>2025/12/12</a:t>
             </a:fld>
             <a:endParaRPr kumimoji="1" lang="ja-JP" altLang="en-US"/>
           </a:p>
@@ -1571,7 +1571,7 @@
           <a:p>
             <a:fld id="{E9CC885B-4903-4D54-9A93-00025F12DED9}" type="datetimeFigureOut">
               <a:rPr kumimoji="1" lang="ja-JP" altLang="en-US" smtClean="0"/>
-              <a:t>2025/12/11</a:t>
+              <a:t>2025/12/12</a:t>
             </a:fld>
             <a:endParaRPr kumimoji="1" lang="ja-JP" altLang="en-US"/>
           </a:p>
@@ -2047,7 +2047,7 @@
           <a:p>
             <a:fld id="{E9CC885B-4903-4D54-9A93-00025F12DED9}" type="datetimeFigureOut">
               <a:rPr kumimoji="1" lang="ja-JP" altLang="en-US" smtClean="0"/>
-              <a:t>2025/12/11</a:t>
+              <a:t>2025/12/12</a:t>
             </a:fld>
             <a:endParaRPr kumimoji="1" lang="ja-JP" altLang="en-US"/>
           </a:p>
@@ -2188,7 +2188,7 @@
           <a:p>
             <a:fld id="{E9CC885B-4903-4D54-9A93-00025F12DED9}" type="datetimeFigureOut">
               <a:rPr kumimoji="1" lang="ja-JP" altLang="en-US" smtClean="0"/>
-              <a:t>2025/12/11</a:t>
+              <a:t>2025/12/12</a:t>
             </a:fld>
             <a:endParaRPr kumimoji="1" lang="ja-JP" altLang="en-US"/>
           </a:p>
@@ -2301,7 +2301,7 @@
           <a:p>
             <a:fld id="{E9CC885B-4903-4D54-9A93-00025F12DED9}" type="datetimeFigureOut">
               <a:rPr kumimoji="1" lang="ja-JP" altLang="en-US" smtClean="0"/>
-              <a:t>2025/12/11</a:t>
+              <a:t>2025/12/12</a:t>
             </a:fld>
             <a:endParaRPr kumimoji="1" lang="ja-JP" altLang="en-US"/>
           </a:p>
@@ -2644,7 +2644,7 @@
           <a:p>
             <a:fld id="{E9CC885B-4903-4D54-9A93-00025F12DED9}" type="datetimeFigureOut">
               <a:rPr kumimoji="1" lang="ja-JP" altLang="en-US" smtClean="0"/>
-              <a:t>2025/12/11</a:t>
+              <a:t>2025/12/12</a:t>
             </a:fld>
             <a:endParaRPr kumimoji="1" lang="ja-JP" altLang="en-US"/>
           </a:p>
@@ -2932,7 +2932,7 @@
           <a:p>
             <a:fld id="{E9CC885B-4903-4D54-9A93-00025F12DED9}" type="datetimeFigureOut">
               <a:rPr kumimoji="1" lang="ja-JP" altLang="en-US" smtClean="0"/>
-              <a:t>2025/12/11</a:t>
+              <a:t>2025/12/12</a:t>
             </a:fld>
             <a:endParaRPr kumimoji="1" lang="ja-JP" altLang="en-US"/>
           </a:p>
@@ -3205,7 +3205,7 @@
           <a:p>
             <a:fld id="{E9CC885B-4903-4D54-9A93-00025F12DED9}" type="datetimeFigureOut">
               <a:rPr kumimoji="1" lang="ja-JP" altLang="en-US" smtClean="0"/>
-              <a:t>2025/12/11</a:t>
+              <a:t>2025/12/12</a:t>
             </a:fld>
             <a:endParaRPr kumimoji="1" lang="ja-JP" altLang="en-US"/>
           </a:p>
@@ -5852,7 +5852,15 @@
           <a:p>
             <a:r>
               <a:rPr lang="ja-JP" altLang="en-US" sz="2400" dirty="0"/>
-              <a:t>授業では代表的なものだけ紹介します。</a:t>
+              <a:t>授業では代表的</a:t>
+            </a:r>
+            <a:r>
+              <a:rPr lang="ja-JP" altLang="en-US" sz="2400"/>
+              <a:t>なものを紹介だけします</a:t>
+            </a:r>
+            <a:r>
+              <a:rPr lang="ja-JP" altLang="en-US" sz="2400" dirty="0"/>
+              <a:t>。</a:t>
             </a:r>
             <a:endParaRPr lang="en-US" altLang="ja-JP" sz="2400" dirty="0"/>
           </a:p>

--- a/ゲーム科3年/00_前期/オンラインゲームプログラミングⅠ/11_当たり判定.pptx
+++ b/ゲーム科3年/00_前期/オンラインゲームプログラミングⅠ/11_当たり判定.pptx
@@ -267,7 +267,7 @@
           <a:p>
             <a:fld id="{E9CC885B-4903-4D54-9A93-00025F12DED9}" type="datetimeFigureOut">
               <a:rPr kumimoji="1" lang="ja-JP" altLang="en-US" smtClean="0"/>
-              <a:t>2025/12/12</a:t>
+              <a:t>2026/1/5</a:t>
             </a:fld>
             <a:endParaRPr kumimoji="1" lang="ja-JP" altLang="en-US"/>
           </a:p>
@@ -497,7 +497,7 @@
           <a:p>
             <a:fld id="{E9CC885B-4903-4D54-9A93-00025F12DED9}" type="datetimeFigureOut">
               <a:rPr kumimoji="1" lang="ja-JP" altLang="en-US" smtClean="0"/>
-              <a:t>2025/12/12</a:t>
+              <a:t>2026/1/5</a:t>
             </a:fld>
             <a:endParaRPr kumimoji="1" lang="ja-JP" altLang="en-US"/>
           </a:p>
@@ -737,7 +737,7 @@
           <a:p>
             <a:fld id="{E9CC885B-4903-4D54-9A93-00025F12DED9}" type="datetimeFigureOut">
               <a:rPr kumimoji="1" lang="ja-JP" altLang="en-US" smtClean="0"/>
-              <a:t>2025/12/12</a:t>
+              <a:t>2026/1/5</a:t>
             </a:fld>
             <a:endParaRPr kumimoji="1" lang="ja-JP" altLang="en-US"/>
           </a:p>
@@ -967,7 +967,7 @@
           <a:p>
             <a:fld id="{E9CC885B-4903-4D54-9A93-00025F12DED9}" type="datetimeFigureOut">
               <a:rPr kumimoji="1" lang="ja-JP" altLang="en-US" smtClean="0"/>
-              <a:t>2025/12/12</a:t>
+              <a:t>2026/1/5</a:t>
             </a:fld>
             <a:endParaRPr kumimoji="1" lang="ja-JP" altLang="en-US"/>
           </a:p>
@@ -1242,7 +1242,7 @@
           <a:p>
             <a:fld id="{E9CC885B-4903-4D54-9A93-00025F12DED9}" type="datetimeFigureOut">
               <a:rPr kumimoji="1" lang="ja-JP" altLang="en-US" smtClean="0"/>
-              <a:t>2025/12/12</a:t>
+              <a:t>2026/1/5</a:t>
             </a:fld>
             <a:endParaRPr kumimoji="1" lang="ja-JP" altLang="en-US"/>
           </a:p>
@@ -1571,7 +1571,7 @@
           <a:p>
             <a:fld id="{E9CC885B-4903-4D54-9A93-00025F12DED9}" type="datetimeFigureOut">
               <a:rPr kumimoji="1" lang="ja-JP" altLang="en-US" smtClean="0"/>
-              <a:t>2025/12/12</a:t>
+              <a:t>2026/1/5</a:t>
             </a:fld>
             <a:endParaRPr kumimoji="1" lang="ja-JP" altLang="en-US"/>
           </a:p>
@@ -2047,7 +2047,7 @@
           <a:p>
             <a:fld id="{E9CC885B-4903-4D54-9A93-00025F12DED9}" type="datetimeFigureOut">
               <a:rPr kumimoji="1" lang="ja-JP" altLang="en-US" smtClean="0"/>
-              <a:t>2025/12/12</a:t>
+              <a:t>2026/1/5</a:t>
             </a:fld>
             <a:endParaRPr kumimoji="1" lang="ja-JP" altLang="en-US"/>
           </a:p>
@@ -2188,7 +2188,7 @@
           <a:p>
             <a:fld id="{E9CC885B-4903-4D54-9A93-00025F12DED9}" type="datetimeFigureOut">
               <a:rPr kumimoji="1" lang="ja-JP" altLang="en-US" smtClean="0"/>
-              <a:t>2025/12/12</a:t>
+              <a:t>2026/1/5</a:t>
             </a:fld>
             <a:endParaRPr kumimoji="1" lang="ja-JP" altLang="en-US"/>
           </a:p>
@@ -2301,7 +2301,7 @@
           <a:p>
             <a:fld id="{E9CC885B-4903-4D54-9A93-00025F12DED9}" type="datetimeFigureOut">
               <a:rPr kumimoji="1" lang="ja-JP" altLang="en-US" smtClean="0"/>
-              <a:t>2025/12/12</a:t>
+              <a:t>2026/1/5</a:t>
             </a:fld>
             <a:endParaRPr kumimoji="1" lang="ja-JP" altLang="en-US"/>
           </a:p>
@@ -2644,7 +2644,7 @@
           <a:p>
             <a:fld id="{E9CC885B-4903-4D54-9A93-00025F12DED9}" type="datetimeFigureOut">
               <a:rPr kumimoji="1" lang="ja-JP" altLang="en-US" smtClean="0"/>
-              <a:t>2025/12/12</a:t>
+              <a:t>2026/1/5</a:t>
             </a:fld>
             <a:endParaRPr kumimoji="1" lang="ja-JP" altLang="en-US"/>
           </a:p>
@@ -2932,7 +2932,7 @@
           <a:p>
             <a:fld id="{E9CC885B-4903-4D54-9A93-00025F12DED9}" type="datetimeFigureOut">
               <a:rPr kumimoji="1" lang="ja-JP" altLang="en-US" smtClean="0"/>
-              <a:t>2025/12/12</a:t>
+              <a:t>2026/1/5</a:t>
             </a:fld>
             <a:endParaRPr kumimoji="1" lang="ja-JP" altLang="en-US"/>
           </a:p>
@@ -3205,7 +3205,7 @@
           <a:p>
             <a:fld id="{E9CC885B-4903-4D54-9A93-00025F12DED9}" type="datetimeFigureOut">
               <a:rPr kumimoji="1" lang="ja-JP" altLang="en-US" smtClean="0"/>
-              <a:t>2025/12/12</a:t>
+              <a:t>2026/1/5</a:t>
             </a:fld>
             <a:endParaRPr kumimoji="1" lang="ja-JP" altLang="en-US"/>
           </a:p>
@@ -5852,15 +5852,7 @@
           <a:p>
             <a:r>
               <a:rPr lang="ja-JP" altLang="en-US" sz="2400" dirty="0"/>
-              <a:t>授業では代表的</a:t>
-            </a:r>
-            <a:r>
-              <a:rPr lang="ja-JP" altLang="en-US" sz="2400"/>
-              <a:t>なものを紹介だけします</a:t>
-            </a:r>
-            <a:r>
-              <a:rPr lang="ja-JP" altLang="en-US" sz="2400" dirty="0"/>
-              <a:t>。</a:t>
+              <a:t>授業では代表的なものを紹介だけします。</a:t>
             </a:r>
             <a:endParaRPr lang="en-US" altLang="ja-JP" sz="2400" dirty="0"/>
           </a:p>
@@ -5884,10 +5876,10 @@
           </a:p>
           <a:p>
             <a:r>
-              <a:rPr lang="ja-JP" altLang="en-US" sz="2400" dirty="0"/>
+              <a:rPr lang="ja-JP" altLang="en-US" sz="2400" b="1" dirty="0"/>
               <a:t>・クライアント側でも当たり判定をしてめり込まないようにする</a:t>
             </a:r>
-            <a:endParaRPr lang="en-US" altLang="ja-JP" sz="2400" dirty="0"/>
+            <a:endParaRPr lang="en-US" altLang="ja-JP" sz="2400" b="1" dirty="0"/>
           </a:p>
           <a:p>
             <a:r>
@@ -5901,10 +5893,10 @@
           </a:p>
           <a:p>
             <a:r>
-              <a:rPr lang="ja-JP" altLang="en-US" sz="2400" dirty="0"/>
+              <a:rPr lang="ja-JP" altLang="en-US" sz="2400" b="1" dirty="0"/>
               <a:t>・通信データに番号を割り当て、番号ごとの座標で同期する</a:t>
             </a:r>
-            <a:endParaRPr lang="en-US" altLang="ja-JP" sz="2400" dirty="0"/>
+            <a:endParaRPr lang="en-US" altLang="ja-JP" sz="2400" b="1" dirty="0"/>
           </a:p>
           <a:p>
             <a:r>
@@ -5918,18 +5910,18 @@
           </a:p>
           <a:p>
             <a:r>
-              <a:rPr lang="ja-JP" altLang="en-US" sz="2400" dirty="0"/>
+              <a:rPr lang="ja-JP" altLang="en-US" sz="2400" b="1" dirty="0"/>
               <a:t>・上</a:t>
             </a:r>
             <a:r>
-              <a:rPr lang="en-US" altLang="ja-JP" sz="2400" dirty="0"/>
+              <a:rPr lang="en-US" altLang="ja-JP" sz="2400" b="1" dirty="0"/>
               <a:t>2</a:t>
             </a:r>
             <a:r>
-              <a:rPr lang="ja-JP" altLang="en-US" sz="2400" dirty="0"/>
+              <a:rPr lang="ja-JP" altLang="en-US" sz="2400" b="1" dirty="0"/>
               <a:t>つの対策をした上で、座標を線形補完する</a:t>
             </a:r>
-            <a:endParaRPr lang="en-US" altLang="ja-JP" sz="2400" dirty="0"/>
+            <a:endParaRPr lang="en-US" altLang="ja-JP" sz="2400" b="1" dirty="0"/>
           </a:p>
           <a:p>
             <a:r>

--- a/ゲーム科3年/00_前期/オンラインゲームプログラミングⅠ/11_当たり判定.pptx
+++ b/ゲーム科3年/00_前期/オンラインゲームプログラミングⅠ/11_当たり判定.pptx
@@ -267,7 +267,7 @@
           <a:p>
             <a:fld id="{E9CC885B-4903-4D54-9A93-00025F12DED9}" type="datetimeFigureOut">
               <a:rPr kumimoji="1" lang="ja-JP" altLang="en-US" smtClean="0"/>
-              <a:t>2026/1/5</a:t>
+              <a:t>2026/2/6</a:t>
             </a:fld>
             <a:endParaRPr kumimoji="1" lang="ja-JP" altLang="en-US"/>
           </a:p>
@@ -497,7 +497,7 @@
           <a:p>
             <a:fld id="{E9CC885B-4903-4D54-9A93-00025F12DED9}" type="datetimeFigureOut">
               <a:rPr kumimoji="1" lang="ja-JP" altLang="en-US" smtClean="0"/>
-              <a:t>2026/1/5</a:t>
+              <a:t>2026/2/6</a:t>
             </a:fld>
             <a:endParaRPr kumimoji="1" lang="ja-JP" altLang="en-US"/>
           </a:p>
@@ -737,7 +737,7 @@
           <a:p>
             <a:fld id="{E9CC885B-4903-4D54-9A93-00025F12DED9}" type="datetimeFigureOut">
               <a:rPr kumimoji="1" lang="ja-JP" altLang="en-US" smtClean="0"/>
-              <a:t>2026/1/5</a:t>
+              <a:t>2026/2/6</a:t>
             </a:fld>
             <a:endParaRPr kumimoji="1" lang="ja-JP" altLang="en-US"/>
           </a:p>
@@ -967,7 +967,7 @@
           <a:p>
             <a:fld id="{E9CC885B-4903-4D54-9A93-00025F12DED9}" type="datetimeFigureOut">
               <a:rPr kumimoji="1" lang="ja-JP" altLang="en-US" smtClean="0"/>
-              <a:t>2026/1/5</a:t>
+              <a:t>2026/2/6</a:t>
             </a:fld>
             <a:endParaRPr kumimoji="1" lang="ja-JP" altLang="en-US"/>
           </a:p>
@@ -1242,7 +1242,7 @@
           <a:p>
             <a:fld id="{E9CC885B-4903-4D54-9A93-00025F12DED9}" type="datetimeFigureOut">
               <a:rPr kumimoji="1" lang="ja-JP" altLang="en-US" smtClean="0"/>
-              <a:t>2026/1/5</a:t>
+              <a:t>2026/2/6</a:t>
             </a:fld>
             <a:endParaRPr kumimoji="1" lang="ja-JP" altLang="en-US"/>
           </a:p>
@@ -1571,7 +1571,7 @@
           <a:p>
             <a:fld id="{E9CC885B-4903-4D54-9A93-00025F12DED9}" type="datetimeFigureOut">
               <a:rPr kumimoji="1" lang="ja-JP" altLang="en-US" smtClean="0"/>
-              <a:t>2026/1/5</a:t>
+              <a:t>2026/2/6</a:t>
             </a:fld>
             <a:endParaRPr kumimoji="1" lang="ja-JP" altLang="en-US"/>
           </a:p>
@@ -2047,7 +2047,7 @@
           <a:p>
             <a:fld id="{E9CC885B-4903-4D54-9A93-00025F12DED9}" type="datetimeFigureOut">
               <a:rPr kumimoji="1" lang="ja-JP" altLang="en-US" smtClean="0"/>
-              <a:t>2026/1/5</a:t>
+              <a:t>2026/2/6</a:t>
             </a:fld>
             <a:endParaRPr kumimoji="1" lang="ja-JP" altLang="en-US"/>
           </a:p>
@@ -2188,7 +2188,7 @@
           <a:p>
             <a:fld id="{E9CC885B-4903-4D54-9A93-00025F12DED9}" type="datetimeFigureOut">
               <a:rPr kumimoji="1" lang="ja-JP" altLang="en-US" smtClean="0"/>
-              <a:t>2026/1/5</a:t>
+              <a:t>2026/2/6</a:t>
             </a:fld>
             <a:endParaRPr kumimoji="1" lang="ja-JP" altLang="en-US"/>
           </a:p>
@@ -2301,7 +2301,7 @@
           <a:p>
             <a:fld id="{E9CC885B-4903-4D54-9A93-00025F12DED9}" type="datetimeFigureOut">
               <a:rPr kumimoji="1" lang="ja-JP" altLang="en-US" smtClean="0"/>
-              <a:t>2026/1/5</a:t>
+              <a:t>2026/2/6</a:t>
             </a:fld>
             <a:endParaRPr kumimoji="1" lang="ja-JP" altLang="en-US"/>
           </a:p>
@@ -2644,7 +2644,7 @@
           <a:p>
             <a:fld id="{E9CC885B-4903-4D54-9A93-00025F12DED9}" type="datetimeFigureOut">
               <a:rPr kumimoji="1" lang="ja-JP" altLang="en-US" smtClean="0"/>
-              <a:t>2026/1/5</a:t>
+              <a:t>2026/2/6</a:t>
             </a:fld>
             <a:endParaRPr kumimoji="1" lang="ja-JP" altLang="en-US"/>
           </a:p>
@@ -2932,7 +2932,7 @@
           <a:p>
             <a:fld id="{E9CC885B-4903-4D54-9A93-00025F12DED9}" type="datetimeFigureOut">
               <a:rPr kumimoji="1" lang="ja-JP" altLang="en-US" smtClean="0"/>
-              <a:t>2026/1/5</a:t>
+              <a:t>2026/2/6</a:t>
             </a:fld>
             <a:endParaRPr kumimoji="1" lang="ja-JP" altLang="en-US"/>
           </a:p>
@@ -3205,7 +3205,7 @@
           <a:p>
             <a:fld id="{E9CC885B-4903-4D54-9A93-00025F12DED9}" type="datetimeFigureOut">
               <a:rPr kumimoji="1" lang="ja-JP" altLang="en-US" smtClean="0"/>
-              <a:t>2026/1/5</a:t>
+              <a:t>2026/2/6</a:t>
             </a:fld>
             <a:endParaRPr kumimoji="1" lang="ja-JP" altLang="en-US"/>
           </a:p>
@@ -4444,7 +4444,7 @@
         <p:spPr>
           <a:xfrm>
             <a:off x="567542" y="1216429"/>
-            <a:ext cx="8186857" cy="461665"/>
+            <a:ext cx="7263527" cy="461665"/>
           </a:xfrm>
           <a:prstGeom prst="rect">
             <a:avLst/>
@@ -4459,7 +4459,7 @@
           <a:p>
             <a:r>
               <a:rPr lang="ja-JP" altLang="en-US" sz="2400" dirty="0"/>
-              <a:t>前回の座標を確定させる処理の後で当たり判定をします。</a:t>
+              <a:t>座標を確定させる処理の後で当たり判定をします。</a:t>
             </a:r>
             <a:endParaRPr lang="en-US" altLang="ja-JP" sz="2400" dirty="0"/>
           </a:p>

--- a/ゲーム科3年/00_前期/オンラインゲームプログラミングⅠ/11_当たり判定.pptx
+++ b/ゲーム科3年/00_前期/オンラインゲームプログラミングⅠ/11_当たり判定.pptx
@@ -267,7 +267,7 @@
           <a:p>
             <a:fld id="{E9CC885B-4903-4D54-9A93-00025F12DED9}" type="datetimeFigureOut">
               <a:rPr kumimoji="1" lang="ja-JP" altLang="en-US" smtClean="0"/>
-              <a:t>2026/2/6</a:t>
+              <a:t>2026/5/18</a:t>
             </a:fld>
             <a:endParaRPr kumimoji="1" lang="ja-JP" altLang="en-US"/>
           </a:p>
@@ -497,7 +497,7 @@
           <a:p>
             <a:fld id="{E9CC885B-4903-4D54-9A93-00025F12DED9}" type="datetimeFigureOut">
               <a:rPr kumimoji="1" lang="ja-JP" altLang="en-US" smtClean="0"/>
-              <a:t>2026/2/6</a:t>
+              <a:t>2026/5/18</a:t>
             </a:fld>
             <a:endParaRPr kumimoji="1" lang="ja-JP" altLang="en-US"/>
           </a:p>
@@ -737,7 +737,7 @@
           <a:p>
             <a:fld id="{E9CC885B-4903-4D54-9A93-00025F12DED9}" type="datetimeFigureOut">
               <a:rPr kumimoji="1" lang="ja-JP" altLang="en-US" smtClean="0"/>
-              <a:t>2026/2/6</a:t>
+              <a:t>2026/5/18</a:t>
             </a:fld>
             <a:endParaRPr kumimoji="1" lang="ja-JP" altLang="en-US"/>
           </a:p>
@@ -967,7 +967,7 @@
           <a:p>
             <a:fld id="{E9CC885B-4903-4D54-9A93-00025F12DED9}" type="datetimeFigureOut">
               <a:rPr kumimoji="1" lang="ja-JP" altLang="en-US" smtClean="0"/>
-              <a:t>2026/2/6</a:t>
+              <a:t>2026/5/18</a:t>
             </a:fld>
             <a:endParaRPr kumimoji="1" lang="ja-JP" altLang="en-US"/>
           </a:p>
@@ -1242,7 +1242,7 @@
           <a:p>
             <a:fld id="{E9CC885B-4903-4D54-9A93-00025F12DED9}" type="datetimeFigureOut">
               <a:rPr kumimoji="1" lang="ja-JP" altLang="en-US" smtClean="0"/>
-              <a:t>2026/2/6</a:t>
+              <a:t>2026/5/18</a:t>
             </a:fld>
             <a:endParaRPr kumimoji="1" lang="ja-JP" altLang="en-US"/>
           </a:p>
@@ -1571,7 +1571,7 @@
           <a:p>
             <a:fld id="{E9CC885B-4903-4D54-9A93-00025F12DED9}" type="datetimeFigureOut">
               <a:rPr kumimoji="1" lang="ja-JP" altLang="en-US" smtClean="0"/>
-              <a:t>2026/2/6</a:t>
+              <a:t>2026/5/18</a:t>
             </a:fld>
             <a:endParaRPr kumimoji="1" lang="ja-JP" altLang="en-US"/>
           </a:p>
@@ -2047,7 +2047,7 @@
           <a:p>
             <a:fld id="{E9CC885B-4903-4D54-9A93-00025F12DED9}" type="datetimeFigureOut">
               <a:rPr kumimoji="1" lang="ja-JP" altLang="en-US" smtClean="0"/>
-              <a:t>2026/2/6</a:t>
+              <a:t>2026/5/18</a:t>
             </a:fld>
             <a:endParaRPr kumimoji="1" lang="ja-JP" altLang="en-US"/>
           </a:p>
@@ -2188,7 +2188,7 @@
           <a:p>
             <a:fld id="{E9CC885B-4903-4D54-9A93-00025F12DED9}" type="datetimeFigureOut">
               <a:rPr kumimoji="1" lang="ja-JP" altLang="en-US" smtClean="0"/>
-              <a:t>2026/2/6</a:t>
+              <a:t>2026/5/18</a:t>
             </a:fld>
             <a:endParaRPr kumimoji="1" lang="ja-JP" altLang="en-US"/>
           </a:p>
@@ -2301,7 +2301,7 @@
           <a:p>
             <a:fld id="{E9CC885B-4903-4D54-9A93-00025F12DED9}" type="datetimeFigureOut">
               <a:rPr kumimoji="1" lang="ja-JP" altLang="en-US" smtClean="0"/>
-              <a:t>2026/2/6</a:t>
+              <a:t>2026/5/18</a:t>
             </a:fld>
             <a:endParaRPr kumimoji="1" lang="ja-JP" altLang="en-US"/>
           </a:p>
@@ -2644,7 +2644,7 @@
           <a:p>
             <a:fld id="{E9CC885B-4903-4D54-9A93-00025F12DED9}" type="datetimeFigureOut">
               <a:rPr kumimoji="1" lang="ja-JP" altLang="en-US" smtClean="0"/>
-              <a:t>2026/2/6</a:t>
+              <a:t>2026/5/18</a:t>
             </a:fld>
             <a:endParaRPr kumimoji="1" lang="ja-JP" altLang="en-US"/>
           </a:p>
@@ -2932,7 +2932,7 @@
           <a:p>
             <a:fld id="{E9CC885B-4903-4D54-9A93-00025F12DED9}" type="datetimeFigureOut">
               <a:rPr kumimoji="1" lang="ja-JP" altLang="en-US" smtClean="0"/>
-              <a:t>2026/2/6</a:t>
+              <a:t>2026/5/18</a:t>
             </a:fld>
             <a:endParaRPr kumimoji="1" lang="ja-JP" altLang="en-US"/>
           </a:p>
@@ -3205,7 +3205,7 @@
           <a:p>
             <a:fld id="{E9CC885B-4903-4D54-9A93-00025F12DED9}" type="datetimeFigureOut">
               <a:rPr kumimoji="1" lang="ja-JP" altLang="en-US" smtClean="0"/>
-              <a:t>2026/2/6</a:t>
+              <a:t>2026/5/18</a:t>
             </a:fld>
             <a:endParaRPr kumimoji="1" lang="ja-JP" altLang="en-US"/>
           </a:p>
@@ -5852,7 +5852,7 @@
           <a:p>
             <a:r>
               <a:rPr lang="ja-JP" altLang="en-US" sz="2400" dirty="0"/>
-              <a:t>授業では代表的なものを紹介だけします。</a:t>
+              <a:t>ここでは代表的なものを紹介だけします。</a:t>
             </a:r>
             <a:endParaRPr lang="en-US" altLang="ja-JP" sz="2400" dirty="0"/>
           </a:p>
